--- a/docs/slide-bao-ve.pptx
+++ b/docs/slide-bao-ve.pptx
@@ -17,6 +17,7 @@
     <p:sldId id="265" r:id="rId16"/>
     <p:sldId id="266" r:id="rId17"/>
     <p:sldId id="267" r:id="rId18"/>
+    <p:sldId id="268" r:id="rId19"/>
   </p:sldIdLst>
   <p:sldSz cx="12191695" cy="6858000" type="screen4x3"/>
   <p:notesSz cx="6858000" cy="9144000"/>
@@ -3282,7 +3283,7 @@
               <a:defRPr sz="3200"/>
             </a:pPr>
             <a:r>
-              <a:t>Hạn chế</a:t>
+              <a:t>Phân tích bổ sung</a:t>
             </a:r>
           </a:p>
         </p:txBody>
@@ -3306,7 +3307,7 @@
               <a:defRPr sz="2300"/>
             </a:pPr>
             <a:r>
-              <a:t>Chỉ 3 pin, chưa kiểm định thống kê rộng</a:t>
+              <a:t>Bỏ nhóm đặc trưng: chênh lệch không đủ kết luận nhân quả</a:t>
             </a:r>
           </a:p>
           <a:p>
@@ -3314,7 +3315,7 @@
               <a:defRPr sz="2300"/>
             </a:pPr>
             <a:r>
-              <a:t>Chưa xác minh dữ liệu gốc, chuyển miền hoặc bộ pin xe</a:t>
+              <a:t>Kiểm thử 70/30 theo thời gian: RF kém baseline SOH cuối đã biết</a:t>
             </a:r>
           </a:p>
           <a:p>
@@ -3322,7 +3323,7 @@
               <a:defRPr sz="2300"/>
             </a:pPr>
             <a:r>
-              <a:t>Chưa có tuning, ablation và RUL</a:t>
+              <a:t>Không dùng kết quả này để tuyên bố dự đoán RUL</a:t>
             </a:r>
           </a:p>
         </p:txBody>
@@ -3364,6 +3365,88 @@
               <a:defRPr sz="3200"/>
             </a:pPr>
             <a:r>
+              <a:t>Hạn chế</a:t>
+            </a:r>
+          </a:p>
+        </p:txBody>
+      </p:sp>
+      <p:sp>
+        <p:nvSpPr>
+          <p:cNvPr id="3" name="Content Placeholder 2"/>
+          <p:cNvSpPr>
+            <a:spLocks noGrp="1"/>
+          </p:cNvSpPr>
+          <p:nvPr>
+            <p:ph idx="1"/>
+          </p:nvPr>
+        </p:nvSpPr>
+        <p:spPr/>
+        <p:txBody>
+          <a:bodyPr/>
+          <a:lstStyle/>
+          <a:p>
+            <a:pPr>
+              <a:defRPr sz="2300"/>
+            </a:pPr>
+            <a:r>
+              <a:t>2 triệu phép đo vẫn chỉ là 4 pin và 636 mẫu SOH</a:t>
+            </a:r>
+          </a:p>
+          <a:p>
+            <a:pPr>
+              <a:defRPr sz="2300"/>
+            </a:pPr>
+            <a:r>
+              <a:t>Chưa có dữ liệu Việt Nam hoặc xe vận hành thực tế</a:t>
+            </a:r>
+          </a:p>
+          <a:p>
+            <a:pPr>
+              <a:defRPr sz="2300"/>
+            </a:pPr>
+            <a:r>
+              <a:t>File MAT từ bản lưu, chưa đối chiếu byte với archive S3</a:t>
+            </a:r>
+          </a:p>
+        </p:txBody>
+      </p:sp>
+    </p:spTree>
+  </p:cSld>
+  <p:clrMapOvr>
+    <a:masterClrMapping/>
+  </p:clrMapOvr>
+</p:sld>
+</file>
+
+<file path=ppt/slides/slide13.xml><?xml version="1.0" encoding="utf-8"?>
+<p:sld xmlns:a="http://schemas.openxmlformats.org/drawingml/2006/main" xmlns:p="http://schemas.openxmlformats.org/presentationml/2006/main" xmlns:r="http://schemas.openxmlformats.org/officeDocument/2006/relationships">
+  <p:cSld>
+    <p:spTree>
+      <p:nvGrpSpPr>
+        <p:cNvPr id="1" name=""/>
+        <p:cNvGrpSpPr/>
+        <p:nvPr/>
+      </p:nvGrpSpPr>
+      <p:grpSpPr/>
+      <p:sp>
+        <p:nvSpPr>
+          <p:cNvPr id="2" name="Title 1"/>
+          <p:cNvSpPr>
+            <a:spLocks noGrp="1"/>
+          </p:cNvSpPr>
+          <p:nvPr>
+            <p:ph type="title"/>
+          </p:nvPr>
+        </p:nvSpPr>
+        <p:spPr/>
+        <p:txBody>
+          <a:bodyPr/>
+          <a:lstStyle/>
+          <a:p>
+            <a:pPr>
+              <a:defRPr sz="3200"/>
+            </a:pPr>
+            <a:r>
               <a:t>Kết luận và bước tiếp theo</a:t>
             </a:r>
           </a:p>
@@ -3388,7 +3471,7 @@
               <a:defRPr sz="2300"/>
             </a:pPr>
             <a:r>
-              <a:t>Pipeline, kiểm thử, demo và kết quả có thể tái lập</a:t>
+              <a:t>Pipeline, dữ liệu sạch, kiểm thử, demo và tài liệu tái lập</a:t>
             </a:r>
           </a:p>
           <a:p>
@@ -3396,7 +3479,7 @@
               <a:defRPr sz="2300"/>
             </a:pPr>
             <a:r>
-              <a:t>Xác minh MAT gốc và chạy lại</a:t>
+              <a:t>Bổ sung pin và điều kiện vận hành; đối chiếu kho phát hành</a:t>
             </a:r>
           </a:p>
           <a:p>
@@ -3404,7 +3487,7 @@
               <a:defRPr sz="2300"/>
             </a:pPr>
             <a:r>
-              <a:t>Thêm pin, điều kiện vận hành và tổng quan nghiên cứu</a:t>
+              <a:t>Giảng viên xác nhận phạm vi và hình thức bản nộp</a:t>
             </a:r>
           </a:p>
         </p:txBody>
@@ -3552,7 +3635,7 @@
               <a:defRPr sz="2300"/>
             </a:pPr>
             <a:r>
-              <a:t>Bản CSV cộng đồng dẫn nguồn NASA; ghim commit và SHA-256</a:t>
+              <a:t>Đọc MATLAB từ bản lưu công khai dẫn nguồn NASA</a:t>
             </a:r>
           </a:p>
           <a:p>
@@ -3560,7 +3643,7 @@
               <a:defRPr sz="2300"/>
             </a:pPr>
             <a:r>
-              <a:t>B05/B07/B18 · 468 chu kỳ</a:t>
+              <a:t>2.089.048 dòng sạch; 4 pin; 636 chu kỳ xả</a:t>
             </a:r>
           </a:p>
           <a:p>
@@ -3568,7 +3651,7 @@
               <a:defRPr sz="2300"/>
             </a:pPr>
             <a:r>
-              <a:t>Chưa đối chiếu MAT gốc; cần xác minh trục thời gian giống nhau</a:t>
+              <a:t>2 dòng sạc thiếu tín hiệu được loại có nhật ký; không nhân bản</a:t>
             </a:r>
           </a:p>
         </p:txBody>
@@ -3716,7 +3799,7 @@
               <a:defRPr sz="2300"/>
             </a:pPr>
             <a:r>
-              <a:t>Leave-one-battery-out: 3 vòng</a:t>
+              <a:t>Leave-one-battery-out: 4 vòng</a:t>
             </a:r>
           </a:p>
           <a:p>
@@ -3724,7 +3807,7 @@
               <a:defRPr sz="2300"/>
             </a:pPr>
             <a:r>
-              <a:t>Huấn luyện hai pin, kiểm thử pin còn lại</a:t>
+              <a:t>Huấn luyện ba pin, kiểm thử pin còn lại</a:t>
             </a:r>
           </a:p>
           <a:p>
@@ -3880,7 +3963,7 @@
               <a:defRPr sz="2300"/>
             </a:pPr>
             <a:r>
-              <a:t>RF macro MAE: 1.241 điểm phần trăm SOH</a:t>
+              <a:t>RF macro MAE: 2.724 điểm phần trăm SOH</a:t>
             </a:r>
           </a:p>
           <a:p>
@@ -3888,7 +3971,7 @@
               <a:defRPr sz="2300"/>
             </a:pPr>
             <a:r>
-              <a:t>RF macro RMSE: 1.628</a:t>
+              <a:t>RF macro RMSE: 3.189</a:t>
             </a:r>
           </a:p>
           <a:p>
@@ -4059,8 +4142,8 @@
         </p:blipFill>
         <p:spPr>
           <a:xfrm>
-            <a:off x="548640" y="1463040"/>
-            <a:ext cx="10972800" cy="2926080"/>
+            <a:off x="2560320" y="1463040"/>
+            <a:ext cx="7406640" cy="4937760"/>
           </a:xfrm>
           <a:prstGeom prst="rect">
             <a:avLst/>

--- a/docs/slide-bao-ve.pptx
+++ b/docs/slide-bao-ve.pptx
@@ -3225,7 +3225,7 @@
               <a:defRPr sz="2300"/>
             </a:pPr>
             <a:r>
-              <a:t>Tab dữ liệu và kết quả kiểm thử</a:t>
+              <a:t>PinLab: tổng quan, tra cứu, đánh giá, dự đoán, hồ sơ</a:t>
             </a:r>
           </a:p>
           <a:p>
@@ -3233,7 +3233,7 @@
               <a:defRPr sz="2300"/>
             </a:pPr>
             <a:r>
-              <a:t>Nhận CSV một chu kỳ; kiểm tra đơn vị và cửa sổ</a:t>
+              <a:t>CSV một chu kỳ; tên cột gốc hoặc tiếng Việt</a:t>
             </a:r>
           </a:p>
           <a:p>

--- a/docs/slide-bao-ve.pptx
+++ b/docs/slide-bao-ve.pptx
@@ -3225,7 +3225,7 @@
               <a:defRPr sz="2300"/>
             </a:pPr>
             <a:r>
-              <a:t>PinLab: tổng quan, tra cứu, đánh giá, dự đoán, hồ sơ</a:t>
+              <a:t>Vincent D · Arial · 6 mục chức năng</a:t>
             </a:r>
           </a:p>
           <a:p>
@@ -3233,7 +3233,7 @@
               <a:defRPr sz="2300"/>
             </a:pPr>
             <a:r>
-              <a:t>CSV một chu kỳ; tên cột gốc hoặc tiếng Việt</a:t>
+              <a:t>Dự đoán đơn/lô, lịch sử và phiếu kết quả HTML</a:t>
             </a:r>
           </a:p>
           <a:p>

--- a/docs/slide-bao-ve.pptx
+++ b/docs/slide-bao-ve.pptx
@@ -18,6 +18,11 @@
     <p:sldId id="266" r:id="rId17"/>
     <p:sldId id="267" r:id="rId18"/>
     <p:sldId id="268" r:id="rId19"/>
+    <p:sldId id="269" r:id="rId20"/>
+    <p:sldId id="270" r:id="rId21"/>
+    <p:sldId id="271" r:id="rId22"/>
+    <p:sldId id="272" r:id="rId23"/>
+    <p:sldId id="273" r:id="rId24"/>
   </p:sldIdLst>
   <p:sldSz cx="12191695" cy="6858000" type="screen4x3"/>
   <p:notesSz cx="6858000" cy="9144000"/>
@@ -3093,6 +3098,14 @@
 <file path=ppt/slides/slide1.xml><?xml version="1.0" encoding="utf-8"?>
 <p:sld xmlns:a="http://schemas.openxmlformats.org/drawingml/2006/main" xmlns:p="http://schemas.openxmlformats.org/presentationml/2006/main" xmlns:r="http://schemas.openxmlformats.org/officeDocument/2006/relationships">
   <p:cSld>
+    <p:bg>
+      <p:bgPr>
+        <a:solidFill>
+          <a:srgbClr val="F6F8F3"/>
+        </a:solidFill>
+        <a:effectLst/>
+      </p:bgPr>
+    </p:bg>
     <p:spTree>
       <p:nvGrpSpPr>
         <p:cNvPr id="1" name=""/>
@@ -3102,64 +3115,286 @@
       <p:grpSpPr/>
       <p:sp>
         <p:nvSpPr>
-          <p:cNvPr id="2" name="Title 1"/>
-          <p:cNvSpPr>
-            <a:spLocks noGrp="1"/>
-          </p:cNvSpPr>
-          <p:nvPr>
-            <p:ph type="title"/>
-          </p:nvPr>
-        </p:nvSpPr>
-        <p:spPr/>
-        <p:txBody>
-          <a:bodyPr/>
-          <a:lstStyle/>
-          <a:p>
-            <a:pPr>
-              <a:defRPr sz="3200"/>
-            </a:pPr>
-            <a:r>
-              <a:t>Phân tích và dự đoán SOH pin</a:t>
-            </a:r>
-          </a:p>
-        </p:txBody>
-      </p:sp>
-      <p:sp>
-        <p:nvSpPr>
-          <p:cNvPr id="3" name="Content Placeholder 2"/>
-          <p:cNvSpPr>
-            <a:spLocks noGrp="1"/>
-          </p:cNvSpPr>
-          <p:nvPr>
-            <p:ph idx="1"/>
-          </p:nvPr>
-        </p:nvSpPr>
-        <p:spPr/>
-        <p:txBody>
-          <a:bodyPr/>
-          <a:lstStyle/>
-          <a:p>
-            <a:pPr>
-              <a:defRPr sz="2300"/>
-            </a:pPr>
-            <a:r>
-              <a:t>Nguyễn Văn Duy · 2311553949 · 23DTH2A</a:t>
-            </a:r>
-          </a:p>
-          <a:p>
-            <a:pPr>
-              <a:defRPr sz="2300"/>
-            </a:pPr>
-            <a:r>
-              <a:t>GVHD theo phiếu: ThS. Vương Xuân Chí</a:t>
-            </a:r>
-          </a:p>
-          <a:p>
-            <a:pPr>
-              <a:defRPr sz="2300"/>
-            </a:pPr>
-            <a:r>
-              <a:t>Bản nghiên cứu để trao đổi; chưa nghiệm thu</a:t>
+          <p:cNvPr id="2" name="Rectangle 1"/>
+          <p:cNvSpPr/>
+          <p:nvPr/>
+        </p:nvSpPr>
+        <p:spPr>
+          <a:xfrm>
+            <a:off x="0" y="0"/>
+            <a:ext cx="146304" cy="6858000"/>
+          </a:xfrm>
+          <a:prstGeom prst="rect">
+            <a:avLst/>
+          </a:prstGeom>
+          <a:solidFill>
+            <a:srgbClr val="087F70"/>
+          </a:solidFill>
+          <a:ln>
+            <a:noFill/>
+          </a:ln>
+        </p:spPr>
+        <p:style>
+          <a:lnRef idx="1">
+            <a:schemeClr val="accent1"/>
+          </a:lnRef>
+          <a:fillRef idx="3">
+            <a:schemeClr val="accent1"/>
+          </a:fillRef>
+          <a:effectRef idx="2">
+            <a:schemeClr val="accent1"/>
+          </a:effectRef>
+          <a:fontRef idx="minor">
+            <a:schemeClr val="lt1"/>
+          </a:fontRef>
+        </p:style>
+        <p:txBody>
+          <a:bodyPr rtlCol="0" anchor="ctr"/>
+          <a:lstStyle/>
+          <a:p>
+            <a:pPr algn="ctr"/>
+          </a:p>
+        </p:txBody>
+      </p:sp>
+      <p:sp>
+        <p:nvSpPr>
+          <p:cNvPr id="3" name="TextBox 2"/>
+          <p:cNvSpPr txBox="1"/>
+          <p:nvPr/>
+        </p:nvSpPr>
+        <p:spPr>
+          <a:xfrm>
+            <a:off x="594360" y="274320"/>
+            <a:ext cx="10972800" cy="365760"/>
+          </a:xfrm>
+          <a:prstGeom prst="rect">
+            <a:avLst/>
+          </a:prstGeom>
+          <a:noFill/>
+        </p:spPr>
+        <p:txBody>
+          <a:bodyPr wrap="square">
+            <a:spAutoFit/>
+          </a:bodyPr>
+          <a:lstStyle/>
+          <a:p>
+            <a:pPr>
+              <a:spcAft>
+                <a:spcPts val="1600"/>
+              </a:spcAft>
+              <a:defRPr sz="1200" b="1">
+                <a:solidFill>
+                  <a:srgbClr val="087F70"/>
+                </a:solidFill>
+                <a:latin typeface="Arial"/>
+              </a:defRPr>
+            </a:pPr>
+            <a:r>
+              <a:t>VINCENT D / NGHIÊN CỨU SỨC KHỎE PIN</a:t>
+            </a:r>
+          </a:p>
+        </p:txBody>
+      </p:sp>
+      <p:sp>
+        <p:nvSpPr>
+          <p:cNvPr id="4" name="TextBox 3"/>
+          <p:cNvSpPr txBox="1"/>
+          <p:nvPr/>
+        </p:nvSpPr>
+        <p:spPr>
+          <a:xfrm>
+            <a:off x="594360" y="868680"/>
+            <a:ext cx="10972800" cy="1188720"/>
+          </a:xfrm>
+          <a:prstGeom prst="rect">
+            <a:avLst/>
+          </a:prstGeom>
+          <a:noFill/>
+        </p:spPr>
+        <p:txBody>
+          <a:bodyPr wrap="square">
+            <a:spAutoFit/>
+          </a:bodyPr>
+          <a:lstStyle/>
+          <a:p>
+            <a:pPr>
+              <a:spcAft>
+                <a:spcPts val="1600"/>
+              </a:spcAft>
+              <a:defRPr sz="3200" b="1">
+                <a:solidFill>
+                  <a:srgbClr val="193431"/>
+                </a:solidFill>
+                <a:latin typeface="Arial"/>
+              </a:defRPr>
+            </a:pPr>
+            <a:r>
+              <a:t>Phân tích và dự đoán</a:t>
+            </a:r>
+          </a:p>
+          <a:p>
+            <a:pPr>
+              <a:spcAft>
+                <a:spcPts val="1600"/>
+              </a:spcAft>
+              <a:defRPr sz="3200" b="1">
+                <a:solidFill>
+                  <a:srgbClr val="193431"/>
+                </a:solidFill>
+                <a:latin typeface="Arial"/>
+              </a:defRPr>
+            </a:pPr>
+            <a:r>
+              <a:t>sức khỏe pin xe điện</a:t>
+            </a:r>
+          </a:p>
+        </p:txBody>
+      </p:sp>
+      <p:sp>
+        <p:nvSpPr>
+          <p:cNvPr id="5" name="TextBox 4"/>
+          <p:cNvSpPr txBox="1"/>
+          <p:nvPr/>
+        </p:nvSpPr>
+        <p:spPr>
+          <a:xfrm>
+            <a:off x="777240" y="2286000"/>
+            <a:ext cx="10789920" cy="3383280"/>
+          </a:xfrm>
+          <a:prstGeom prst="rect">
+            <a:avLst/>
+          </a:prstGeom>
+          <a:noFill/>
+        </p:spPr>
+        <p:txBody>
+          <a:bodyPr wrap="square">
+            <a:spAutoFit/>
+          </a:bodyPr>
+          <a:lstStyle/>
+          <a:p>
+            <a:pPr>
+              <a:spcAft>
+                <a:spcPts val="1600"/>
+              </a:spcAft>
+              <a:defRPr sz="2400" b="0">
+                <a:solidFill>
+                  <a:srgbClr val="193431"/>
+                </a:solidFill>
+                <a:latin typeface="Arial"/>
+              </a:defRPr>
+            </a:pPr>
+            <a:r>
+              <a:t>• Nguyễn Văn Duy · 2311553949 · 23DTH2A</a:t>
+            </a:r>
+          </a:p>
+          <a:p>
+            <a:pPr>
+              <a:spcAft>
+                <a:spcPts val="1600"/>
+              </a:spcAft>
+              <a:defRPr sz="2400" b="0">
+                <a:solidFill>
+                  <a:srgbClr val="193431"/>
+                </a:solidFill>
+                <a:latin typeface="Arial"/>
+              </a:defRPr>
+            </a:pPr>
+            <a:r>
+              <a:t>• Chuyên ngành Khoa Học Dữ Liệu</a:t>
+            </a:r>
+          </a:p>
+          <a:p>
+            <a:pPr>
+              <a:spcAft>
+                <a:spcPts val="1600"/>
+              </a:spcAft>
+              <a:defRPr sz="2400" b="0">
+                <a:solidFill>
+                  <a:srgbClr val="193431"/>
+                </a:solidFill>
+                <a:latin typeface="Arial"/>
+              </a:defRPr>
+            </a:pPr>
+            <a:r>
+              <a:t>• GVHD: ThS. Vương Xuân Chí</a:t>
+            </a:r>
+          </a:p>
+        </p:txBody>
+      </p:sp>
+      <p:sp>
+        <p:nvSpPr>
+          <p:cNvPr id="6" name="TextBox 5"/>
+          <p:cNvSpPr txBox="1"/>
+          <p:nvPr/>
+        </p:nvSpPr>
+        <p:spPr>
+          <a:xfrm>
+            <a:off x="594360" y="6446520"/>
+            <a:ext cx="10058400" cy="228600"/>
+          </a:xfrm>
+          <a:prstGeom prst="rect">
+            <a:avLst/>
+          </a:prstGeom>
+          <a:noFill/>
+        </p:spPr>
+        <p:txBody>
+          <a:bodyPr wrap="square">
+            <a:spAutoFit/>
+          </a:bodyPr>
+          <a:lstStyle/>
+          <a:p>
+            <a:pPr>
+              <a:spcAft>
+                <a:spcPts val="1600"/>
+              </a:spcAft>
+              <a:defRPr sz="1000" b="0">
+                <a:solidFill>
+                  <a:srgbClr val="60766D"/>
+                </a:solidFill>
+                <a:latin typeface="Arial"/>
+              </a:defRPr>
+            </a:pPr>
+            <a:r>
+              <a:t>Nguyễn Văn Duy · MSSV 2311553949 · Khoa Học Dữ Liệu</a:t>
+            </a:r>
+          </a:p>
+        </p:txBody>
+      </p:sp>
+      <p:sp>
+        <p:nvSpPr>
+          <p:cNvPr id="7" name="TextBox 6"/>
+          <p:cNvSpPr txBox="1"/>
+          <p:nvPr/>
+        </p:nvSpPr>
+        <p:spPr>
+          <a:xfrm>
+            <a:off x="10972800" y="6400800"/>
+            <a:ext cx="548640" cy="274320"/>
+          </a:xfrm>
+          <a:prstGeom prst="rect">
+            <a:avLst/>
+          </a:prstGeom>
+          <a:noFill/>
+        </p:spPr>
+        <p:txBody>
+          <a:bodyPr wrap="square">
+            <a:spAutoFit/>
+          </a:bodyPr>
+          <a:lstStyle/>
+          <a:p>
+            <a:pPr>
+              <a:spcAft>
+                <a:spcPts val="1600"/>
+              </a:spcAft>
+              <a:defRPr sz="1200" b="0">
+                <a:solidFill>
+                  <a:srgbClr val="087F70"/>
+                </a:solidFill>
+                <a:latin typeface="Arial"/>
+              </a:defRPr>
+            </a:pPr>
+            <a:r>
+              <a:t>01</a:t>
             </a:r>
           </a:p>
         </p:txBody>
@@ -3175,6 +3410,14 @@
 <file path=ppt/slides/slide10.xml><?xml version="1.0" encoding="utf-8"?>
 <p:sld xmlns:a="http://schemas.openxmlformats.org/drawingml/2006/main" xmlns:p="http://schemas.openxmlformats.org/presentationml/2006/main" xmlns:r="http://schemas.openxmlformats.org/officeDocument/2006/relationships">
   <p:cSld>
+    <p:bg>
+      <p:bgPr>
+        <a:solidFill>
+          <a:srgbClr val="F6F8F3"/>
+        </a:solidFill>
+        <a:effectLst/>
+      </p:bgPr>
+    </p:bg>
     <p:spTree>
       <p:nvGrpSpPr>
         <p:cNvPr id="1" name=""/>
@@ -3184,64 +3427,223 @@
       <p:grpSpPr/>
       <p:sp>
         <p:nvSpPr>
-          <p:cNvPr id="2" name="Title 1"/>
-          <p:cNvSpPr>
-            <a:spLocks noGrp="1"/>
-          </p:cNvSpPr>
-          <p:nvPr>
-            <p:ph type="title"/>
-          </p:nvPr>
-        </p:nvSpPr>
-        <p:spPr/>
-        <p:txBody>
-          <a:bodyPr/>
-          <a:lstStyle/>
-          <a:p>
-            <a:pPr>
-              <a:defRPr sz="3200"/>
-            </a:pPr>
-            <a:r>
-              <a:t>Demo</a:t>
-            </a:r>
-          </a:p>
-        </p:txBody>
-      </p:sp>
-      <p:sp>
-        <p:nvSpPr>
-          <p:cNvPr id="3" name="Content Placeholder 2"/>
-          <p:cNvSpPr>
-            <a:spLocks noGrp="1"/>
-          </p:cNvSpPr>
-          <p:nvPr>
-            <p:ph idx="1"/>
-          </p:nvPr>
-        </p:nvSpPr>
-        <p:spPr/>
-        <p:txBody>
-          <a:bodyPr/>
-          <a:lstStyle/>
-          <a:p>
-            <a:pPr>
-              <a:defRPr sz="2300"/>
-            </a:pPr>
-            <a:r>
-              <a:t>Vincent D · Arial · 6 mục chức năng</a:t>
-            </a:r>
-          </a:p>
-          <a:p>
-            <a:pPr>
-              <a:defRPr sz="2300"/>
-            </a:pPr>
-            <a:r>
-              <a:t>Dự đoán đơn/lô, lịch sử và phiếu kết quả HTML</a:t>
-            </a:r>
-          </a:p>
-          <a:p>
-            <a:pPr>
-              <a:defRPr sz="2300"/>
-            </a:pPr>
-            <a:r>
-              <a:t>Mẫu demo đã học, không phải test độc lập</a:t>
+          <p:cNvPr id="2" name="Rectangle 1"/>
+          <p:cNvSpPr/>
+          <p:nvPr/>
+        </p:nvSpPr>
+        <p:spPr>
+          <a:xfrm>
+            <a:off x="0" y="0"/>
+            <a:ext cx="146304" cy="6858000"/>
+          </a:xfrm>
+          <a:prstGeom prst="rect">
+            <a:avLst/>
+          </a:prstGeom>
+          <a:solidFill>
+            <a:srgbClr val="087F70"/>
+          </a:solidFill>
+          <a:ln>
+            <a:noFill/>
+          </a:ln>
+        </p:spPr>
+        <p:style>
+          <a:lnRef idx="1">
+            <a:schemeClr val="accent1"/>
+          </a:lnRef>
+          <a:fillRef idx="3">
+            <a:schemeClr val="accent1"/>
+          </a:fillRef>
+          <a:effectRef idx="2">
+            <a:schemeClr val="accent1"/>
+          </a:effectRef>
+          <a:fontRef idx="minor">
+            <a:schemeClr val="lt1"/>
+          </a:fontRef>
+        </p:style>
+        <p:txBody>
+          <a:bodyPr rtlCol="0" anchor="ctr"/>
+          <a:lstStyle/>
+          <a:p>
+            <a:pPr algn="ctr"/>
+          </a:p>
+        </p:txBody>
+      </p:sp>
+      <p:sp>
+        <p:nvSpPr>
+          <p:cNvPr id="3" name="TextBox 2"/>
+          <p:cNvSpPr txBox="1"/>
+          <p:nvPr/>
+        </p:nvSpPr>
+        <p:spPr>
+          <a:xfrm>
+            <a:off x="594360" y="274320"/>
+            <a:ext cx="10972800" cy="365760"/>
+          </a:xfrm>
+          <a:prstGeom prst="rect">
+            <a:avLst/>
+          </a:prstGeom>
+          <a:noFill/>
+        </p:spPr>
+        <p:txBody>
+          <a:bodyPr wrap="square">
+            <a:spAutoFit/>
+          </a:bodyPr>
+          <a:lstStyle/>
+          <a:p>
+            <a:pPr>
+              <a:spcAft>
+                <a:spcPts val="1600"/>
+              </a:spcAft>
+              <a:defRPr sz="1200" b="1">
+                <a:solidFill>
+                  <a:srgbClr val="087F70"/>
+                </a:solidFill>
+                <a:latin typeface="Arial"/>
+              </a:defRPr>
+            </a:pPr>
+            <a:r>
+              <a:t>VINCENT D / NGHIÊN CỨU SỨC KHỎE PIN</a:t>
+            </a:r>
+          </a:p>
+        </p:txBody>
+      </p:sp>
+      <p:sp>
+        <p:nvSpPr>
+          <p:cNvPr id="4" name="TextBox 3"/>
+          <p:cNvSpPr txBox="1"/>
+          <p:nvPr/>
+        </p:nvSpPr>
+        <p:spPr>
+          <a:xfrm>
+            <a:off x="594360" y="868680"/>
+            <a:ext cx="10972800" cy="1188720"/>
+          </a:xfrm>
+          <a:prstGeom prst="rect">
+            <a:avLst/>
+          </a:prstGeom>
+          <a:noFill/>
+        </p:spPr>
+        <p:txBody>
+          <a:bodyPr wrap="square">
+            <a:spAutoFit/>
+          </a:bodyPr>
+          <a:lstStyle/>
+          <a:p>
+            <a:pPr>
+              <a:spcAft>
+                <a:spcPts val="1600"/>
+              </a:spcAft>
+              <a:defRPr sz="3200" b="1">
+                <a:solidFill>
+                  <a:srgbClr val="193431"/>
+                </a:solidFill>
+                <a:latin typeface="Arial"/>
+              </a:defRPr>
+            </a:pPr>
+            <a:r>
+              <a:t>So sánh sai số</a:t>
+            </a:r>
+          </a:p>
+        </p:txBody>
+      </p:sp>
+      <p:pic>
+        <p:nvPicPr>
+          <p:cNvPr id="5" name="Picture 4" descr="model_comparison.png"/>
+          <p:cNvPicPr>
+            <a:picLocks noChangeAspect="1"/>
+          </p:cNvPicPr>
+          <p:nvPr/>
+        </p:nvPicPr>
+        <p:blipFill>
+          <a:blip r:embed="rId2"/>
+          <a:stretch>
+            <a:fillRect/>
+          </a:stretch>
+        </p:blipFill>
+        <p:spPr>
+          <a:xfrm>
+            <a:off x="952347" y="1828800"/>
+            <a:ext cx="10287000" cy="4114800"/>
+          </a:xfrm>
+          <a:prstGeom prst="rect">
+            <a:avLst/>
+          </a:prstGeom>
+        </p:spPr>
+      </p:pic>
+      <p:sp>
+        <p:nvSpPr>
+          <p:cNvPr id="6" name="TextBox 5"/>
+          <p:cNvSpPr txBox="1"/>
+          <p:nvPr/>
+        </p:nvSpPr>
+        <p:spPr>
+          <a:xfrm>
+            <a:off x="594360" y="6446520"/>
+            <a:ext cx="10058400" cy="228600"/>
+          </a:xfrm>
+          <a:prstGeom prst="rect">
+            <a:avLst/>
+          </a:prstGeom>
+          <a:noFill/>
+        </p:spPr>
+        <p:txBody>
+          <a:bodyPr wrap="square">
+            <a:spAutoFit/>
+          </a:bodyPr>
+          <a:lstStyle/>
+          <a:p>
+            <a:pPr>
+              <a:spcAft>
+                <a:spcPts val="1600"/>
+              </a:spcAft>
+              <a:defRPr sz="1000" b="0">
+                <a:solidFill>
+                  <a:srgbClr val="60766D"/>
+                </a:solidFill>
+                <a:latin typeface="Arial"/>
+              </a:defRPr>
+            </a:pPr>
+            <a:r>
+              <a:t>Nguyễn Văn Duy · MSSV 2311553949 · Khoa Học Dữ Liệu</a:t>
+            </a:r>
+          </a:p>
+        </p:txBody>
+      </p:sp>
+      <p:sp>
+        <p:nvSpPr>
+          <p:cNvPr id="7" name="TextBox 6"/>
+          <p:cNvSpPr txBox="1"/>
+          <p:nvPr/>
+        </p:nvSpPr>
+        <p:spPr>
+          <a:xfrm>
+            <a:off x="10972800" y="6400800"/>
+            <a:ext cx="548640" cy="274320"/>
+          </a:xfrm>
+          <a:prstGeom prst="rect">
+            <a:avLst/>
+          </a:prstGeom>
+          <a:noFill/>
+        </p:spPr>
+        <p:txBody>
+          <a:bodyPr wrap="square">
+            <a:spAutoFit/>
+          </a:bodyPr>
+          <a:lstStyle/>
+          <a:p>
+            <a:pPr>
+              <a:spcAft>
+                <a:spcPts val="1600"/>
+              </a:spcAft>
+              <a:defRPr sz="1200" b="0">
+                <a:solidFill>
+                  <a:srgbClr val="087F70"/>
+                </a:solidFill>
+                <a:latin typeface="Arial"/>
+              </a:defRPr>
+            </a:pPr>
+            <a:r>
+              <a:t>10</a:t>
             </a:r>
           </a:p>
         </p:txBody>
@@ -3257,6 +3659,14 @@
 <file path=ppt/slides/slide11.xml><?xml version="1.0" encoding="utf-8"?>
 <p:sld xmlns:a="http://schemas.openxmlformats.org/drawingml/2006/main" xmlns:p="http://schemas.openxmlformats.org/presentationml/2006/main" xmlns:r="http://schemas.openxmlformats.org/officeDocument/2006/relationships">
   <p:cSld>
+    <p:bg>
+      <p:bgPr>
+        <a:solidFill>
+          <a:srgbClr val="F6F8F3"/>
+        </a:solidFill>
+        <a:effectLst/>
+      </p:bgPr>
+    </p:bg>
     <p:spTree>
       <p:nvGrpSpPr>
         <p:cNvPr id="1" name=""/>
@@ -3266,64 +3676,270 @@
       <p:grpSpPr/>
       <p:sp>
         <p:nvSpPr>
-          <p:cNvPr id="2" name="Title 1"/>
-          <p:cNvSpPr>
-            <a:spLocks noGrp="1"/>
-          </p:cNvSpPr>
-          <p:nvPr>
-            <p:ph type="title"/>
-          </p:nvPr>
-        </p:nvSpPr>
-        <p:spPr/>
-        <p:txBody>
-          <a:bodyPr/>
-          <a:lstStyle/>
-          <a:p>
-            <a:pPr>
-              <a:defRPr sz="3200"/>
-            </a:pPr>
-            <a:r>
-              <a:t>Phân tích bổ sung</a:t>
-            </a:r>
-          </a:p>
-        </p:txBody>
-      </p:sp>
-      <p:sp>
-        <p:nvSpPr>
-          <p:cNvPr id="3" name="Content Placeholder 2"/>
-          <p:cNvSpPr>
-            <a:spLocks noGrp="1"/>
-          </p:cNvSpPr>
-          <p:nvPr>
-            <p:ph idx="1"/>
-          </p:nvPr>
-        </p:nvSpPr>
-        <p:spPr/>
-        <p:txBody>
-          <a:bodyPr/>
-          <a:lstStyle/>
-          <a:p>
-            <a:pPr>
-              <a:defRPr sz="2300"/>
-            </a:pPr>
-            <a:r>
-              <a:t>Bỏ nhóm đặc trưng: chênh lệch không đủ kết luận nhân quả</a:t>
-            </a:r>
-          </a:p>
-          <a:p>
-            <a:pPr>
-              <a:defRPr sz="2300"/>
-            </a:pPr>
-            <a:r>
-              <a:t>Kiểm thử 70/30 theo thời gian: RF kém baseline SOH cuối đã biết</a:t>
-            </a:r>
-          </a:p>
-          <a:p>
-            <a:pPr>
-              <a:defRPr sz="2300"/>
-            </a:pPr>
-            <a:r>
-              <a:t>Không dùng kết quả này để tuyên bố dự đoán RUL</a:t>
+          <p:cNvPr id="2" name="Rectangle 1"/>
+          <p:cNvSpPr/>
+          <p:nvPr/>
+        </p:nvSpPr>
+        <p:spPr>
+          <a:xfrm>
+            <a:off x="0" y="0"/>
+            <a:ext cx="146304" cy="6858000"/>
+          </a:xfrm>
+          <a:prstGeom prst="rect">
+            <a:avLst/>
+          </a:prstGeom>
+          <a:solidFill>
+            <a:srgbClr val="087F70"/>
+          </a:solidFill>
+          <a:ln>
+            <a:noFill/>
+          </a:ln>
+        </p:spPr>
+        <p:style>
+          <a:lnRef idx="1">
+            <a:schemeClr val="accent1"/>
+          </a:lnRef>
+          <a:fillRef idx="3">
+            <a:schemeClr val="accent1"/>
+          </a:fillRef>
+          <a:effectRef idx="2">
+            <a:schemeClr val="accent1"/>
+          </a:effectRef>
+          <a:fontRef idx="minor">
+            <a:schemeClr val="lt1"/>
+          </a:fontRef>
+        </p:style>
+        <p:txBody>
+          <a:bodyPr rtlCol="0" anchor="ctr"/>
+          <a:lstStyle/>
+          <a:p>
+            <a:pPr algn="ctr"/>
+          </a:p>
+        </p:txBody>
+      </p:sp>
+      <p:sp>
+        <p:nvSpPr>
+          <p:cNvPr id="3" name="TextBox 2"/>
+          <p:cNvSpPr txBox="1"/>
+          <p:nvPr/>
+        </p:nvSpPr>
+        <p:spPr>
+          <a:xfrm>
+            <a:off x="594360" y="274320"/>
+            <a:ext cx="10972800" cy="365760"/>
+          </a:xfrm>
+          <a:prstGeom prst="rect">
+            <a:avLst/>
+          </a:prstGeom>
+          <a:noFill/>
+        </p:spPr>
+        <p:txBody>
+          <a:bodyPr wrap="square">
+            <a:spAutoFit/>
+          </a:bodyPr>
+          <a:lstStyle/>
+          <a:p>
+            <a:pPr>
+              <a:spcAft>
+                <a:spcPts val="1600"/>
+              </a:spcAft>
+              <a:defRPr sz="1200" b="1">
+                <a:solidFill>
+                  <a:srgbClr val="087F70"/>
+                </a:solidFill>
+                <a:latin typeface="Arial"/>
+              </a:defRPr>
+            </a:pPr>
+            <a:r>
+              <a:t>VINCENT D / NGHIÊN CỨU SỨC KHỎE PIN</a:t>
+            </a:r>
+          </a:p>
+        </p:txBody>
+      </p:sp>
+      <p:sp>
+        <p:nvSpPr>
+          <p:cNvPr id="4" name="TextBox 3"/>
+          <p:cNvSpPr txBox="1"/>
+          <p:nvPr/>
+        </p:nvSpPr>
+        <p:spPr>
+          <a:xfrm>
+            <a:off x="594360" y="868680"/>
+            <a:ext cx="10972800" cy="1188720"/>
+          </a:xfrm>
+          <a:prstGeom prst="rect">
+            <a:avLst/>
+          </a:prstGeom>
+          <a:noFill/>
+        </p:spPr>
+        <p:txBody>
+          <a:bodyPr wrap="square">
+            <a:spAutoFit/>
+          </a:bodyPr>
+          <a:lstStyle/>
+          <a:p>
+            <a:pPr>
+              <a:spcAft>
+                <a:spcPts val="1600"/>
+              </a:spcAft>
+              <a:defRPr sz="3200" b="1">
+                <a:solidFill>
+                  <a:srgbClr val="193431"/>
+                </a:solidFill>
+                <a:latin typeface="Arial"/>
+              </a:defRPr>
+            </a:pPr>
+            <a:r>
+              <a:t>Kết quả Random Forest</a:t>
+            </a:r>
+          </a:p>
+        </p:txBody>
+      </p:sp>
+      <p:sp>
+        <p:nvSpPr>
+          <p:cNvPr id="5" name="TextBox 4"/>
+          <p:cNvSpPr txBox="1"/>
+          <p:nvPr/>
+        </p:nvSpPr>
+        <p:spPr>
+          <a:xfrm>
+            <a:off x="777240" y="2286000"/>
+            <a:ext cx="10789920" cy="3383280"/>
+          </a:xfrm>
+          <a:prstGeom prst="rect">
+            <a:avLst/>
+          </a:prstGeom>
+          <a:noFill/>
+        </p:spPr>
+        <p:txBody>
+          <a:bodyPr wrap="square">
+            <a:spAutoFit/>
+          </a:bodyPr>
+          <a:lstStyle/>
+          <a:p>
+            <a:pPr>
+              <a:spcAft>
+                <a:spcPts val="1600"/>
+              </a:spcAft>
+              <a:defRPr sz="2400" b="0">
+                <a:solidFill>
+                  <a:srgbClr val="193431"/>
+                </a:solidFill>
+                <a:latin typeface="Arial"/>
+              </a:defRPr>
+            </a:pPr>
+            <a:r>
+              <a:t>• MAE: 1.619 điểm phần trăm SOH</a:t>
+            </a:r>
+          </a:p>
+          <a:p>
+            <a:pPr>
+              <a:spcAft>
+                <a:spcPts val="1600"/>
+              </a:spcAft>
+              <a:defRPr sz="2400" b="0">
+                <a:solidFill>
+                  <a:srgbClr val="193431"/>
+                </a:solidFill>
+                <a:latin typeface="Arial"/>
+              </a:defRPr>
+            </a:pPr>
+            <a:r>
+              <a:t>• RMSE: 2.157 · R²: 0.970</a:t>
+            </a:r>
+          </a:p>
+          <a:p>
+            <a:pPr>
+              <a:spcAft>
+                <a:spcPts val="1600"/>
+              </a:spcAft>
+              <a:defRPr sz="2400" b="0">
+                <a:solidFill>
+                  <a:srgbClr val="193431"/>
+                </a:solidFill>
+                <a:latin typeface="Arial"/>
+              </a:defRPr>
+            </a:pPr>
+            <a:r>
+              <a:t>• Chỉ số là trung bình theo pin giữ riêng</a:t>
+            </a:r>
+          </a:p>
+        </p:txBody>
+      </p:sp>
+      <p:sp>
+        <p:nvSpPr>
+          <p:cNvPr id="6" name="TextBox 5"/>
+          <p:cNvSpPr txBox="1"/>
+          <p:nvPr/>
+        </p:nvSpPr>
+        <p:spPr>
+          <a:xfrm>
+            <a:off x="594360" y="6446520"/>
+            <a:ext cx="10058400" cy="228600"/>
+          </a:xfrm>
+          <a:prstGeom prst="rect">
+            <a:avLst/>
+          </a:prstGeom>
+          <a:noFill/>
+        </p:spPr>
+        <p:txBody>
+          <a:bodyPr wrap="square">
+            <a:spAutoFit/>
+          </a:bodyPr>
+          <a:lstStyle/>
+          <a:p>
+            <a:pPr>
+              <a:spcAft>
+                <a:spcPts val="1600"/>
+              </a:spcAft>
+              <a:defRPr sz="1000" b="0">
+                <a:solidFill>
+                  <a:srgbClr val="60766D"/>
+                </a:solidFill>
+                <a:latin typeface="Arial"/>
+              </a:defRPr>
+            </a:pPr>
+            <a:r>
+              <a:t>Nguyễn Văn Duy · MSSV 2311553949 · Khoa Học Dữ Liệu</a:t>
+            </a:r>
+          </a:p>
+        </p:txBody>
+      </p:sp>
+      <p:sp>
+        <p:nvSpPr>
+          <p:cNvPr id="7" name="TextBox 6"/>
+          <p:cNvSpPr txBox="1"/>
+          <p:nvPr/>
+        </p:nvSpPr>
+        <p:spPr>
+          <a:xfrm>
+            <a:off x="10972800" y="6400800"/>
+            <a:ext cx="548640" cy="274320"/>
+          </a:xfrm>
+          <a:prstGeom prst="rect">
+            <a:avLst/>
+          </a:prstGeom>
+          <a:noFill/>
+        </p:spPr>
+        <p:txBody>
+          <a:bodyPr wrap="square">
+            <a:spAutoFit/>
+          </a:bodyPr>
+          <a:lstStyle/>
+          <a:p>
+            <a:pPr>
+              <a:spcAft>
+                <a:spcPts val="1600"/>
+              </a:spcAft>
+              <a:defRPr sz="1200" b="0">
+                <a:solidFill>
+                  <a:srgbClr val="087F70"/>
+                </a:solidFill>
+                <a:latin typeface="Arial"/>
+              </a:defRPr>
+            </a:pPr>
+            <a:r>
+              <a:t>11</a:t>
             </a:r>
           </a:p>
         </p:txBody>
@@ -3339,6 +3955,14 @@
 <file path=ppt/slides/slide12.xml><?xml version="1.0" encoding="utf-8"?>
 <p:sld xmlns:a="http://schemas.openxmlformats.org/drawingml/2006/main" xmlns:p="http://schemas.openxmlformats.org/presentationml/2006/main" xmlns:r="http://schemas.openxmlformats.org/officeDocument/2006/relationships">
   <p:cSld>
+    <p:bg>
+      <p:bgPr>
+        <a:solidFill>
+          <a:srgbClr val="F6F8F3"/>
+        </a:solidFill>
+        <a:effectLst/>
+      </p:bgPr>
+    </p:bg>
     <p:spTree>
       <p:nvGrpSpPr>
         <p:cNvPr id="1" name=""/>
@@ -3348,64 +3972,223 @@
       <p:grpSpPr/>
       <p:sp>
         <p:nvSpPr>
-          <p:cNvPr id="2" name="Title 1"/>
-          <p:cNvSpPr>
-            <a:spLocks noGrp="1"/>
-          </p:cNvSpPr>
-          <p:nvPr>
-            <p:ph type="title"/>
-          </p:nvPr>
-        </p:nvSpPr>
-        <p:spPr/>
-        <p:txBody>
-          <a:bodyPr/>
-          <a:lstStyle/>
-          <a:p>
-            <a:pPr>
-              <a:defRPr sz="3200"/>
-            </a:pPr>
-            <a:r>
-              <a:t>Hạn chế</a:t>
-            </a:r>
-          </a:p>
-        </p:txBody>
-      </p:sp>
-      <p:sp>
-        <p:nvSpPr>
-          <p:cNvPr id="3" name="Content Placeholder 2"/>
-          <p:cNvSpPr>
-            <a:spLocks noGrp="1"/>
-          </p:cNvSpPr>
-          <p:nvPr>
-            <p:ph idx="1"/>
-          </p:nvPr>
-        </p:nvSpPr>
-        <p:spPr/>
-        <p:txBody>
-          <a:bodyPr/>
-          <a:lstStyle/>
-          <a:p>
-            <a:pPr>
-              <a:defRPr sz="2300"/>
-            </a:pPr>
-            <a:r>
-              <a:t>2 triệu phép đo vẫn chỉ là 4 pin và 636 mẫu SOH</a:t>
-            </a:r>
-          </a:p>
-          <a:p>
-            <a:pPr>
-              <a:defRPr sz="2300"/>
-            </a:pPr>
-            <a:r>
-              <a:t>Chưa có dữ liệu Việt Nam hoặc xe vận hành thực tế</a:t>
-            </a:r>
-          </a:p>
-          <a:p>
-            <a:pPr>
-              <a:defRPr sz="2300"/>
-            </a:pPr>
-            <a:r>
-              <a:t>File MAT từ bản lưu, chưa đối chiếu byte với archive S3</a:t>
+          <p:cNvPr id="2" name="Rectangle 1"/>
+          <p:cNvSpPr/>
+          <p:nvPr/>
+        </p:nvSpPr>
+        <p:spPr>
+          <a:xfrm>
+            <a:off x="0" y="0"/>
+            <a:ext cx="146304" cy="6858000"/>
+          </a:xfrm>
+          <a:prstGeom prst="rect">
+            <a:avLst/>
+          </a:prstGeom>
+          <a:solidFill>
+            <a:srgbClr val="087F70"/>
+          </a:solidFill>
+          <a:ln>
+            <a:noFill/>
+          </a:ln>
+        </p:spPr>
+        <p:style>
+          <a:lnRef idx="1">
+            <a:schemeClr val="accent1"/>
+          </a:lnRef>
+          <a:fillRef idx="3">
+            <a:schemeClr val="accent1"/>
+          </a:fillRef>
+          <a:effectRef idx="2">
+            <a:schemeClr val="accent1"/>
+          </a:effectRef>
+          <a:fontRef idx="minor">
+            <a:schemeClr val="lt1"/>
+          </a:fontRef>
+        </p:style>
+        <p:txBody>
+          <a:bodyPr rtlCol="0" anchor="ctr"/>
+          <a:lstStyle/>
+          <a:p>
+            <a:pPr algn="ctr"/>
+          </a:p>
+        </p:txBody>
+      </p:sp>
+      <p:sp>
+        <p:nvSpPr>
+          <p:cNvPr id="3" name="TextBox 2"/>
+          <p:cNvSpPr txBox="1"/>
+          <p:nvPr/>
+        </p:nvSpPr>
+        <p:spPr>
+          <a:xfrm>
+            <a:off x="594360" y="274320"/>
+            <a:ext cx="10972800" cy="365760"/>
+          </a:xfrm>
+          <a:prstGeom prst="rect">
+            <a:avLst/>
+          </a:prstGeom>
+          <a:noFill/>
+        </p:spPr>
+        <p:txBody>
+          <a:bodyPr wrap="square">
+            <a:spAutoFit/>
+          </a:bodyPr>
+          <a:lstStyle/>
+          <a:p>
+            <a:pPr>
+              <a:spcAft>
+                <a:spcPts val="1600"/>
+              </a:spcAft>
+              <a:defRPr sz="1200" b="1">
+                <a:solidFill>
+                  <a:srgbClr val="087F70"/>
+                </a:solidFill>
+                <a:latin typeface="Arial"/>
+              </a:defRPr>
+            </a:pPr>
+            <a:r>
+              <a:t>VINCENT D / NGHIÊN CỨU SỨC KHỎE PIN</a:t>
+            </a:r>
+          </a:p>
+        </p:txBody>
+      </p:sp>
+      <p:sp>
+        <p:nvSpPr>
+          <p:cNvPr id="4" name="TextBox 3"/>
+          <p:cNvSpPr txBox="1"/>
+          <p:nvPr/>
+        </p:nvSpPr>
+        <p:spPr>
+          <a:xfrm>
+            <a:off x="594360" y="868680"/>
+            <a:ext cx="10972800" cy="1188720"/>
+          </a:xfrm>
+          <a:prstGeom prst="rect">
+            <a:avLst/>
+          </a:prstGeom>
+          <a:noFill/>
+        </p:spPr>
+        <p:txBody>
+          <a:bodyPr wrap="square">
+            <a:spAutoFit/>
+          </a:bodyPr>
+          <a:lstStyle/>
+          <a:p>
+            <a:pPr>
+              <a:spcAft>
+                <a:spcPts val="1600"/>
+              </a:spcAft>
+              <a:defRPr sz="3200" b="1">
+                <a:solidFill>
+                  <a:srgbClr val="193431"/>
+                </a:solidFill>
+                <a:latin typeface="Arial"/>
+              </a:defRPr>
+            </a:pPr>
+            <a:r>
+              <a:t>Thực tế và dự đoán</a:t>
+            </a:r>
+          </a:p>
+        </p:txBody>
+      </p:sp>
+      <p:pic>
+        <p:nvPicPr>
+          <p:cNvPr id="5" name="Picture 4" descr="held_out_predictions.png"/>
+          <p:cNvPicPr>
+            <a:picLocks noChangeAspect="1"/>
+          </p:cNvPicPr>
+          <p:nvPr/>
+        </p:nvPicPr>
+        <p:blipFill>
+          <a:blip r:embed="rId2"/>
+          <a:stretch>
+            <a:fillRect/>
+          </a:stretch>
+        </p:blipFill>
+        <p:spPr>
+          <a:xfrm>
+            <a:off x="3009747" y="1828800"/>
+            <a:ext cx="6172200" cy="4114800"/>
+          </a:xfrm>
+          <a:prstGeom prst="rect">
+            <a:avLst/>
+          </a:prstGeom>
+        </p:spPr>
+      </p:pic>
+      <p:sp>
+        <p:nvSpPr>
+          <p:cNvPr id="6" name="TextBox 5"/>
+          <p:cNvSpPr txBox="1"/>
+          <p:nvPr/>
+        </p:nvSpPr>
+        <p:spPr>
+          <a:xfrm>
+            <a:off x="594360" y="6446520"/>
+            <a:ext cx="10058400" cy="228600"/>
+          </a:xfrm>
+          <a:prstGeom prst="rect">
+            <a:avLst/>
+          </a:prstGeom>
+          <a:noFill/>
+        </p:spPr>
+        <p:txBody>
+          <a:bodyPr wrap="square">
+            <a:spAutoFit/>
+          </a:bodyPr>
+          <a:lstStyle/>
+          <a:p>
+            <a:pPr>
+              <a:spcAft>
+                <a:spcPts val="1600"/>
+              </a:spcAft>
+              <a:defRPr sz="1000" b="0">
+                <a:solidFill>
+                  <a:srgbClr val="60766D"/>
+                </a:solidFill>
+                <a:latin typeface="Arial"/>
+              </a:defRPr>
+            </a:pPr>
+            <a:r>
+              <a:t>Nguyễn Văn Duy · MSSV 2311553949 · Khoa Học Dữ Liệu</a:t>
+            </a:r>
+          </a:p>
+        </p:txBody>
+      </p:sp>
+      <p:sp>
+        <p:nvSpPr>
+          <p:cNvPr id="7" name="TextBox 6"/>
+          <p:cNvSpPr txBox="1"/>
+          <p:nvPr/>
+        </p:nvSpPr>
+        <p:spPr>
+          <a:xfrm>
+            <a:off x="10972800" y="6400800"/>
+            <a:ext cx="548640" cy="274320"/>
+          </a:xfrm>
+          <a:prstGeom prst="rect">
+            <a:avLst/>
+          </a:prstGeom>
+          <a:noFill/>
+        </p:spPr>
+        <p:txBody>
+          <a:bodyPr wrap="square">
+            <a:spAutoFit/>
+          </a:bodyPr>
+          <a:lstStyle/>
+          <a:p>
+            <a:pPr>
+              <a:spcAft>
+                <a:spcPts val="1600"/>
+              </a:spcAft>
+              <a:defRPr sz="1200" b="0">
+                <a:solidFill>
+                  <a:srgbClr val="087F70"/>
+                </a:solidFill>
+                <a:latin typeface="Arial"/>
+              </a:defRPr>
+            </a:pPr>
+            <a:r>
+              <a:t>12</a:t>
             </a:r>
           </a:p>
         </p:txBody>
@@ -3421,6 +4204,14 @@
 <file path=ppt/slides/slide13.xml><?xml version="1.0" encoding="utf-8"?>
 <p:sld xmlns:a="http://schemas.openxmlformats.org/drawingml/2006/main" xmlns:p="http://schemas.openxmlformats.org/presentationml/2006/main" xmlns:r="http://schemas.openxmlformats.org/officeDocument/2006/relationships">
   <p:cSld>
+    <p:bg>
+      <p:bgPr>
+        <a:solidFill>
+          <a:srgbClr val="F6F8F3"/>
+        </a:solidFill>
+        <a:effectLst/>
+      </p:bgPr>
+    </p:bg>
     <p:spTree>
       <p:nvGrpSpPr>
         <p:cNvPr id="1" name=""/>
@@ -3430,64 +4221,1672 @@
       <p:grpSpPr/>
       <p:sp>
         <p:nvSpPr>
-          <p:cNvPr id="2" name="Title 1"/>
-          <p:cNvSpPr>
-            <a:spLocks noGrp="1"/>
-          </p:cNvSpPr>
-          <p:nvPr>
-            <p:ph type="title"/>
-          </p:nvPr>
-        </p:nvSpPr>
-        <p:spPr/>
-        <p:txBody>
-          <a:bodyPr/>
-          <a:lstStyle/>
-          <a:p>
-            <a:pPr>
-              <a:defRPr sz="3200"/>
-            </a:pPr>
-            <a:r>
-              <a:t>Kết luận và bước tiếp theo</a:t>
-            </a:r>
-          </a:p>
-        </p:txBody>
-      </p:sp>
-      <p:sp>
-        <p:nvSpPr>
-          <p:cNvPr id="3" name="Content Placeholder 2"/>
-          <p:cNvSpPr>
-            <a:spLocks noGrp="1"/>
-          </p:cNvSpPr>
-          <p:nvPr>
-            <p:ph idx="1"/>
-          </p:nvPr>
-        </p:nvSpPr>
-        <p:spPr/>
-        <p:txBody>
-          <a:bodyPr/>
-          <a:lstStyle/>
-          <a:p>
-            <a:pPr>
-              <a:defRPr sz="2300"/>
-            </a:pPr>
-            <a:r>
-              <a:t>Pipeline, dữ liệu sạch, kiểm thử, demo và tài liệu tái lập</a:t>
-            </a:r>
-          </a:p>
-          <a:p>
-            <a:pPr>
-              <a:defRPr sz="2300"/>
-            </a:pPr>
-            <a:r>
-              <a:t>Bổ sung pin và điều kiện vận hành; đối chiếu kho phát hành</a:t>
-            </a:r>
-          </a:p>
-          <a:p>
-            <a:pPr>
-              <a:defRPr sz="2300"/>
-            </a:pPr>
-            <a:r>
-              <a:t>Giảng viên xác nhận phạm vi và hình thức bản nộp</a:t>
+          <p:cNvPr id="2" name="Rectangle 1"/>
+          <p:cNvSpPr/>
+          <p:nvPr/>
+        </p:nvSpPr>
+        <p:spPr>
+          <a:xfrm>
+            <a:off x="0" y="0"/>
+            <a:ext cx="146304" cy="6858000"/>
+          </a:xfrm>
+          <a:prstGeom prst="rect">
+            <a:avLst/>
+          </a:prstGeom>
+          <a:solidFill>
+            <a:srgbClr val="087F70"/>
+          </a:solidFill>
+          <a:ln>
+            <a:noFill/>
+          </a:ln>
+        </p:spPr>
+        <p:style>
+          <a:lnRef idx="1">
+            <a:schemeClr val="accent1"/>
+          </a:lnRef>
+          <a:fillRef idx="3">
+            <a:schemeClr val="accent1"/>
+          </a:fillRef>
+          <a:effectRef idx="2">
+            <a:schemeClr val="accent1"/>
+          </a:effectRef>
+          <a:fontRef idx="minor">
+            <a:schemeClr val="lt1"/>
+          </a:fontRef>
+        </p:style>
+        <p:txBody>
+          <a:bodyPr rtlCol="0" anchor="ctr"/>
+          <a:lstStyle/>
+          <a:p>
+            <a:pPr algn="ctr"/>
+          </a:p>
+        </p:txBody>
+      </p:sp>
+      <p:sp>
+        <p:nvSpPr>
+          <p:cNvPr id="3" name="TextBox 2"/>
+          <p:cNvSpPr txBox="1"/>
+          <p:nvPr/>
+        </p:nvSpPr>
+        <p:spPr>
+          <a:xfrm>
+            <a:off x="594360" y="274320"/>
+            <a:ext cx="10972800" cy="365760"/>
+          </a:xfrm>
+          <a:prstGeom prst="rect">
+            <a:avLst/>
+          </a:prstGeom>
+          <a:noFill/>
+        </p:spPr>
+        <p:txBody>
+          <a:bodyPr wrap="square">
+            <a:spAutoFit/>
+          </a:bodyPr>
+          <a:lstStyle/>
+          <a:p>
+            <a:pPr>
+              <a:spcAft>
+                <a:spcPts val="1600"/>
+              </a:spcAft>
+              <a:defRPr sz="1200" b="1">
+                <a:solidFill>
+                  <a:srgbClr val="087F70"/>
+                </a:solidFill>
+                <a:latin typeface="Arial"/>
+              </a:defRPr>
+            </a:pPr>
+            <a:r>
+              <a:t>VINCENT D / NGHIÊN CỨU SỨC KHỎE PIN</a:t>
+            </a:r>
+          </a:p>
+        </p:txBody>
+      </p:sp>
+      <p:sp>
+        <p:nvSpPr>
+          <p:cNvPr id="4" name="TextBox 3"/>
+          <p:cNvSpPr txBox="1"/>
+          <p:nvPr/>
+        </p:nvSpPr>
+        <p:spPr>
+          <a:xfrm>
+            <a:off x="594360" y="868680"/>
+            <a:ext cx="10972800" cy="1188720"/>
+          </a:xfrm>
+          <a:prstGeom prst="rect">
+            <a:avLst/>
+          </a:prstGeom>
+          <a:noFill/>
+        </p:spPr>
+        <p:txBody>
+          <a:bodyPr wrap="square">
+            <a:spAutoFit/>
+          </a:bodyPr>
+          <a:lstStyle/>
+          <a:p>
+            <a:pPr>
+              <a:spcAft>
+                <a:spcPts val="1600"/>
+              </a:spcAft>
+              <a:defRPr sz="3200" b="1">
+                <a:solidFill>
+                  <a:srgbClr val="193431"/>
+                </a:solidFill>
+                <a:latin typeface="Arial"/>
+              </a:defRPr>
+            </a:pPr>
+            <a:r>
+              <a:t>Sai số và giới hạn</a:t>
+            </a:r>
+          </a:p>
+        </p:txBody>
+      </p:sp>
+      <p:pic>
+        <p:nvPicPr>
+          <p:cNvPr id="5" name="Picture 4" descr="error_analysis.png"/>
+          <p:cNvPicPr>
+            <a:picLocks noChangeAspect="1"/>
+          </p:cNvPicPr>
+          <p:nvPr/>
+        </p:nvPicPr>
+        <p:blipFill>
+          <a:blip r:embed="rId2"/>
+          <a:stretch>
+            <a:fillRect/>
+          </a:stretch>
+        </p:blipFill>
+        <p:spPr>
+          <a:xfrm>
+            <a:off x="1466697" y="1828800"/>
+            <a:ext cx="9258300" cy="4114800"/>
+          </a:xfrm>
+          <a:prstGeom prst="rect">
+            <a:avLst/>
+          </a:prstGeom>
+        </p:spPr>
+      </p:pic>
+      <p:sp>
+        <p:nvSpPr>
+          <p:cNvPr id="6" name="TextBox 5"/>
+          <p:cNvSpPr txBox="1"/>
+          <p:nvPr/>
+        </p:nvSpPr>
+        <p:spPr>
+          <a:xfrm>
+            <a:off x="594360" y="6446520"/>
+            <a:ext cx="10058400" cy="228600"/>
+          </a:xfrm>
+          <a:prstGeom prst="rect">
+            <a:avLst/>
+          </a:prstGeom>
+          <a:noFill/>
+        </p:spPr>
+        <p:txBody>
+          <a:bodyPr wrap="square">
+            <a:spAutoFit/>
+          </a:bodyPr>
+          <a:lstStyle/>
+          <a:p>
+            <a:pPr>
+              <a:spcAft>
+                <a:spcPts val="1600"/>
+              </a:spcAft>
+              <a:defRPr sz="1000" b="0">
+                <a:solidFill>
+                  <a:srgbClr val="60766D"/>
+                </a:solidFill>
+                <a:latin typeface="Arial"/>
+              </a:defRPr>
+            </a:pPr>
+            <a:r>
+              <a:t>Nguyễn Văn Duy · MSSV 2311553949 · Khoa Học Dữ Liệu</a:t>
+            </a:r>
+          </a:p>
+        </p:txBody>
+      </p:sp>
+      <p:sp>
+        <p:nvSpPr>
+          <p:cNvPr id="7" name="TextBox 6"/>
+          <p:cNvSpPr txBox="1"/>
+          <p:nvPr/>
+        </p:nvSpPr>
+        <p:spPr>
+          <a:xfrm>
+            <a:off x="10972800" y="6400800"/>
+            <a:ext cx="548640" cy="274320"/>
+          </a:xfrm>
+          <a:prstGeom prst="rect">
+            <a:avLst/>
+          </a:prstGeom>
+          <a:noFill/>
+        </p:spPr>
+        <p:txBody>
+          <a:bodyPr wrap="square">
+            <a:spAutoFit/>
+          </a:bodyPr>
+          <a:lstStyle/>
+          <a:p>
+            <a:pPr>
+              <a:spcAft>
+                <a:spcPts val="1600"/>
+              </a:spcAft>
+              <a:defRPr sz="1200" b="0">
+                <a:solidFill>
+                  <a:srgbClr val="087F70"/>
+                </a:solidFill>
+                <a:latin typeface="Arial"/>
+              </a:defRPr>
+            </a:pPr>
+            <a:r>
+              <a:t>13</a:t>
+            </a:r>
+          </a:p>
+        </p:txBody>
+      </p:sp>
+    </p:spTree>
+  </p:cSld>
+  <p:clrMapOvr>
+    <a:masterClrMapping/>
+  </p:clrMapOvr>
+</p:sld>
+</file>
+
+<file path=ppt/slides/slide14.xml><?xml version="1.0" encoding="utf-8"?>
+<p:sld xmlns:a="http://schemas.openxmlformats.org/drawingml/2006/main" xmlns:p="http://schemas.openxmlformats.org/presentationml/2006/main" xmlns:r="http://schemas.openxmlformats.org/officeDocument/2006/relationships">
+  <p:cSld>
+    <p:bg>
+      <p:bgPr>
+        <a:solidFill>
+          <a:srgbClr val="F6F8F3"/>
+        </a:solidFill>
+        <a:effectLst/>
+      </p:bgPr>
+    </p:bg>
+    <p:spTree>
+      <p:nvGrpSpPr>
+        <p:cNvPr id="1" name=""/>
+        <p:cNvGrpSpPr/>
+        <p:nvPr/>
+      </p:nvGrpSpPr>
+      <p:grpSpPr/>
+      <p:sp>
+        <p:nvSpPr>
+          <p:cNvPr id="2" name="Rectangle 1"/>
+          <p:cNvSpPr/>
+          <p:nvPr/>
+        </p:nvSpPr>
+        <p:spPr>
+          <a:xfrm>
+            <a:off x="0" y="0"/>
+            <a:ext cx="146304" cy="6858000"/>
+          </a:xfrm>
+          <a:prstGeom prst="rect">
+            <a:avLst/>
+          </a:prstGeom>
+          <a:solidFill>
+            <a:srgbClr val="087F70"/>
+          </a:solidFill>
+          <a:ln>
+            <a:noFill/>
+          </a:ln>
+        </p:spPr>
+        <p:style>
+          <a:lnRef idx="1">
+            <a:schemeClr val="accent1"/>
+          </a:lnRef>
+          <a:fillRef idx="3">
+            <a:schemeClr val="accent1"/>
+          </a:fillRef>
+          <a:effectRef idx="2">
+            <a:schemeClr val="accent1"/>
+          </a:effectRef>
+          <a:fontRef idx="minor">
+            <a:schemeClr val="lt1"/>
+          </a:fontRef>
+        </p:style>
+        <p:txBody>
+          <a:bodyPr rtlCol="0" anchor="ctr"/>
+          <a:lstStyle/>
+          <a:p>
+            <a:pPr algn="ctr"/>
+          </a:p>
+        </p:txBody>
+      </p:sp>
+      <p:sp>
+        <p:nvSpPr>
+          <p:cNvPr id="3" name="TextBox 2"/>
+          <p:cNvSpPr txBox="1"/>
+          <p:nvPr/>
+        </p:nvSpPr>
+        <p:spPr>
+          <a:xfrm>
+            <a:off x="594360" y="274320"/>
+            <a:ext cx="10972800" cy="365760"/>
+          </a:xfrm>
+          <a:prstGeom prst="rect">
+            <a:avLst/>
+          </a:prstGeom>
+          <a:noFill/>
+        </p:spPr>
+        <p:txBody>
+          <a:bodyPr wrap="square">
+            <a:spAutoFit/>
+          </a:bodyPr>
+          <a:lstStyle/>
+          <a:p>
+            <a:pPr>
+              <a:spcAft>
+                <a:spcPts val="1600"/>
+              </a:spcAft>
+              <a:defRPr sz="1200" b="1">
+                <a:solidFill>
+                  <a:srgbClr val="087F70"/>
+                </a:solidFill>
+                <a:latin typeface="Arial"/>
+              </a:defRPr>
+            </a:pPr>
+            <a:r>
+              <a:t>VINCENT D / NGHIÊN CỨU SỨC KHỎE PIN</a:t>
+            </a:r>
+          </a:p>
+        </p:txBody>
+      </p:sp>
+      <p:sp>
+        <p:nvSpPr>
+          <p:cNvPr id="4" name="TextBox 3"/>
+          <p:cNvSpPr txBox="1"/>
+          <p:nvPr/>
+        </p:nvSpPr>
+        <p:spPr>
+          <a:xfrm>
+            <a:off x="594360" y="868680"/>
+            <a:ext cx="10972800" cy="1188720"/>
+          </a:xfrm>
+          <a:prstGeom prst="rect">
+            <a:avLst/>
+          </a:prstGeom>
+          <a:noFill/>
+        </p:spPr>
+        <p:txBody>
+          <a:bodyPr wrap="square">
+            <a:spAutoFit/>
+          </a:bodyPr>
+          <a:lstStyle/>
+          <a:p>
+            <a:pPr>
+              <a:spcAft>
+                <a:spcPts val="1600"/>
+              </a:spcAft>
+              <a:defRPr sz="3200" b="1">
+                <a:solidFill>
+                  <a:srgbClr val="193431"/>
+                </a:solidFill>
+                <a:latin typeface="Arial"/>
+              </a:defRPr>
+            </a:pPr>
+            <a:r>
+              <a:t>Kiểm tra bổ sung</a:t>
+            </a:r>
+          </a:p>
+        </p:txBody>
+      </p:sp>
+      <p:sp>
+        <p:nvSpPr>
+          <p:cNvPr id="5" name="TextBox 4"/>
+          <p:cNvSpPr txBox="1"/>
+          <p:nvPr/>
+        </p:nvSpPr>
+        <p:spPr>
+          <a:xfrm>
+            <a:off x="777240" y="2286000"/>
+            <a:ext cx="10789920" cy="3383280"/>
+          </a:xfrm>
+          <a:prstGeom prst="rect">
+            <a:avLst/>
+          </a:prstGeom>
+          <a:noFill/>
+        </p:spPr>
+        <p:txBody>
+          <a:bodyPr wrap="square">
+            <a:spAutoFit/>
+          </a:bodyPr>
+          <a:lstStyle/>
+          <a:p>
+            <a:pPr>
+              <a:spcAft>
+                <a:spcPts val="1600"/>
+              </a:spcAft>
+              <a:defRPr sz="2400" b="0">
+                <a:solidFill>
+                  <a:srgbClr val="193431"/>
+                </a:solidFill>
+                <a:latin typeface="Arial"/>
+              </a:defRPr>
+            </a:pPr>
+            <a:r>
+              <a:t>• Bỏ số chu kỳ, bỏ giai đoạn, chỉ dùng điện áp</a:t>
+            </a:r>
+          </a:p>
+          <a:p>
+            <a:pPr>
+              <a:spcAft>
+                <a:spcPts val="1600"/>
+              </a:spcAft>
+              <a:defRPr sz="2400" b="0">
+                <a:solidFill>
+                  <a:srgbClr val="193431"/>
+                </a:solidFill>
+                <a:latin typeface="Arial"/>
+              </a:defRPr>
+            </a:pPr>
+            <a:r>
+              <a:t>• Kiểm thử riêng 70/30 theo thời gian trong từng pin/giai đoạn</a:t>
+            </a:r>
+          </a:p>
+          <a:p>
+            <a:pPr>
+              <a:spcAft>
+                <a:spcPts val="1600"/>
+              </a:spcAft>
+              <a:defRPr sz="2400" b="0">
+                <a:solidFill>
+                  <a:srgbClr val="193431"/>
+                </a:solidFill>
+                <a:latin typeface="Arial"/>
+              </a:defRPr>
+            </a:pPr>
+            <a:r>
+              <a:t>• Last known SOH: MAE 5.529</a:t>
+            </a:r>
+          </a:p>
+          <a:p>
+            <a:pPr>
+              <a:spcAft>
+                <a:spcPts val="1600"/>
+              </a:spcAft>
+              <a:defRPr sz="2400" b="0">
+                <a:solidFill>
+                  <a:srgbClr val="193431"/>
+                </a:solidFill>
+                <a:latin typeface="Arial"/>
+              </a:defRPr>
+            </a:pPr>
+            <a:r>
+              <a:t>• Random Forest: MAE 4.963</a:t>
+            </a:r>
+          </a:p>
+        </p:txBody>
+      </p:sp>
+      <p:sp>
+        <p:nvSpPr>
+          <p:cNvPr id="6" name="TextBox 5"/>
+          <p:cNvSpPr txBox="1"/>
+          <p:nvPr/>
+        </p:nvSpPr>
+        <p:spPr>
+          <a:xfrm>
+            <a:off x="594360" y="6446520"/>
+            <a:ext cx="10058400" cy="228600"/>
+          </a:xfrm>
+          <a:prstGeom prst="rect">
+            <a:avLst/>
+          </a:prstGeom>
+          <a:noFill/>
+        </p:spPr>
+        <p:txBody>
+          <a:bodyPr wrap="square">
+            <a:spAutoFit/>
+          </a:bodyPr>
+          <a:lstStyle/>
+          <a:p>
+            <a:pPr>
+              <a:spcAft>
+                <a:spcPts val="1600"/>
+              </a:spcAft>
+              <a:defRPr sz="1000" b="0">
+                <a:solidFill>
+                  <a:srgbClr val="60766D"/>
+                </a:solidFill>
+                <a:latin typeface="Arial"/>
+              </a:defRPr>
+            </a:pPr>
+            <a:r>
+              <a:t>Nguyễn Văn Duy · MSSV 2311553949 · Khoa Học Dữ Liệu</a:t>
+            </a:r>
+          </a:p>
+        </p:txBody>
+      </p:sp>
+      <p:sp>
+        <p:nvSpPr>
+          <p:cNvPr id="7" name="TextBox 6"/>
+          <p:cNvSpPr txBox="1"/>
+          <p:nvPr/>
+        </p:nvSpPr>
+        <p:spPr>
+          <a:xfrm>
+            <a:off x="10972800" y="6400800"/>
+            <a:ext cx="548640" cy="274320"/>
+          </a:xfrm>
+          <a:prstGeom prst="rect">
+            <a:avLst/>
+          </a:prstGeom>
+          <a:noFill/>
+        </p:spPr>
+        <p:txBody>
+          <a:bodyPr wrap="square">
+            <a:spAutoFit/>
+          </a:bodyPr>
+          <a:lstStyle/>
+          <a:p>
+            <a:pPr>
+              <a:spcAft>
+                <a:spcPts val="1600"/>
+              </a:spcAft>
+              <a:defRPr sz="1200" b="0">
+                <a:solidFill>
+                  <a:srgbClr val="087F70"/>
+                </a:solidFill>
+                <a:latin typeface="Arial"/>
+              </a:defRPr>
+            </a:pPr>
+            <a:r>
+              <a:t>14</a:t>
+            </a:r>
+          </a:p>
+        </p:txBody>
+      </p:sp>
+    </p:spTree>
+  </p:cSld>
+  <p:clrMapOvr>
+    <a:masterClrMapping/>
+  </p:clrMapOvr>
+</p:sld>
+</file>
+
+<file path=ppt/slides/slide15.xml><?xml version="1.0" encoding="utf-8"?>
+<p:sld xmlns:a="http://schemas.openxmlformats.org/drawingml/2006/main" xmlns:p="http://schemas.openxmlformats.org/presentationml/2006/main" xmlns:r="http://schemas.openxmlformats.org/officeDocument/2006/relationships">
+  <p:cSld>
+    <p:bg>
+      <p:bgPr>
+        <a:solidFill>
+          <a:srgbClr val="F6F8F3"/>
+        </a:solidFill>
+        <a:effectLst/>
+      </p:bgPr>
+    </p:bg>
+    <p:spTree>
+      <p:nvGrpSpPr>
+        <p:cNvPr id="1" name=""/>
+        <p:cNvGrpSpPr/>
+        <p:nvPr/>
+      </p:nvGrpSpPr>
+      <p:grpSpPr/>
+      <p:sp>
+        <p:nvSpPr>
+          <p:cNvPr id="2" name="Rectangle 1"/>
+          <p:cNvSpPr/>
+          <p:nvPr/>
+        </p:nvSpPr>
+        <p:spPr>
+          <a:xfrm>
+            <a:off x="0" y="0"/>
+            <a:ext cx="146304" cy="6858000"/>
+          </a:xfrm>
+          <a:prstGeom prst="rect">
+            <a:avLst/>
+          </a:prstGeom>
+          <a:solidFill>
+            <a:srgbClr val="087F70"/>
+          </a:solidFill>
+          <a:ln>
+            <a:noFill/>
+          </a:ln>
+        </p:spPr>
+        <p:style>
+          <a:lnRef idx="1">
+            <a:schemeClr val="accent1"/>
+          </a:lnRef>
+          <a:fillRef idx="3">
+            <a:schemeClr val="accent1"/>
+          </a:fillRef>
+          <a:effectRef idx="2">
+            <a:schemeClr val="accent1"/>
+          </a:effectRef>
+          <a:fontRef idx="minor">
+            <a:schemeClr val="lt1"/>
+          </a:fontRef>
+        </p:style>
+        <p:txBody>
+          <a:bodyPr rtlCol="0" anchor="ctr"/>
+          <a:lstStyle/>
+          <a:p>
+            <a:pPr algn="ctr"/>
+          </a:p>
+        </p:txBody>
+      </p:sp>
+      <p:sp>
+        <p:nvSpPr>
+          <p:cNvPr id="3" name="TextBox 2"/>
+          <p:cNvSpPr txBox="1"/>
+          <p:nvPr/>
+        </p:nvSpPr>
+        <p:spPr>
+          <a:xfrm>
+            <a:off x="594360" y="274320"/>
+            <a:ext cx="10972800" cy="365760"/>
+          </a:xfrm>
+          <a:prstGeom prst="rect">
+            <a:avLst/>
+          </a:prstGeom>
+          <a:noFill/>
+        </p:spPr>
+        <p:txBody>
+          <a:bodyPr wrap="square">
+            <a:spAutoFit/>
+          </a:bodyPr>
+          <a:lstStyle/>
+          <a:p>
+            <a:pPr>
+              <a:spcAft>
+                <a:spcPts val="1600"/>
+              </a:spcAft>
+              <a:defRPr sz="1200" b="1">
+                <a:solidFill>
+                  <a:srgbClr val="087F70"/>
+                </a:solidFill>
+                <a:latin typeface="Arial"/>
+              </a:defRPr>
+            </a:pPr>
+            <a:r>
+              <a:t>VINCENT D / NGHIÊN CỨU SỨC KHỎE PIN</a:t>
+            </a:r>
+          </a:p>
+        </p:txBody>
+      </p:sp>
+      <p:sp>
+        <p:nvSpPr>
+          <p:cNvPr id="4" name="TextBox 3"/>
+          <p:cNvSpPr txBox="1"/>
+          <p:nvPr/>
+        </p:nvSpPr>
+        <p:spPr>
+          <a:xfrm>
+            <a:off x="594360" y="868680"/>
+            <a:ext cx="10972800" cy="1188720"/>
+          </a:xfrm>
+          <a:prstGeom prst="rect">
+            <a:avLst/>
+          </a:prstGeom>
+          <a:noFill/>
+        </p:spPr>
+        <p:txBody>
+          <a:bodyPr wrap="square">
+            <a:spAutoFit/>
+          </a:bodyPr>
+          <a:lstStyle/>
+          <a:p>
+            <a:pPr>
+              <a:spcAft>
+                <a:spcPts val="1600"/>
+              </a:spcAft>
+              <a:defRPr sz="3200" b="1">
+                <a:solidFill>
+                  <a:srgbClr val="193431"/>
+                </a:solidFill>
+                <a:latin typeface="Arial"/>
+              </a:defRPr>
+            </a:pPr>
+            <a:r>
+              <a:t>Sản phẩm Vincent D</a:t>
+            </a:r>
+          </a:p>
+        </p:txBody>
+      </p:sp>
+      <p:sp>
+        <p:nvSpPr>
+          <p:cNvPr id="5" name="TextBox 4"/>
+          <p:cNvSpPr txBox="1"/>
+          <p:nvPr/>
+        </p:nvSpPr>
+        <p:spPr>
+          <a:xfrm>
+            <a:off x="777240" y="2286000"/>
+            <a:ext cx="10789920" cy="3383280"/>
+          </a:xfrm>
+          <a:prstGeom prst="rect">
+            <a:avLst/>
+          </a:prstGeom>
+          <a:noFill/>
+        </p:spPr>
+        <p:txBody>
+          <a:bodyPr wrap="square">
+            <a:spAutoFit/>
+          </a:bodyPr>
+          <a:lstStyle/>
+          <a:p>
+            <a:pPr>
+              <a:spcAft>
+                <a:spcPts val="1600"/>
+              </a:spcAft>
+              <a:defRPr sz="2400" b="0">
+                <a:solidFill>
+                  <a:srgbClr val="193431"/>
+                </a:solidFill>
+                <a:latin typeface="Arial"/>
+              </a:defRPr>
+            </a:pPr>
+            <a:r>
+              <a:t>• Tra cứu hai giai đoạn, tín hiệu và so sánh chu kỳ</a:t>
+            </a:r>
+          </a:p>
+          <a:p>
+            <a:pPr>
+              <a:spcAft>
+                <a:spcPts val="1600"/>
+              </a:spcAft>
+              <a:defRPr sz="2400" b="0">
+                <a:solidFill>
+                  <a:srgbClr val="193431"/>
+                </a:solidFill>
+                <a:latin typeface="Arial"/>
+              </a:defRPr>
+            </a:pPr>
+            <a:r>
+              <a:t>• Dự đoán một/lô, lịch sử và phiếu kết quả</a:t>
+            </a:r>
+          </a:p>
+          <a:p>
+            <a:pPr>
+              <a:spcAft>
+                <a:spcPts val="1600"/>
+              </a:spcAft>
+              <a:defRPr sz="2400" b="0">
+                <a:solidFill>
+                  <a:srgbClr val="193431"/>
+                </a:solidFill>
+                <a:latin typeface="Arial"/>
+              </a:defRPr>
+            </a:pPr>
+            <a:r>
+              <a:t>• Chất lượng, nguồn dữ liệu và bảng thực nghiệm</a:t>
+            </a:r>
+          </a:p>
+        </p:txBody>
+      </p:sp>
+      <p:sp>
+        <p:nvSpPr>
+          <p:cNvPr id="6" name="TextBox 5"/>
+          <p:cNvSpPr txBox="1"/>
+          <p:nvPr/>
+        </p:nvSpPr>
+        <p:spPr>
+          <a:xfrm>
+            <a:off x="594360" y="6446520"/>
+            <a:ext cx="10058400" cy="228600"/>
+          </a:xfrm>
+          <a:prstGeom prst="rect">
+            <a:avLst/>
+          </a:prstGeom>
+          <a:noFill/>
+        </p:spPr>
+        <p:txBody>
+          <a:bodyPr wrap="square">
+            <a:spAutoFit/>
+          </a:bodyPr>
+          <a:lstStyle/>
+          <a:p>
+            <a:pPr>
+              <a:spcAft>
+                <a:spcPts val="1600"/>
+              </a:spcAft>
+              <a:defRPr sz="1000" b="0">
+                <a:solidFill>
+                  <a:srgbClr val="60766D"/>
+                </a:solidFill>
+                <a:latin typeface="Arial"/>
+              </a:defRPr>
+            </a:pPr>
+            <a:r>
+              <a:t>Nguyễn Văn Duy · MSSV 2311553949 · Khoa Học Dữ Liệu</a:t>
+            </a:r>
+          </a:p>
+        </p:txBody>
+      </p:sp>
+      <p:sp>
+        <p:nvSpPr>
+          <p:cNvPr id="7" name="TextBox 6"/>
+          <p:cNvSpPr txBox="1"/>
+          <p:nvPr/>
+        </p:nvSpPr>
+        <p:spPr>
+          <a:xfrm>
+            <a:off x="10972800" y="6400800"/>
+            <a:ext cx="548640" cy="274320"/>
+          </a:xfrm>
+          <a:prstGeom prst="rect">
+            <a:avLst/>
+          </a:prstGeom>
+          <a:noFill/>
+        </p:spPr>
+        <p:txBody>
+          <a:bodyPr wrap="square">
+            <a:spAutoFit/>
+          </a:bodyPr>
+          <a:lstStyle/>
+          <a:p>
+            <a:pPr>
+              <a:spcAft>
+                <a:spcPts val="1600"/>
+              </a:spcAft>
+              <a:defRPr sz="1200" b="0">
+                <a:solidFill>
+                  <a:srgbClr val="087F70"/>
+                </a:solidFill>
+                <a:latin typeface="Arial"/>
+              </a:defRPr>
+            </a:pPr>
+            <a:r>
+              <a:t>15</a:t>
+            </a:r>
+          </a:p>
+        </p:txBody>
+      </p:sp>
+    </p:spTree>
+  </p:cSld>
+  <p:clrMapOvr>
+    <a:masterClrMapping/>
+  </p:clrMapOvr>
+</p:sld>
+</file>
+
+<file path=ppt/slides/slide16.xml><?xml version="1.0" encoding="utf-8"?>
+<p:sld xmlns:a="http://schemas.openxmlformats.org/drawingml/2006/main" xmlns:p="http://schemas.openxmlformats.org/presentationml/2006/main" xmlns:r="http://schemas.openxmlformats.org/officeDocument/2006/relationships">
+  <p:cSld>
+    <p:bg>
+      <p:bgPr>
+        <a:solidFill>
+          <a:srgbClr val="F6F8F3"/>
+        </a:solidFill>
+        <a:effectLst/>
+      </p:bgPr>
+    </p:bg>
+    <p:spTree>
+      <p:nvGrpSpPr>
+        <p:cNvPr id="1" name=""/>
+        <p:cNvGrpSpPr/>
+        <p:nvPr/>
+      </p:nvGrpSpPr>
+      <p:grpSpPr/>
+      <p:sp>
+        <p:nvSpPr>
+          <p:cNvPr id="2" name="Rectangle 1"/>
+          <p:cNvSpPr/>
+          <p:nvPr/>
+        </p:nvSpPr>
+        <p:spPr>
+          <a:xfrm>
+            <a:off x="0" y="0"/>
+            <a:ext cx="146304" cy="6858000"/>
+          </a:xfrm>
+          <a:prstGeom prst="rect">
+            <a:avLst/>
+          </a:prstGeom>
+          <a:solidFill>
+            <a:srgbClr val="087F70"/>
+          </a:solidFill>
+          <a:ln>
+            <a:noFill/>
+          </a:ln>
+        </p:spPr>
+        <p:style>
+          <a:lnRef idx="1">
+            <a:schemeClr val="accent1"/>
+          </a:lnRef>
+          <a:fillRef idx="3">
+            <a:schemeClr val="accent1"/>
+          </a:fillRef>
+          <a:effectRef idx="2">
+            <a:schemeClr val="accent1"/>
+          </a:effectRef>
+          <a:fontRef idx="minor">
+            <a:schemeClr val="lt1"/>
+          </a:fontRef>
+        </p:style>
+        <p:txBody>
+          <a:bodyPr rtlCol="0" anchor="ctr"/>
+          <a:lstStyle/>
+          <a:p>
+            <a:pPr algn="ctr"/>
+          </a:p>
+        </p:txBody>
+      </p:sp>
+      <p:sp>
+        <p:nvSpPr>
+          <p:cNvPr id="3" name="TextBox 2"/>
+          <p:cNvSpPr txBox="1"/>
+          <p:nvPr/>
+        </p:nvSpPr>
+        <p:spPr>
+          <a:xfrm>
+            <a:off x="594360" y="274320"/>
+            <a:ext cx="10972800" cy="365760"/>
+          </a:xfrm>
+          <a:prstGeom prst="rect">
+            <a:avLst/>
+          </a:prstGeom>
+          <a:noFill/>
+        </p:spPr>
+        <p:txBody>
+          <a:bodyPr wrap="square">
+            <a:spAutoFit/>
+          </a:bodyPr>
+          <a:lstStyle/>
+          <a:p>
+            <a:pPr>
+              <a:spcAft>
+                <a:spcPts val="1600"/>
+              </a:spcAft>
+              <a:defRPr sz="1200" b="1">
+                <a:solidFill>
+                  <a:srgbClr val="087F70"/>
+                </a:solidFill>
+                <a:latin typeface="Arial"/>
+              </a:defRPr>
+            </a:pPr>
+            <a:r>
+              <a:t>VINCENT D / NGHIÊN CỨU SỨC KHỎE PIN</a:t>
+            </a:r>
+          </a:p>
+        </p:txBody>
+      </p:sp>
+      <p:sp>
+        <p:nvSpPr>
+          <p:cNvPr id="4" name="TextBox 3"/>
+          <p:cNvSpPr txBox="1"/>
+          <p:nvPr/>
+        </p:nvSpPr>
+        <p:spPr>
+          <a:xfrm>
+            <a:off x="594360" y="868680"/>
+            <a:ext cx="10972800" cy="1188720"/>
+          </a:xfrm>
+          <a:prstGeom prst="rect">
+            <a:avLst/>
+          </a:prstGeom>
+          <a:noFill/>
+        </p:spPr>
+        <p:txBody>
+          <a:bodyPr wrap="square">
+            <a:spAutoFit/>
+          </a:bodyPr>
+          <a:lstStyle/>
+          <a:p>
+            <a:pPr>
+              <a:spcAft>
+                <a:spcPts val="1600"/>
+              </a:spcAft>
+              <a:defRPr sz="3200" b="1">
+                <a:solidFill>
+                  <a:srgbClr val="193431"/>
+                </a:solidFill>
+                <a:latin typeface="Arial"/>
+              </a:defRPr>
+            </a:pPr>
+            <a:r>
+              <a:t>Giao diện ứng dụng</a:t>
+            </a:r>
+          </a:p>
+        </p:txBody>
+      </p:sp>
+      <p:pic>
+        <p:nvPicPr>
+          <p:cNvPr id="5" name="Picture 4" descr="vincent_d_sdu_overview.png"/>
+          <p:cNvPicPr>
+            <a:picLocks noChangeAspect="1"/>
+          </p:cNvPicPr>
+          <p:nvPr/>
+        </p:nvPicPr>
+        <p:blipFill>
+          <a:blip r:embed="rId2"/>
+          <a:stretch>
+            <a:fillRect/>
+          </a:stretch>
+        </p:blipFill>
+        <p:spPr>
+          <a:xfrm>
+            <a:off x="3133191" y="1828800"/>
+            <a:ext cx="5925312" cy="4114800"/>
+          </a:xfrm>
+          <a:prstGeom prst="rect">
+            <a:avLst/>
+          </a:prstGeom>
+        </p:spPr>
+      </p:pic>
+      <p:sp>
+        <p:nvSpPr>
+          <p:cNvPr id="6" name="TextBox 5"/>
+          <p:cNvSpPr txBox="1"/>
+          <p:nvPr/>
+        </p:nvSpPr>
+        <p:spPr>
+          <a:xfrm>
+            <a:off x="594360" y="6446520"/>
+            <a:ext cx="10058400" cy="228600"/>
+          </a:xfrm>
+          <a:prstGeom prst="rect">
+            <a:avLst/>
+          </a:prstGeom>
+          <a:noFill/>
+        </p:spPr>
+        <p:txBody>
+          <a:bodyPr wrap="square">
+            <a:spAutoFit/>
+          </a:bodyPr>
+          <a:lstStyle/>
+          <a:p>
+            <a:pPr>
+              <a:spcAft>
+                <a:spcPts val="1600"/>
+              </a:spcAft>
+              <a:defRPr sz="1000" b="0">
+                <a:solidFill>
+                  <a:srgbClr val="60766D"/>
+                </a:solidFill>
+                <a:latin typeface="Arial"/>
+              </a:defRPr>
+            </a:pPr>
+            <a:r>
+              <a:t>Nguyễn Văn Duy · MSSV 2311553949 · Khoa Học Dữ Liệu</a:t>
+            </a:r>
+          </a:p>
+        </p:txBody>
+      </p:sp>
+      <p:sp>
+        <p:nvSpPr>
+          <p:cNvPr id="7" name="TextBox 6"/>
+          <p:cNvSpPr txBox="1"/>
+          <p:nvPr/>
+        </p:nvSpPr>
+        <p:spPr>
+          <a:xfrm>
+            <a:off x="10972800" y="6400800"/>
+            <a:ext cx="548640" cy="274320"/>
+          </a:xfrm>
+          <a:prstGeom prst="rect">
+            <a:avLst/>
+          </a:prstGeom>
+          <a:noFill/>
+        </p:spPr>
+        <p:txBody>
+          <a:bodyPr wrap="square">
+            <a:spAutoFit/>
+          </a:bodyPr>
+          <a:lstStyle/>
+          <a:p>
+            <a:pPr>
+              <a:spcAft>
+                <a:spcPts val="1600"/>
+              </a:spcAft>
+              <a:defRPr sz="1200" b="0">
+                <a:solidFill>
+                  <a:srgbClr val="087F70"/>
+                </a:solidFill>
+                <a:latin typeface="Arial"/>
+              </a:defRPr>
+            </a:pPr>
+            <a:r>
+              <a:t>16</a:t>
+            </a:r>
+          </a:p>
+        </p:txBody>
+      </p:sp>
+    </p:spTree>
+  </p:cSld>
+  <p:clrMapOvr>
+    <a:masterClrMapping/>
+  </p:clrMapOvr>
+</p:sld>
+</file>
+
+<file path=ppt/slides/slide17.xml><?xml version="1.0" encoding="utf-8"?>
+<p:sld xmlns:a="http://schemas.openxmlformats.org/drawingml/2006/main" xmlns:p="http://schemas.openxmlformats.org/presentationml/2006/main" xmlns:r="http://schemas.openxmlformats.org/officeDocument/2006/relationships">
+  <p:cSld>
+    <p:bg>
+      <p:bgPr>
+        <a:solidFill>
+          <a:srgbClr val="F6F8F3"/>
+        </a:solidFill>
+        <a:effectLst/>
+      </p:bgPr>
+    </p:bg>
+    <p:spTree>
+      <p:nvGrpSpPr>
+        <p:cNvPr id="1" name=""/>
+        <p:cNvGrpSpPr/>
+        <p:nvPr/>
+      </p:nvGrpSpPr>
+      <p:grpSpPr/>
+      <p:sp>
+        <p:nvSpPr>
+          <p:cNvPr id="2" name="Rectangle 1"/>
+          <p:cNvSpPr/>
+          <p:nvPr/>
+        </p:nvSpPr>
+        <p:spPr>
+          <a:xfrm>
+            <a:off x="0" y="0"/>
+            <a:ext cx="146304" cy="6858000"/>
+          </a:xfrm>
+          <a:prstGeom prst="rect">
+            <a:avLst/>
+          </a:prstGeom>
+          <a:solidFill>
+            <a:srgbClr val="087F70"/>
+          </a:solidFill>
+          <a:ln>
+            <a:noFill/>
+          </a:ln>
+        </p:spPr>
+        <p:style>
+          <a:lnRef idx="1">
+            <a:schemeClr val="accent1"/>
+          </a:lnRef>
+          <a:fillRef idx="3">
+            <a:schemeClr val="accent1"/>
+          </a:fillRef>
+          <a:effectRef idx="2">
+            <a:schemeClr val="accent1"/>
+          </a:effectRef>
+          <a:fontRef idx="minor">
+            <a:schemeClr val="lt1"/>
+          </a:fontRef>
+        </p:style>
+        <p:txBody>
+          <a:bodyPr rtlCol="0" anchor="ctr"/>
+          <a:lstStyle/>
+          <a:p>
+            <a:pPr algn="ctr"/>
+          </a:p>
+        </p:txBody>
+      </p:sp>
+      <p:sp>
+        <p:nvSpPr>
+          <p:cNvPr id="3" name="TextBox 2"/>
+          <p:cNvSpPr txBox="1"/>
+          <p:nvPr/>
+        </p:nvSpPr>
+        <p:spPr>
+          <a:xfrm>
+            <a:off x="594360" y="274320"/>
+            <a:ext cx="10972800" cy="365760"/>
+          </a:xfrm>
+          <a:prstGeom prst="rect">
+            <a:avLst/>
+          </a:prstGeom>
+          <a:noFill/>
+        </p:spPr>
+        <p:txBody>
+          <a:bodyPr wrap="square">
+            <a:spAutoFit/>
+          </a:bodyPr>
+          <a:lstStyle/>
+          <a:p>
+            <a:pPr>
+              <a:spcAft>
+                <a:spcPts val="1600"/>
+              </a:spcAft>
+              <a:defRPr sz="1200" b="1">
+                <a:solidFill>
+                  <a:srgbClr val="087F70"/>
+                </a:solidFill>
+                <a:latin typeface="Arial"/>
+              </a:defRPr>
+            </a:pPr>
+            <a:r>
+              <a:t>VINCENT D / NGHIÊN CỨU SỨC KHỎE PIN</a:t>
+            </a:r>
+          </a:p>
+        </p:txBody>
+      </p:sp>
+      <p:sp>
+        <p:nvSpPr>
+          <p:cNvPr id="4" name="TextBox 3"/>
+          <p:cNvSpPr txBox="1"/>
+          <p:nvPr/>
+        </p:nvSpPr>
+        <p:spPr>
+          <a:xfrm>
+            <a:off x="594360" y="868680"/>
+            <a:ext cx="10972800" cy="1188720"/>
+          </a:xfrm>
+          <a:prstGeom prst="rect">
+            <a:avLst/>
+          </a:prstGeom>
+          <a:noFill/>
+        </p:spPr>
+        <p:txBody>
+          <a:bodyPr wrap="square">
+            <a:spAutoFit/>
+          </a:bodyPr>
+          <a:lstStyle/>
+          <a:p>
+            <a:pPr>
+              <a:spcAft>
+                <a:spcPts val="1600"/>
+              </a:spcAft>
+              <a:defRPr sz="3200" b="1">
+                <a:solidFill>
+                  <a:srgbClr val="193431"/>
+                </a:solidFill>
+                <a:latin typeface="Arial"/>
+              </a:defRPr>
+            </a:pPr>
+            <a:r>
+              <a:t>Kết luận và hướng phát triển</a:t>
+            </a:r>
+          </a:p>
+        </p:txBody>
+      </p:sp>
+      <p:sp>
+        <p:nvSpPr>
+          <p:cNvPr id="5" name="TextBox 4"/>
+          <p:cNvSpPr txBox="1"/>
+          <p:nvPr/>
+        </p:nvSpPr>
+        <p:spPr>
+          <a:xfrm>
+            <a:off x="777240" y="2286000"/>
+            <a:ext cx="10789920" cy="3383280"/>
+          </a:xfrm>
+          <a:prstGeom prst="rect">
+            <a:avLst/>
+          </a:prstGeom>
+          <a:noFill/>
+        </p:spPr>
+        <p:txBody>
+          <a:bodyPr wrap="square">
+            <a:spAutoFit/>
+          </a:bodyPr>
+          <a:lstStyle/>
+          <a:p>
+            <a:pPr>
+              <a:spcAft>
+                <a:spcPts val="1600"/>
+              </a:spcAft>
+              <a:defRPr sz="2400" b="0">
+                <a:solidFill>
+                  <a:srgbClr val="193431"/>
+                </a:solidFill>
+                <a:latin typeface="Arial"/>
+              </a:defRPr>
+            </a:pPr>
+            <a:r>
+              <a:t>• Hoàn thành quy trình dữ liệu → mô hình → ứng dụng</a:t>
+            </a:r>
+          </a:p>
+          <a:p>
+            <a:pPr>
+              <a:spcAft>
+                <a:spcPts val="1600"/>
+              </a:spcAft>
+              <a:defRPr sz="2400" b="0">
+                <a:solidFill>
+                  <a:srgbClr val="193431"/>
+                </a:solidFill>
+                <a:latin typeface="Arial"/>
+              </a:defRPr>
+            </a:pPr>
+            <a:r>
+              <a:t>• Chưa kiểm chứng trên bộ pin xe thực tế tại Việt Nam</a:t>
+            </a:r>
+          </a:p>
+          <a:p>
+            <a:pPr>
+              <a:spcAft>
+                <a:spcPts val="1600"/>
+              </a:spcAft>
+              <a:defRPr sz="2400" b="0">
+                <a:solidFill>
+                  <a:srgbClr val="193431"/>
+                </a:solidFill>
+                <a:latin typeface="Arial"/>
+              </a:defRPr>
+            </a:pPr>
+            <a:r>
+              <a:t>• Mở rộng điều kiện vận hành, đánh giá độc lập và độ bất định</a:t>
+            </a:r>
+          </a:p>
+        </p:txBody>
+      </p:sp>
+      <p:sp>
+        <p:nvSpPr>
+          <p:cNvPr id="6" name="TextBox 5"/>
+          <p:cNvSpPr txBox="1"/>
+          <p:nvPr/>
+        </p:nvSpPr>
+        <p:spPr>
+          <a:xfrm>
+            <a:off x="594360" y="6446520"/>
+            <a:ext cx="10058400" cy="228600"/>
+          </a:xfrm>
+          <a:prstGeom prst="rect">
+            <a:avLst/>
+          </a:prstGeom>
+          <a:noFill/>
+        </p:spPr>
+        <p:txBody>
+          <a:bodyPr wrap="square">
+            <a:spAutoFit/>
+          </a:bodyPr>
+          <a:lstStyle/>
+          <a:p>
+            <a:pPr>
+              <a:spcAft>
+                <a:spcPts val="1600"/>
+              </a:spcAft>
+              <a:defRPr sz="1000" b="0">
+                <a:solidFill>
+                  <a:srgbClr val="60766D"/>
+                </a:solidFill>
+                <a:latin typeface="Arial"/>
+              </a:defRPr>
+            </a:pPr>
+            <a:r>
+              <a:t>Nguyễn Văn Duy · MSSV 2311553949 · Khoa Học Dữ Liệu</a:t>
+            </a:r>
+          </a:p>
+        </p:txBody>
+      </p:sp>
+      <p:sp>
+        <p:nvSpPr>
+          <p:cNvPr id="7" name="TextBox 6"/>
+          <p:cNvSpPr txBox="1"/>
+          <p:nvPr/>
+        </p:nvSpPr>
+        <p:spPr>
+          <a:xfrm>
+            <a:off x="10972800" y="6400800"/>
+            <a:ext cx="548640" cy="274320"/>
+          </a:xfrm>
+          <a:prstGeom prst="rect">
+            <a:avLst/>
+          </a:prstGeom>
+          <a:noFill/>
+        </p:spPr>
+        <p:txBody>
+          <a:bodyPr wrap="square">
+            <a:spAutoFit/>
+          </a:bodyPr>
+          <a:lstStyle/>
+          <a:p>
+            <a:pPr>
+              <a:spcAft>
+                <a:spcPts val="1600"/>
+              </a:spcAft>
+              <a:defRPr sz="1200" b="0">
+                <a:solidFill>
+                  <a:srgbClr val="087F70"/>
+                </a:solidFill>
+                <a:latin typeface="Arial"/>
+              </a:defRPr>
+            </a:pPr>
+            <a:r>
+              <a:t>17</a:t>
+            </a:r>
+          </a:p>
+        </p:txBody>
+      </p:sp>
+    </p:spTree>
+  </p:cSld>
+  <p:clrMapOvr>
+    <a:masterClrMapping/>
+  </p:clrMapOvr>
+</p:sld>
+</file>
+
+<file path=ppt/slides/slide18.xml><?xml version="1.0" encoding="utf-8"?>
+<p:sld xmlns:a="http://schemas.openxmlformats.org/drawingml/2006/main" xmlns:p="http://schemas.openxmlformats.org/presentationml/2006/main" xmlns:r="http://schemas.openxmlformats.org/officeDocument/2006/relationships">
+  <p:cSld>
+    <p:bg>
+      <p:bgPr>
+        <a:solidFill>
+          <a:srgbClr val="F6F8F3"/>
+        </a:solidFill>
+        <a:effectLst/>
+      </p:bgPr>
+    </p:bg>
+    <p:spTree>
+      <p:nvGrpSpPr>
+        <p:cNvPr id="1" name=""/>
+        <p:cNvGrpSpPr/>
+        <p:nvPr/>
+      </p:nvGrpSpPr>
+      <p:grpSpPr/>
+      <p:sp>
+        <p:nvSpPr>
+          <p:cNvPr id="2" name="Rectangle 1"/>
+          <p:cNvSpPr/>
+          <p:nvPr/>
+        </p:nvSpPr>
+        <p:spPr>
+          <a:xfrm>
+            <a:off x="0" y="0"/>
+            <a:ext cx="146304" cy="6858000"/>
+          </a:xfrm>
+          <a:prstGeom prst="rect">
+            <a:avLst/>
+          </a:prstGeom>
+          <a:solidFill>
+            <a:srgbClr val="087F70"/>
+          </a:solidFill>
+          <a:ln>
+            <a:noFill/>
+          </a:ln>
+        </p:spPr>
+        <p:style>
+          <a:lnRef idx="1">
+            <a:schemeClr val="accent1"/>
+          </a:lnRef>
+          <a:fillRef idx="3">
+            <a:schemeClr val="accent1"/>
+          </a:fillRef>
+          <a:effectRef idx="2">
+            <a:schemeClr val="accent1"/>
+          </a:effectRef>
+          <a:fontRef idx="minor">
+            <a:schemeClr val="lt1"/>
+          </a:fontRef>
+        </p:style>
+        <p:txBody>
+          <a:bodyPr rtlCol="0" anchor="ctr"/>
+          <a:lstStyle/>
+          <a:p>
+            <a:pPr algn="ctr"/>
+          </a:p>
+        </p:txBody>
+      </p:sp>
+      <p:sp>
+        <p:nvSpPr>
+          <p:cNvPr id="3" name="TextBox 2"/>
+          <p:cNvSpPr txBox="1"/>
+          <p:nvPr/>
+        </p:nvSpPr>
+        <p:spPr>
+          <a:xfrm>
+            <a:off x="594360" y="274320"/>
+            <a:ext cx="10972800" cy="365760"/>
+          </a:xfrm>
+          <a:prstGeom prst="rect">
+            <a:avLst/>
+          </a:prstGeom>
+          <a:noFill/>
+        </p:spPr>
+        <p:txBody>
+          <a:bodyPr wrap="square">
+            <a:spAutoFit/>
+          </a:bodyPr>
+          <a:lstStyle/>
+          <a:p>
+            <a:pPr>
+              <a:spcAft>
+                <a:spcPts val="1600"/>
+              </a:spcAft>
+              <a:defRPr sz="1200" b="1">
+                <a:solidFill>
+                  <a:srgbClr val="087F70"/>
+                </a:solidFill>
+                <a:latin typeface="Arial"/>
+              </a:defRPr>
+            </a:pPr>
+            <a:r>
+              <a:t>VINCENT D / NGHIÊN CỨU SỨC KHỎE PIN</a:t>
+            </a:r>
+          </a:p>
+        </p:txBody>
+      </p:sp>
+      <p:sp>
+        <p:nvSpPr>
+          <p:cNvPr id="4" name="TextBox 3"/>
+          <p:cNvSpPr txBox="1"/>
+          <p:nvPr/>
+        </p:nvSpPr>
+        <p:spPr>
+          <a:xfrm>
+            <a:off x="594360" y="868680"/>
+            <a:ext cx="10972800" cy="1188720"/>
+          </a:xfrm>
+          <a:prstGeom prst="rect">
+            <a:avLst/>
+          </a:prstGeom>
+          <a:noFill/>
+        </p:spPr>
+        <p:txBody>
+          <a:bodyPr wrap="square">
+            <a:spAutoFit/>
+          </a:bodyPr>
+          <a:lstStyle/>
+          <a:p>
+            <a:pPr>
+              <a:spcAft>
+                <a:spcPts val="1600"/>
+              </a:spcAft>
+              <a:defRPr sz="3200" b="1">
+                <a:solidFill>
+                  <a:srgbClr val="193431"/>
+                </a:solidFill>
+                <a:latin typeface="Arial"/>
+              </a:defRPr>
+            </a:pPr>
+            <a:r>
+              <a:t>Tài liệu và sản phẩm bàn giao</a:t>
+            </a:r>
+          </a:p>
+        </p:txBody>
+      </p:sp>
+      <p:sp>
+        <p:nvSpPr>
+          <p:cNvPr id="5" name="TextBox 4"/>
+          <p:cNvSpPr txBox="1"/>
+          <p:nvPr/>
+        </p:nvSpPr>
+        <p:spPr>
+          <a:xfrm>
+            <a:off x="777240" y="2286000"/>
+            <a:ext cx="10789920" cy="3383280"/>
+          </a:xfrm>
+          <a:prstGeom prst="rect">
+            <a:avLst/>
+          </a:prstGeom>
+          <a:noFill/>
+        </p:spPr>
+        <p:txBody>
+          <a:bodyPr wrap="square">
+            <a:spAutoFit/>
+          </a:bodyPr>
+          <a:lstStyle/>
+          <a:p>
+            <a:pPr>
+              <a:spcAft>
+                <a:spcPts val="1600"/>
+              </a:spcAft>
+              <a:defRPr sz="2400" b="0">
+                <a:solidFill>
+                  <a:srgbClr val="193431"/>
+                </a:solidFill>
+                <a:latin typeface="Arial"/>
+              </a:defRPr>
+            </a:pPr>
+            <a:r>
+              <a:t>• Mã nguồn, mô hình, bảng đặc trưng và dữ liệu nguồn</a:t>
+            </a:r>
+          </a:p>
+          <a:p>
+            <a:pPr>
+              <a:spcAft>
+                <a:spcPts val="1600"/>
+              </a:spcAft>
+              <a:defRPr sz="2400" b="0">
+                <a:solidFill>
+                  <a:srgbClr val="193431"/>
+                </a:solidFill>
+                <a:latin typeface="Arial"/>
+              </a:defRPr>
+            </a:pPr>
+            <a:r>
+              <a:t>• Notebook đã chạy, CSV thực nghiệm và biểu đồ</a:t>
+            </a:r>
+          </a:p>
+          <a:p>
+            <a:pPr>
+              <a:spcAft>
+                <a:spcPts val="1600"/>
+              </a:spcAft>
+              <a:defRPr sz="2400" b="0">
+                <a:solidFill>
+                  <a:srgbClr val="193431"/>
+                </a:solidFill>
+                <a:latin typeface="Arial"/>
+              </a:defRPr>
+            </a:pPr>
+            <a:r>
+              <a:t>• Báo cáo Word/PDF, slide và hồ sơ trích dẫn</a:t>
+            </a:r>
+          </a:p>
+        </p:txBody>
+      </p:sp>
+      <p:sp>
+        <p:nvSpPr>
+          <p:cNvPr id="6" name="TextBox 5"/>
+          <p:cNvSpPr txBox="1"/>
+          <p:nvPr/>
+        </p:nvSpPr>
+        <p:spPr>
+          <a:xfrm>
+            <a:off x="594360" y="6446520"/>
+            <a:ext cx="10058400" cy="228600"/>
+          </a:xfrm>
+          <a:prstGeom prst="rect">
+            <a:avLst/>
+          </a:prstGeom>
+          <a:noFill/>
+        </p:spPr>
+        <p:txBody>
+          <a:bodyPr wrap="square">
+            <a:spAutoFit/>
+          </a:bodyPr>
+          <a:lstStyle/>
+          <a:p>
+            <a:pPr>
+              <a:spcAft>
+                <a:spcPts val="1600"/>
+              </a:spcAft>
+              <a:defRPr sz="1000" b="0">
+                <a:solidFill>
+                  <a:srgbClr val="60766D"/>
+                </a:solidFill>
+                <a:latin typeface="Arial"/>
+              </a:defRPr>
+            </a:pPr>
+            <a:r>
+              <a:t>Nguyễn Văn Duy · MSSV 2311553949 · Khoa Học Dữ Liệu</a:t>
+            </a:r>
+          </a:p>
+        </p:txBody>
+      </p:sp>
+      <p:sp>
+        <p:nvSpPr>
+          <p:cNvPr id="7" name="TextBox 6"/>
+          <p:cNvSpPr txBox="1"/>
+          <p:nvPr/>
+        </p:nvSpPr>
+        <p:spPr>
+          <a:xfrm>
+            <a:off x="10972800" y="6400800"/>
+            <a:ext cx="548640" cy="274320"/>
+          </a:xfrm>
+          <a:prstGeom prst="rect">
+            <a:avLst/>
+          </a:prstGeom>
+          <a:noFill/>
+        </p:spPr>
+        <p:txBody>
+          <a:bodyPr wrap="square">
+            <a:spAutoFit/>
+          </a:bodyPr>
+          <a:lstStyle/>
+          <a:p>
+            <a:pPr>
+              <a:spcAft>
+                <a:spcPts val="1600"/>
+              </a:spcAft>
+              <a:defRPr sz="1200" b="0">
+                <a:solidFill>
+                  <a:srgbClr val="087F70"/>
+                </a:solidFill>
+                <a:latin typeface="Arial"/>
+              </a:defRPr>
+            </a:pPr>
+            <a:r>
+              <a:t>18</a:t>
             </a:r>
           </a:p>
         </p:txBody>
@@ -3503,6 +5902,14 @@
 <file path=ppt/slides/slide2.xml><?xml version="1.0" encoding="utf-8"?>
 <p:sld xmlns:a="http://schemas.openxmlformats.org/drawingml/2006/main" xmlns:p="http://schemas.openxmlformats.org/presentationml/2006/main" xmlns:r="http://schemas.openxmlformats.org/officeDocument/2006/relationships">
   <p:cSld>
+    <p:bg>
+      <p:bgPr>
+        <a:solidFill>
+          <a:srgbClr val="F6F8F3"/>
+        </a:solidFill>
+        <a:effectLst/>
+      </p:bgPr>
+    </p:bg>
     <p:spTree>
       <p:nvGrpSpPr>
         <p:cNvPr id="1" name=""/>
@@ -3512,64 +5919,270 @@
       <p:grpSpPr/>
       <p:sp>
         <p:nvSpPr>
-          <p:cNvPr id="2" name="Title 1"/>
-          <p:cNvSpPr>
-            <a:spLocks noGrp="1"/>
-          </p:cNvSpPr>
-          <p:nvPr>
-            <p:ph type="title"/>
-          </p:nvPr>
-        </p:nvSpPr>
-        <p:spPr/>
-        <p:txBody>
-          <a:bodyPr/>
-          <a:lstStyle/>
-          <a:p>
-            <a:pPr>
-              <a:defRPr sz="3200"/>
-            </a:pPr>
-            <a:r>
-              <a:t>Bài toán và phạm vi</a:t>
-            </a:r>
-          </a:p>
-        </p:txBody>
-      </p:sp>
-      <p:sp>
-        <p:nvSpPr>
-          <p:cNvPr id="3" name="Content Placeholder 2"/>
-          <p:cNvSpPr>
-            <a:spLocks noGrp="1"/>
-          </p:cNvSpPr>
-          <p:nvPr>
-            <p:ph idx="1"/>
-          </p:nvPr>
-        </p:nvSpPr>
-        <p:spPr/>
-        <p:txBody>
-          <a:bodyPr/>
-          <a:lstStyle/>
-          <a:p>
-            <a:pPr>
-              <a:defRPr sz="2300"/>
-            </a:pPr>
-            <a:r>
-              <a:t>Ước lượng SOH sau 120 giây đầu chu kỳ xả</a:t>
-            </a:r>
-          </a:p>
-          <a:p>
-            <a:pPr>
-              <a:defRPr sz="2300"/>
-            </a:pPr>
-            <a:r>
-              <a:t>SOH khác SOC và RUL</a:t>
-            </a:r>
-          </a:p>
-          <a:p>
-            <a:pPr>
-              <a:defRPr sz="2300"/>
-            </a:pPr>
-            <a:r>
-              <a:t>Cell thử nghiệm; chưa có bằng chứng trên xe thực tế</a:t>
+          <p:cNvPr id="2" name="Rectangle 1"/>
+          <p:cNvSpPr/>
+          <p:nvPr/>
+        </p:nvSpPr>
+        <p:spPr>
+          <a:xfrm>
+            <a:off x="0" y="0"/>
+            <a:ext cx="146304" cy="6858000"/>
+          </a:xfrm>
+          <a:prstGeom prst="rect">
+            <a:avLst/>
+          </a:prstGeom>
+          <a:solidFill>
+            <a:srgbClr val="087F70"/>
+          </a:solidFill>
+          <a:ln>
+            <a:noFill/>
+          </a:ln>
+        </p:spPr>
+        <p:style>
+          <a:lnRef idx="1">
+            <a:schemeClr val="accent1"/>
+          </a:lnRef>
+          <a:fillRef idx="3">
+            <a:schemeClr val="accent1"/>
+          </a:fillRef>
+          <a:effectRef idx="2">
+            <a:schemeClr val="accent1"/>
+          </a:effectRef>
+          <a:fontRef idx="minor">
+            <a:schemeClr val="lt1"/>
+          </a:fontRef>
+        </p:style>
+        <p:txBody>
+          <a:bodyPr rtlCol="0" anchor="ctr"/>
+          <a:lstStyle/>
+          <a:p>
+            <a:pPr algn="ctr"/>
+          </a:p>
+        </p:txBody>
+      </p:sp>
+      <p:sp>
+        <p:nvSpPr>
+          <p:cNvPr id="3" name="TextBox 2"/>
+          <p:cNvSpPr txBox="1"/>
+          <p:nvPr/>
+        </p:nvSpPr>
+        <p:spPr>
+          <a:xfrm>
+            <a:off x="594360" y="274320"/>
+            <a:ext cx="10972800" cy="365760"/>
+          </a:xfrm>
+          <a:prstGeom prst="rect">
+            <a:avLst/>
+          </a:prstGeom>
+          <a:noFill/>
+        </p:spPr>
+        <p:txBody>
+          <a:bodyPr wrap="square">
+            <a:spAutoFit/>
+          </a:bodyPr>
+          <a:lstStyle/>
+          <a:p>
+            <a:pPr>
+              <a:spcAft>
+                <a:spcPts val="1600"/>
+              </a:spcAft>
+              <a:defRPr sz="1200" b="1">
+                <a:solidFill>
+                  <a:srgbClr val="087F70"/>
+                </a:solidFill>
+                <a:latin typeface="Arial"/>
+              </a:defRPr>
+            </a:pPr>
+            <a:r>
+              <a:t>VINCENT D / NGHIÊN CỨU SỨC KHỎE PIN</a:t>
+            </a:r>
+          </a:p>
+        </p:txBody>
+      </p:sp>
+      <p:sp>
+        <p:nvSpPr>
+          <p:cNvPr id="4" name="TextBox 3"/>
+          <p:cNvSpPr txBox="1"/>
+          <p:nvPr/>
+        </p:nvSpPr>
+        <p:spPr>
+          <a:xfrm>
+            <a:off x="594360" y="868680"/>
+            <a:ext cx="10972800" cy="1188720"/>
+          </a:xfrm>
+          <a:prstGeom prst="rect">
+            <a:avLst/>
+          </a:prstGeom>
+          <a:noFill/>
+        </p:spPr>
+        <p:txBody>
+          <a:bodyPr wrap="square">
+            <a:spAutoFit/>
+          </a:bodyPr>
+          <a:lstStyle/>
+          <a:p>
+            <a:pPr>
+              <a:spcAft>
+                <a:spcPts val="1600"/>
+              </a:spcAft>
+              <a:defRPr sz="3200" b="1">
+                <a:solidFill>
+                  <a:srgbClr val="193431"/>
+                </a:solidFill>
+                <a:latin typeface="Arial"/>
+              </a:defRPr>
+            </a:pPr>
+            <a:r>
+              <a:t>Bài toán nghiên cứu</a:t>
+            </a:r>
+          </a:p>
+        </p:txBody>
+      </p:sp>
+      <p:sp>
+        <p:nvSpPr>
+          <p:cNvPr id="5" name="TextBox 4"/>
+          <p:cNvSpPr txBox="1"/>
+          <p:nvPr/>
+        </p:nvSpPr>
+        <p:spPr>
+          <a:xfrm>
+            <a:off x="777240" y="2286000"/>
+            <a:ext cx="10789920" cy="3383280"/>
+          </a:xfrm>
+          <a:prstGeom prst="rect">
+            <a:avLst/>
+          </a:prstGeom>
+          <a:noFill/>
+        </p:spPr>
+        <p:txBody>
+          <a:bodyPr wrap="square">
+            <a:spAutoFit/>
+          </a:bodyPr>
+          <a:lstStyle/>
+          <a:p>
+            <a:pPr>
+              <a:spcAft>
+                <a:spcPts val="1600"/>
+              </a:spcAft>
+              <a:defRPr sz="2400" b="0">
+                <a:solidFill>
+                  <a:srgbClr val="193431"/>
+                </a:solidFill>
+                <a:latin typeface="Arial"/>
+              </a:defRPr>
+            </a:pPr>
+            <a:r>
+              <a:t>• Quan sát 120 giây đầu xả → ước lượng SOH</a:t>
+            </a:r>
+          </a:p>
+          <a:p>
+            <a:pPr>
+              <a:spcAft>
+                <a:spcPts val="1600"/>
+              </a:spcAft>
+              <a:defRPr sz="2400" b="0">
+                <a:solidFill>
+                  <a:srgbClr val="193431"/>
+                </a:solidFill>
+                <a:latin typeface="Arial"/>
+              </a:defRPr>
+            </a:pPr>
+            <a:r>
+              <a:t>• SOH = dung lượng xả / 2,4 Ah × 100</a:t>
+            </a:r>
+          </a:p>
+          <a:p>
+            <a:pPr>
+              <a:spcAft>
+                <a:spcPts val="1600"/>
+              </a:spcAft>
+              <a:defRPr sz="2400" b="0">
+                <a:solidFill>
+                  <a:srgbClr val="193431"/>
+                </a:solidFill>
+                <a:latin typeface="Arial"/>
+              </a:defRPr>
+            </a:pPr>
+            <a:r>
+              <a:t>• Thực nghiệm cấp tế bào trong phòng thí nghiệm</a:t>
+            </a:r>
+          </a:p>
+        </p:txBody>
+      </p:sp>
+      <p:sp>
+        <p:nvSpPr>
+          <p:cNvPr id="6" name="TextBox 5"/>
+          <p:cNvSpPr txBox="1"/>
+          <p:nvPr/>
+        </p:nvSpPr>
+        <p:spPr>
+          <a:xfrm>
+            <a:off x="594360" y="6446520"/>
+            <a:ext cx="10058400" cy="228600"/>
+          </a:xfrm>
+          <a:prstGeom prst="rect">
+            <a:avLst/>
+          </a:prstGeom>
+          <a:noFill/>
+        </p:spPr>
+        <p:txBody>
+          <a:bodyPr wrap="square">
+            <a:spAutoFit/>
+          </a:bodyPr>
+          <a:lstStyle/>
+          <a:p>
+            <a:pPr>
+              <a:spcAft>
+                <a:spcPts val="1600"/>
+              </a:spcAft>
+              <a:defRPr sz="1000" b="0">
+                <a:solidFill>
+                  <a:srgbClr val="60766D"/>
+                </a:solidFill>
+                <a:latin typeface="Arial"/>
+              </a:defRPr>
+            </a:pPr>
+            <a:r>
+              <a:t>Nguyễn Văn Duy · MSSV 2311553949 · Khoa Học Dữ Liệu</a:t>
+            </a:r>
+          </a:p>
+        </p:txBody>
+      </p:sp>
+      <p:sp>
+        <p:nvSpPr>
+          <p:cNvPr id="7" name="TextBox 6"/>
+          <p:cNvSpPr txBox="1"/>
+          <p:nvPr/>
+        </p:nvSpPr>
+        <p:spPr>
+          <a:xfrm>
+            <a:off x="10972800" y="6400800"/>
+            <a:ext cx="548640" cy="274320"/>
+          </a:xfrm>
+          <a:prstGeom prst="rect">
+            <a:avLst/>
+          </a:prstGeom>
+          <a:noFill/>
+        </p:spPr>
+        <p:txBody>
+          <a:bodyPr wrap="square">
+            <a:spAutoFit/>
+          </a:bodyPr>
+          <a:lstStyle/>
+          <a:p>
+            <a:pPr>
+              <a:spcAft>
+                <a:spcPts val="1600"/>
+              </a:spcAft>
+              <a:defRPr sz="1200" b="0">
+                <a:solidFill>
+                  <a:srgbClr val="087F70"/>
+                </a:solidFill>
+                <a:latin typeface="Arial"/>
+              </a:defRPr>
+            </a:pPr>
+            <a:r>
+              <a:t>02</a:t>
             </a:r>
           </a:p>
         </p:txBody>
@@ -3585,6 +6198,14 @@
 <file path=ppt/slides/slide3.xml><?xml version="1.0" encoding="utf-8"?>
 <p:sld xmlns:a="http://schemas.openxmlformats.org/drawingml/2006/main" xmlns:p="http://schemas.openxmlformats.org/presentationml/2006/main" xmlns:r="http://schemas.openxmlformats.org/officeDocument/2006/relationships">
   <p:cSld>
+    <p:bg>
+      <p:bgPr>
+        <a:solidFill>
+          <a:srgbClr val="F6F8F3"/>
+        </a:solidFill>
+        <a:effectLst/>
+      </p:bgPr>
+    </p:bg>
     <p:spTree>
       <p:nvGrpSpPr>
         <p:cNvPr id="1" name=""/>
@@ -3594,64 +6215,270 @@
       <p:grpSpPr/>
       <p:sp>
         <p:nvSpPr>
-          <p:cNvPr id="2" name="Title 1"/>
-          <p:cNvSpPr>
-            <a:spLocks noGrp="1"/>
-          </p:cNvSpPr>
-          <p:nvPr>
-            <p:ph type="title"/>
-          </p:nvPr>
-        </p:nvSpPr>
-        <p:spPr/>
-        <p:txBody>
-          <a:bodyPr/>
-          <a:lstStyle/>
-          <a:p>
-            <a:pPr>
-              <a:defRPr sz="3200"/>
-            </a:pPr>
-            <a:r>
-              <a:t>Dữ liệu</a:t>
-            </a:r>
-          </a:p>
-        </p:txBody>
-      </p:sp>
-      <p:sp>
-        <p:nvSpPr>
-          <p:cNvPr id="3" name="Content Placeholder 2"/>
-          <p:cNvSpPr>
-            <a:spLocks noGrp="1"/>
-          </p:cNvSpPr>
-          <p:nvPr>
-            <p:ph idx="1"/>
-          </p:nvPr>
-        </p:nvSpPr>
-        <p:spPr/>
-        <p:txBody>
-          <a:bodyPr/>
-          <a:lstStyle/>
-          <a:p>
-            <a:pPr>
-              <a:defRPr sz="2300"/>
-            </a:pPr>
-            <a:r>
-              <a:t>Đọc MATLAB từ bản lưu công khai dẫn nguồn NASA</a:t>
-            </a:r>
-          </a:p>
-          <a:p>
-            <a:pPr>
-              <a:defRPr sz="2300"/>
-            </a:pPr>
-            <a:r>
-              <a:t>2.089.048 dòng sạch; 4 pin; 636 chu kỳ xả</a:t>
-            </a:r>
-          </a:p>
-          <a:p>
-            <a:pPr>
-              <a:defRPr sz="2300"/>
-            </a:pPr>
-            <a:r>
-              <a:t>2 dòng sạc thiếu tín hiệu được loại có nhật ký; không nhân bản</a:t>
+          <p:cNvPr id="2" name="Rectangle 1"/>
+          <p:cNvSpPr/>
+          <p:nvPr/>
+        </p:nvSpPr>
+        <p:spPr>
+          <a:xfrm>
+            <a:off x="0" y="0"/>
+            <a:ext cx="146304" cy="6858000"/>
+          </a:xfrm>
+          <a:prstGeom prst="rect">
+            <a:avLst/>
+          </a:prstGeom>
+          <a:solidFill>
+            <a:srgbClr val="087F70"/>
+          </a:solidFill>
+          <a:ln>
+            <a:noFill/>
+          </a:ln>
+        </p:spPr>
+        <p:style>
+          <a:lnRef idx="1">
+            <a:schemeClr val="accent1"/>
+          </a:lnRef>
+          <a:fillRef idx="3">
+            <a:schemeClr val="accent1"/>
+          </a:fillRef>
+          <a:effectRef idx="2">
+            <a:schemeClr val="accent1"/>
+          </a:effectRef>
+          <a:fontRef idx="minor">
+            <a:schemeClr val="lt1"/>
+          </a:fontRef>
+        </p:style>
+        <p:txBody>
+          <a:bodyPr rtlCol="0" anchor="ctr"/>
+          <a:lstStyle/>
+          <a:p>
+            <a:pPr algn="ctr"/>
+          </a:p>
+        </p:txBody>
+      </p:sp>
+      <p:sp>
+        <p:nvSpPr>
+          <p:cNvPr id="3" name="TextBox 2"/>
+          <p:cNvSpPr txBox="1"/>
+          <p:nvPr/>
+        </p:nvSpPr>
+        <p:spPr>
+          <a:xfrm>
+            <a:off x="594360" y="274320"/>
+            <a:ext cx="10972800" cy="365760"/>
+          </a:xfrm>
+          <a:prstGeom prst="rect">
+            <a:avLst/>
+          </a:prstGeom>
+          <a:noFill/>
+        </p:spPr>
+        <p:txBody>
+          <a:bodyPr wrap="square">
+            <a:spAutoFit/>
+          </a:bodyPr>
+          <a:lstStyle/>
+          <a:p>
+            <a:pPr>
+              <a:spcAft>
+                <a:spcPts val="1600"/>
+              </a:spcAft>
+              <a:defRPr sz="1200" b="1">
+                <a:solidFill>
+                  <a:srgbClr val="087F70"/>
+                </a:solidFill>
+                <a:latin typeface="Arial"/>
+              </a:defRPr>
+            </a:pPr>
+            <a:r>
+              <a:t>VINCENT D / NGHIÊN CỨU SỨC KHỎE PIN</a:t>
+            </a:r>
+          </a:p>
+        </p:txBody>
+      </p:sp>
+      <p:sp>
+        <p:nvSpPr>
+          <p:cNvPr id="4" name="TextBox 3"/>
+          <p:cNvSpPr txBox="1"/>
+          <p:nvPr/>
+        </p:nvSpPr>
+        <p:spPr>
+          <a:xfrm>
+            <a:off x="594360" y="868680"/>
+            <a:ext cx="10972800" cy="1188720"/>
+          </a:xfrm>
+          <a:prstGeom prst="rect">
+            <a:avLst/>
+          </a:prstGeom>
+          <a:noFill/>
+        </p:spPr>
+        <p:txBody>
+          <a:bodyPr wrap="square">
+            <a:spAutoFit/>
+          </a:bodyPr>
+          <a:lstStyle/>
+          <a:p>
+            <a:pPr>
+              <a:spcAft>
+                <a:spcPts val="1600"/>
+              </a:spcAft>
+              <a:defRPr sz="3200" b="1">
+                <a:solidFill>
+                  <a:srgbClr val="193431"/>
+                </a:solidFill>
+                <a:latin typeface="Arial"/>
+              </a:defRPr>
+            </a:pPr>
+            <a:r>
+              <a:t>Nguồn dữ liệu SDU 2025</a:t>
+            </a:r>
+          </a:p>
+        </p:txBody>
+      </p:sp>
+      <p:sp>
+        <p:nvSpPr>
+          <p:cNvPr id="5" name="TextBox 4"/>
+          <p:cNvSpPr txBox="1"/>
+          <p:nvPr/>
+        </p:nvSpPr>
+        <p:spPr>
+          <a:xfrm>
+            <a:off x="777240" y="2286000"/>
+            <a:ext cx="10789920" cy="3383280"/>
+          </a:xfrm>
+          <a:prstGeom prst="rect">
+            <a:avLst/>
+          </a:prstGeom>
+          <a:noFill/>
+        </p:spPr>
+        <p:txBody>
+          <a:bodyPr wrap="square">
+            <a:spAutoFit/>
+          </a:bodyPr>
+          <a:lstStyle/>
+          <a:p>
+            <a:pPr>
+              <a:spcAft>
+                <a:spcPts val="1600"/>
+              </a:spcAft>
+              <a:defRPr sz="2400" b="0">
+                <a:solidFill>
+                  <a:srgbClr val="193431"/>
+                </a:solidFill>
+                <a:latin typeface="Arial"/>
+              </a:defRPr>
+            </a:pPr>
+            <a:r>
+              <a:t>• Wang, Gao và Tian · Đại học Sơn Đông</a:t>
+            </a:r>
+          </a:p>
+          <a:p>
+            <a:pPr>
+              <a:spcAft>
+                <a:spcPts val="1600"/>
+              </a:spcAft>
+              <a:defRPr sz="2400" b="0">
+                <a:solidFill>
+                  <a:srgbClr val="193431"/>
+                </a:solidFill>
+                <a:latin typeface="Arial"/>
+              </a:defRPr>
+            </a:pPr>
+            <a:r>
+              <a:t>• Zenodo DOI: 10.5281/zenodo.14859405 · CC BY 4.0</a:t>
+            </a:r>
+          </a:p>
+          <a:p>
+            <a:pPr>
+              <a:spcAft>
+                <a:spcPts val="1600"/>
+              </a:spcAft>
+              <a:defRPr sz="2400" b="0">
+                <a:solidFill>
+                  <a:srgbClr val="193431"/>
+                </a:solidFill>
+                <a:latin typeface="Arial"/>
+              </a:defRPr>
+            </a:pPr>
+            <a:r>
+              <a:t>• 86 pin NMC(532)/graphite qua hai giai đoạn</a:t>
+            </a:r>
+          </a:p>
+        </p:txBody>
+      </p:sp>
+      <p:sp>
+        <p:nvSpPr>
+          <p:cNvPr id="6" name="TextBox 5"/>
+          <p:cNvSpPr txBox="1"/>
+          <p:nvPr/>
+        </p:nvSpPr>
+        <p:spPr>
+          <a:xfrm>
+            <a:off x="594360" y="6446520"/>
+            <a:ext cx="10058400" cy="228600"/>
+          </a:xfrm>
+          <a:prstGeom prst="rect">
+            <a:avLst/>
+          </a:prstGeom>
+          <a:noFill/>
+        </p:spPr>
+        <p:txBody>
+          <a:bodyPr wrap="square">
+            <a:spAutoFit/>
+          </a:bodyPr>
+          <a:lstStyle/>
+          <a:p>
+            <a:pPr>
+              <a:spcAft>
+                <a:spcPts val="1600"/>
+              </a:spcAft>
+              <a:defRPr sz="1000" b="0">
+                <a:solidFill>
+                  <a:srgbClr val="60766D"/>
+                </a:solidFill>
+                <a:latin typeface="Arial"/>
+              </a:defRPr>
+            </a:pPr>
+            <a:r>
+              <a:t>Nguyễn Văn Duy · MSSV 2311553949 · Khoa Học Dữ Liệu</a:t>
+            </a:r>
+          </a:p>
+        </p:txBody>
+      </p:sp>
+      <p:sp>
+        <p:nvSpPr>
+          <p:cNvPr id="7" name="TextBox 6"/>
+          <p:cNvSpPr txBox="1"/>
+          <p:nvPr/>
+        </p:nvSpPr>
+        <p:spPr>
+          <a:xfrm>
+            <a:off x="10972800" y="6400800"/>
+            <a:ext cx="548640" cy="274320"/>
+          </a:xfrm>
+          <a:prstGeom prst="rect">
+            <a:avLst/>
+          </a:prstGeom>
+          <a:noFill/>
+        </p:spPr>
+        <p:txBody>
+          <a:bodyPr wrap="square">
+            <a:spAutoFit/>
+          </a:bodyPr>
+          <a:lstStyle/>
+          <a:p>
+            <a:pPr>
+              <a:spcAft>
+                <a:spcPts val="1600"/>
+              </a:spcAft>
+              <a:defRPr sz="1200" b="0">
+                <a:solidFill>
+                  <a:srgbClr val="087F70"/>
+                </a:solidFill>
+                <a:latin typeface="Arial"/>
+              </a:defRPr>
+            </a:pPr>
+            <a:r>
+              <a:t>03</a:t>
             </a:r>
           </a:p>
         </p:txBody>
@@ -3667,6 +6494,14 @@
 <file path=ppt/slides/slide4.xml><?xml version="1.0" encoding="utf-8"?>
 <p:sld xmlns:a="http://schemas.openxmlformats.org/drawingml/2006/main" xmlns:p="http://schemas.openxmlformats.org/presentationml/2006/main" xmlns:r="http://schemas.openxmlformats.org/officeDocument/2006/relationships">
   <p:cSld>
+    <p:bg>
+      <p:bgPr>
+        <a:solidFill>
+          <a:srgbClr val="F6F8F3"/>
+        </a:solidFill>
+        <a:effectLst/>
+      </p:bgPr>
+    </p:bg>
     <p:spTree>
       <p:nvGrpSpPr>
         <p:cNvPr id="1" name=""/>
@@ -3676,64 +6511,270 @@
       <p:grpSpPr/>
       <p:sp>
         <p:nvSpPr>
-          <p:cNvPr id="2" name="Title 1"/>
-          <p:cNvSpPr>
-            <a:spLocks noGrp="1"/>
-          </p:cNvSpPr>
-          <p:nvPr>
-            <p:ph type="title"/>
-          </p:nvPr>
-        </p:nvSpPr>
-        <p:spPr/>
-        <p:txBody>
-          <a:bodyPr/>
-          <a:lstStyle/>
-          <a:p>
-            <a:pPr>
-              <a:defRPr sz="3200"/>
-            </a:pPr>
-            <a:r>
-              <a:t>Nhãn và đặc trưng</a:t>
-            </a:r>
-          </a:p>
-        </p:txBody>
-      </p:sp>
-      <p:sp>
-        <p:nvSpPr>
-          <p:cNvPr id="3" name="Content Placeholder 2"/>
-          <p:cNvSpPr>
-            <a:spLocks noGrp="1"/>
-          </p:cNvSpPr>
-          <p:nvPr>
-            <p:ph idx="1"/>
-          </p:nvPr>
-        </p:nvSpPr>
-        <p:spPr/>
-        <p:txBody>
-          <a:bodyPr/>
-          <a:lstStyle/>
-          <a:p>
-            <a:pPr>
-              <a:defRPr sz="2300"/>
-            </a:pPr>
-            <a:r>
-              <a:t>SOH (%) = 100 × capacity / 2 Ah</a:t>
-            </a:r>
-          </a:p>
-          <a:p>
-            <a:pPr>
-              <a:defRPr sz="2300"/>
-            </a:pPr>
-            <a:r>
-              <a:t>11 đặc trưng: chu kỳ, điện áp, dòng, nhiệt độ</a:t>
-            </a:r>
-          </a:p>
-          <a:p>
-            <a:pPr>
-              <a:defRPr sz="2300"/>
-            </a:pPr>
-            <a:r>
-              <a:t>Không dùng capacity, SOH hoặc tín hiệu sau 120 giây</a:t>
+          <p:cNvPr id="2" name="Rectangle 1"/>
+          <p:cNvSpPr/>
+          <p:nvPr/>
+        </p:nvSpPr>
+        <p:spPr>
+          <a:xfrm>
+            <a:off x="0" y="0"/>
+            <a:ext cx="146304" cy="6858000"/>
+          </a:xfrm>
+          <a:prstGeom prst="rect">
+            <a:avLst/>
+          </a:prstGeom>
+          <a:solidFill>
+            <a:srgbClr val="087F70"/>
+          </a:solidFill>
+          <a:ln>
+            <a:noFill/>
+          </a:ln>
+        </p:spPr>
+        <p:style>
+          <a:lnRef idx="1">
+            <a:schemeClr val="accent1"/>
+          </a:lnRef>
+          <a:fillRef idx="3">
+            <a:schemeClr val="accent1"/>
+          </a:fillRef>
+          <a:effectRef idx="2">
+            <a:schemeClr val="accent1"/>
+          </a:effectRef>
+          <a:fontRef idx="minor">
+            <a:schemeClr val="lt1"/>
+          </a:fontRef>
+        </p:style>
+        <p:txBody>
+          <a:bodyPr rtlCol="0" anchor="ctr"/>
+          <a:lstStyle/>
+          <a:p>
+            <a:pPr algn="ctr"/>
+          </a:p>
+        </p:txBody>
+      </p:sp>
+      <p:sp>
+        <p:nvSpPr>
+          <p:cNvPr id="3" name="TextBox 2"/>
+          <p:cNvSpPr txBox="1"/>
+          <p:nvPr/>
+        </p:nvSpPr>
+        <p:spPr>
+          <a:xfrm>
+            <a:off x="594360" y="274320"/>
+            <a:ext cx="10972800" cy="365760"/>
+          </a:xfrm>
+          <a:prstGeom prst="rect">
+            <a:avLst/>
+          </a:prstGeom>
+          <a:noFill/>
+        </p:spPr>
+        <p:txBody>
+          <a:bodyPr wrap="square">
+            <a:spAutoFit/>
+          </a:bodyPr>
+          <a:lstStyle/>
+          <a:p>
+            <a:pPr>
+              <a:spcAft>
+                <a:spcPts val="1600"/>
+              </a:spcAft>
+              <a:defRPr sz="1200" b="1">
+                <a:solidFill>
+                  <a:srgbClr val="087F70"/>
+                </a:solidFill>
+                <a:latin typeface="Arial"/>
+              </a:defRPr>
+            </a:pPr>
+            <a:r>
+              <a:t>VINCENT D / NGHIÊN CỨU SỨC KHỎE PIN</a:t>
+            </a:r>
+          </a:p>
+        </p:txBody>
+      </p:sp>
+      <p:sp>
+        <p:nvSpPr>
+          <p:cNvPr id="4" name="TextBox 3"/>
+          <p:cNvSpPr txBox="1"/>
+          <p:nvPr/>
+        </p:nvSpPr>
+        <p:spPr>
+          <a:xfrm>
+            <a:off x="594360" y="868680"/>
+            <a:ext cx="10972800" cy="1188720"/>
+          </a:xfrm>
+          <a:prstGeom prst="rect">
+            <a:avLst/>
+          </a:prstGeom>
+          <a:noFill/>
+        </p:spPr>
+        <p:txBody>
+          <a:bodyPr wrap="square">
+            <a:spAutoFit/>
+          </a:bodyPr>
+          <a:lstStyle/>
+          <a:p>
+            <a:pPr>
+              <a:spcAft>
+                <a:spcPts val="1600"/>
+              </a:spcAft>
+              <a:defRPr sz="3200" b="1">
+                <a:solidFill>
+                  <a:srgbClr val="193431"/>
+                </a:solidFill>
+                <a:latin typeface="Arial"/>
+              </a:defRPr>
+            </a:pPr>
+            <a:r>
+              <a:t>Từ nguồn đến dữ liệu mô hình</a:t>
+            </a:r>
+          </a:p>
+        </p:txBody>
+      </p:sp>
+      <p:sp>
+        <p:nvSpPr>
+          <p:cNvPr id="5" name="TextBox 4"/>
+          <p:cNvSpPr txBox="1"/>
+          <p:nvPr/>
+        </p:nvSpPr>
+        <p:spPr>
+          <a:xfrm>
+            <a:off x="777240" y="2286000"/>
+            <a:ext cx="10789920" cy="3383280"/>
+          </a:xfrm>
+          <a:prstGeom prst="rect">
+            <a:avLst/>
+          </a:prstGeom>
+          <a:noFill/>
+        </p:spPr>
+        <p:txBody>
+          <a:bodyPr wrap="square">
+            <a:spAutoFit/>
+          </a:bodyPr>
+          <a:lstStyle/>
+          <a:p>
+            <a:pPr>
+              <a:spcAft>
+                <a:spcPts val="1600"/>
+              </a:spcAft>
+              <a:defRPr sz="2400" b="0">
+                <a:solidFill>
+                  <a:srgbClr val="193431"/>
+                </a:solidFill>
+                <a:latin typeface="Arial"/>
+              </a:defRPr>
+            </a:pPr>
+            <a:r>
+              <a:t>• 145.112.317 dòng nguồn → 30.929.675 dòng xả tham chiếu</a:t>
+            </a:r>
+          </a:p>
+          <a:p>
+            <a:pPr>
+              <a:spcAft>
+                <a:spcPts val="1600"/>
+              </a:spcAft>
+              <a:defRPr sz="2400" b="0">
+                <a:solidFill>
+                  <a:srgbClr val="193431"/>
+                </a:solidFill>
+                <a:latin typeface="Arial"/>
+              </a:defRPr>
+            </a:pPr>
+            <a:r>
+              <a:t>• Bản chọn: 10.000.000 dòng, đủ 20.823 chu kỳ</a:t>
+            </a:r>
+          </a:p>
+          <a:p>
+            <a:pPr>
+              <a:spcAft>
+                <a:spcPts val="1600"/>
+              </a:spcAft>
+              <a:defRPr sz="2400" b="0">
+                <a:solidFill>
+                  <a:srgbClr val="193431"/>
+                </a:solidFill>
+                <a:latin typeface="Arial"/>
+              </a:defRPr>
+            </a:pPr>
+            <a:r>
+              <a:t>• Giữ nguyên cửa sổ đầu xả; lấy thưa đoạn sau</a:t>
+            </a:r>
+          </a:p>
+        </p:txBody>
+      </p:sp>
+      <p:sp>
+        <p:nvSpPr>
+          <p:cNvPr id="6" name="TextBox 5"/>
+          <p:cNvSpPr txBox="1"/>
+          <p:nvPr/>
+        </p:nvSpPr>
+        <p:spPr>
+          <a:xfrm>
+            <a:off x="594360" y="6446520"/>
+            <a:ext cx="10058400" cy="228600"/>
+          </a:xfrm>
+          <a:prstGeom prst="rect">
+            <a:avLst/>
+          </a:prstGeom>
+          <a:noFill/>
+        </p:spPr>
+        <p:txBody>
+          <a:bodyPr wrap="square">
+            <a:spAutoFit/>
+          </a:bodyPr>
+          <a:lstStyle/>
+          <a:p>
+            <a:pPr>
+              <a:spcAft>
+                <a:spcPts val="1600"/>
+              </a:spcAft>
+              <a:defRPr sz="1000" b="0">
+                <a:solidFill>
+                  <a:srgbClr val="60766D"/>
+                </a:solidFill>
+                <a:latin typeface="Arial"/>
+              </a:defRPr>
+            </a:pPr>
+            <a:r>
+              <a:t>Nguyễn Văn Duy · MSSV 2311553949 · Khoa Học Dữ Liệu</a:t>
+            </a:r>
+          </a:p>
+        </p:txBody>
+      </p:sp>
+      <p:sp>
+        <p:nvSpPr>
+          <p:cNvPr id="7" name="TextBox 6"/>
+          <p:cNvSpPr txBox="1"/>
+          <p:nvPr/>
+        </p:nvSpPr>
+        <p:spPr>
+          <a:xfrm>
+            <a:off x="10972800" y="6400800"/>
+            <a:ext cx="548640" cy="274320"/>
+          </a:xfrm>
+          <a:prstGeom prst="rect">
+            <a:avLst/>
+          </a:prstGeom>
+          <a:noFill/>
+        </p:spPr>
+        <p:txBody>
+          <a:bodyPr wrap="square">
+            <a:spAutoFit/>
+          </a:bodyPr>
+          <a:lstStyle/>
+          <a:p>
+            <a:pPr>
+              <a:spcAft>
+                <a:spcPts val="1600"/>
+              </a:spcAft>
+              <a:defRPr sz="1200" b="0">
+                <a:solidFill>
+                  <a:srgbClr val="087F70"/>
+                </a:solidFill>
+                <a:latin typeface="Arial"/>
+              </a:defRPr>
+            </a:pPr>
+            <a:r>
+              <a:t>04</a:t>
             </a:r>
           </a:p>
         </p:txBody>
@@ -3749,6 +6790,14 @@
 <file path=ppt/slides/slide5.xml><?xml version="1.0" encoding="utf-8"?>
 <p:sld xmlns:a="http://schemas.openxmlformats.org/drawingml/2006/main" xmlns:p="http://schemas.openxmlformats.org/presentationml/2006/main" xmlns:r="http://schemas.openxmlformats.org/officeDocument/2006/relationships">
   <p:cSld>
+    <p:bg>
+      <p:bgPr>
+        <a:solidFill>
+          <a:srgbClr val="F6F8F3"/>
+        </a:solidFill>
+        <a:effectLst/>
+      </p:bgPr>
+    </p:bg>
     <p:spTree>
       <p:nvGrpSpPr>
         <p:cNvPr id="1" name=""/>
@@ -3758,64 +6807,223 @@
       <p:grpSpPr/>
       <p:sp>
         <p:nvSpPr>
-          <p:cNvPr id="2" name="Title 1"/>
-          <p:cNvSpPr>
-            <a:spLocks noGrp="1"/>
-          </p:cNvSpPr>
-          <p:nvPr>
-            <p:ph type="title"/>
-          </p:nvPr>
-        </p:nvSpPr>
-        <p:spPr/>
-        <p:txBody>
-          <a:bodyPr/>
-          <a:lstStyle/>
-          <a:p>
-            <a:pPr>
-              <a:defRPr sz="3200"/>
-            </a:pPr>
-            <a:r>
-              <a:t>Thiết kế kiểm thử</a:t>
-            </a:r>
-          </a:p>
-        </p:txBody>
-      </p:sp>
-      <p:sp>
-        <p:nvSpPr>
-          <p:cNvPr id="3" name="Content Placeholder 2"/>
-          <p:cNvSpPr>
-            <a:spLocks noGrp="1"/>
-          </p:cNvSpPr>
-          <p:nvPr>
-            <p:ph idx="1"/>
-          </p:nvPr>
-        </p:nvSpPr>
-        <p:spPr/>
-        <p:txBody>
-          <a:bodyPr/>
-          <a:lstStyle/>
-          <a:p>
-            <a:pPr>
-              <a:defRPr sz="2300"/>
-            </a:pPr>
-            <a:r>
-              <a:t>Leave-one-battery-out: 4 vòng</a:t>
-            </a:r>
-          </a:p>
-          <a:p>
-            <a:pPr>
-              <a:defRPr sz="2300"/>
-            </a:pPr>
-            <a:r>
-              <a:t>Huấn luyện ba pin, kiểm thử pin còn lại</a:t>
-            </a:r>
-          </a:p>
-          <a:p>
-            <a:pPr>
-              <a:defRPr sz="2300"/>
-            </a:pPr>
-            <a:r>
-              <a:t>Tham số cố định; chuẩn hóa fit trên train; không tuning trên test</a:t>
+          <p:cNvPr id="2" name="Rectangle 1"/>
+          <p:cNvSpPr/>
+          <p:nvPr/>
+        </p:nvSpPr>
+        <p:spPr>
+          <a:xfrm>
+            <a:off x="0" y="0"/>
+            <a:ext cx="146304" cy="6858000"/>
+          </a:xfrm>
+          <a:prstGeom prst="rect">
+            <a:avLst/>
+          </a:prstGeom>
+          <a:solidFill>
+            <a:srgbClr val="087F70"/>
+          </a:solidFill>
+          <a:ln>
+            <a:noFill/>
+          </a:ln>
+        </p:spPr>
+        <p:style>
+          <a:lnRef idx="1">
+            <a:schemeClr val="accent1"/>
+          </a:lnRef>
+          <a:fillRef idx="3">
+            <a:schemeClr val="accent1"/>
+          </a:fillRef>
+          <a:effectRef idx="2">
+            <a:schemeClr val="accent1"/>
+          </a:effectRef>
+          <a:fontRef idx="minor">
+            <a:schemeClr val="lt1"/>
+          </a:fontRef>
+        </p:style>
+        <p:txBody>
+          <a:bodyPr rtlCol="0" anchor="ctr"/>
+          <a:lstStyle/>
+          <a:p>
+            <a:pPr algn="ctr"/>
+          </a:p>
+        </p:txBody>
+      </p:sp>
+      <p:sp>
+        <p:nvSpPr>
+          <p:cNvPr id="3" name="TextBox 2"/>
+          <p:cNvSpPr txBox="1"/>
+          <p:nvPr/>
+        </p:nvSpPr>
+        <p:spPr>
+          <a:xfrm>
+            <a:off x="594360" y="274320"/>
+            <a:ext cx="10972800" cy="365760"/>
+          </a:xfrm>
+          <a:prstGeom prst="rect">
+            <a:avLst/>
+          </a:prstGeom>
+          <a:noFill/>
+        </p:spPr>
+        <p:txBody>
+          <a:bodyPr wrap="square">
+            <a:spAutoFit/>
+          </a:bodyPr>
+          <a:lstStyle/>
+          <a:p>
+            <a:pPr>
+              <a:spcAft>
+                <a:spcPts val="1600"/>
+              </a:spcAft>
+              <a:defRPr sz="1200" b="1">
+                <a:solidFill>
+                  <a:srgbClr val="087F70"/>
+                </a:solidFill>
+                <a:latin typeface="Arial"/>
+              </a:defRPr>
+            </a:pPr>
+            <a:r>
+              <a:t>VINCENT D / NGHIÊN CỨU SỨC KHỎE PIN</a:t>
+            </a:r>
+          </a:p>
+        </p:txBody>
+      </p:sp>
+      <p:sp>
+        <p:nvSpPr>
+          <p:cNvPr id="4" name="TextBox 3"/>
+          <p:cNvSpPr txBox="1"/>
+          <p:nvPr/>
+        </p:nvSpPr>
+        <p:spPr>
+          <a:xfrm>
+            <a:off x="594360" y="868680"/>
+            <a:ext cx="10972800" cy="1188720"/>
+          </a:xfrm>
+          <a:prstGeom prst="rect">
+            <a:avLst/>
+          </a:prstGeom>
+          <a:noFill/>
+        </p:spPr>
+        <p:txBody>
+          <a:bodyPr wrap="square">
+            <a:spAutoFit/>
+          </a:bodyPr>
+          <a:lstStyle/>
+          <a:p>
+            <a:pPr>
+              <a:spcAft>
+                <a:spcPts val="1600"/>
+              </a:spcAft>
+              <a:defRPr sz="3200" b="1">
+                <a:solidFill>
+                  <a:srgbClr val="193431"/>
+                </a:solidFill>
+                <a:latin typeface="Arial"/>
+              </a:defRPr>
+            </a:pPr>
+            <a:r>
+              <a:t>SOH theo hai giai đoạn</a:t>
+            </a:r>
+          </a:p>
+        </p:txBody>
+      </p:sp>
+      <p:pic>
+        <p:nvPicPr>
+          <p:cNvPr id="5" name="Picture 4" descr="soh_by_phase.png"/>
+          <p:cNvPicPr>
+            <a:picLocks noChangeAspect="1"/>
+          </p:cNvPicPr>
+          <p:nvPr/>
+        </p:nvPicPr>
+        <p:blipFill>
+          <a:blip r:embed="rId2"/>
+          <a:stretch>
+            <a:fillRect/>
+          </a:stretch>
+        </p:blipFill>
+        <p:spPr>
+          <a:xfrm>
+            <a:off x="700887" y="1828800"/>
+            <a:ext cx="10789920" cy="3596640"/>
+          </a:xfrm>
+          <a:prstGeom prst="rect">
+            <a:avLst/>
+          </a:prstGeom>
+        </p:spPr>
+      </p:pic>
+      <p:sp>
+        <p:nvSpPr>
+          <p:cNvPr id="6" name="TextBox 5"/>
+          <p:cNvSpPr txBox="1"/>
+          <p:nvPr/>
+        </p:nvSpPr>
+        <p:spPr>
+          <a:xfrm>
+            <a:off x="594360" y="6446520"/>
+            <a:ext cx="10058400" cy="228600"/>
+          </a:xfrm>
+          <a:prstGeom prst="rect">
+            <a:avLst/>
+          </a:prstGeom>
+          <a:noFill/>
+        </p:spPr>
+        <p:txBody>
+          <a:bodyPr wrap="square">
+            <a:spAutoFit/>
+          </a:bodyPr>
+          <a:lstStyle/>
+          <a:p>
+            <a:pPr>
+              <a:spcAft>
+                <a:spcPts val="1600"/>
+              </a:spcAft>
+              <a:defRPr sz="1000" b="0">
+                <a:solidFill>
+                  <a:srgbClr val="60766D"/>
+                </a:solidFill>
+                <a:latin typeface="Arial"/>
+              </a:defRPr>
+            </a:pPr>
+            <a:r>
+              <a:t>Nguyễn Văn Duy · MSSV 2311553949 · Khoa Học Dữ Liệu</a:t>
+            </a:r>
+          </a:p>
+        </p:txBody>
+      </p:sp>
+      <p:sp>
+        <p:nvSpPr>
+          <p:cNvPr id="7" name="TextBox 6"/>
+          <p:cNvSpPr txBox="1"/>
+          <p:nvPr/>
+        </p:nvSpPr>
+        <p:spPr>
+          <a:xfrm>
+            <a:off x="10972800" y="6400800"/>
+            <a:ext cx="548640" cy="274320"/>
+          </a:xfrm>
+          <a:prstGeom prst="rect">
+            <a:avLst/>
+          </a:prstGeom>
+          <a:noFill/>
+        </p:spPr>
+        <p:txBody>
+          <a:bodyPr wrap="square">
+            <a:spAutoFit/>
+          </a:bodyPr>
+          <a:lstStyle/>
+          <a:p>
+            <a:pPr>
+              <a:spcAft>
+                <a:spcPts val="1600"/>
+              </a:spcAft>
+              <a:defRPr sz="1200" b="0">
+                <a:solidFill>
+                  <a:srgbClr val="087F70"/>
+                </a:solidFill>
+                <a:latin typeface="Arial"/>
+              </a:defRPr>
+            </a:pPr>
+            <a:r>
+              <a:t>05</a:t>
             </a:r>
           </a:p>
         </p:txBody>
@@ -3831,6 +7039,14 @@
 <file path=ppt/slides/slide6.xml><?xml version="1.0" encoding="utf-8"?>
 <p:sld xmlns:a="http://schemas.openxmlformats.org/drawingml/2006/main" xmlns:p="http://schemas.openxmlformats.org/presentationml/2006/main" xmlns:r="http://schemas.openxmlformats.org/officeDocument/2006/relationships">
   <p:cSld>
+    <p:bg>
+      <p:bgPr>
+        <a:solidFill>
+          <a:srgbClr val="F6F8F3"/>
+        </a:solidFill>
+        <a:effectLst/>
+      </p:bgPr>
+    </p:bg>
     <p:spTree>
       <p:nvGrpSpPr>
         <p:cNvPr id="1" name=""/>
@@ -3840,64 +7056,270 @@
       <p:grpSpPr/>
       <p:sp>
         <p:nvSpPr>
-          <p:cNvPr id="2" name="Title 1"/>
-          <p:cNvSpPr>
-            <a:spLocks noGrp="1"/>
-          </p:cNvSpPr>
-          <p:nvPr>
-            <p:ph type="title"/>
-          </p:nvPr>
-        </p:nvSpPr>
-        <p:spPr/>
-        <p:txBody>
-          <a:bodyPr/>
-          <a:lstStyle/>
-          <a:p>
-            <a:pPr>
-              <a:defRPr sz="3200"/>
-            </a:pPr>
-            <a:r>
-              <a:t>Mô hình so sánh</a:t>
-            </a:r>
-          </a:p>
-        </p:txBody>
-      </p:sp>
-      <p:sp>
-        <p:nvSpPr>
-          <p:cNvPr id="3" name="Content Placeholder 2"/>
-          <p:cNvSpPr>
-            <a:spLocks noGrp="1"/>
-          </p:cNvSpPr>
-          <p:nvPr>
-            <p:ph idx="1"/>
-          </p:nvPr>
-        </p:nvSpPr>
-        <p:spPr/>
-        <p:txBody>
-          <a:bodyPr/>
-          <a:lstStyle/>
-          <a:p>
-            <a:pPr>
-              <a:defRPr sz="2300"/>
-            </a:pPr>
-            <a:r>
-              <a:t>Mean baseline và Cycle Ridge</a:t>
-            </a:r>
-          </a:p>
-          <a:p>
-            <a:pPr>
-              <a:defRPr sz="2300"/>
-            </a:pPr>
-            <a:r>
-              <a:t>Signal Ridge, Random Forest, HistGradientBoosting</a:t>
-            </a:r>
-          </a:p>
-          <a:p>
-            <a:pPr>
-              <a:defRPr sz="2300"/>
-            </a:pPr>
-            <a:r>
-              <a:t>Demo chọn RF cố định trước khi xem điểm số</a:t>
+          <p:cNvPr id="2" name="Rectangle 1"/>
+          <p:cNvSpPr/>
+          <p:nvPr/>
+        </p:nvSpPr>
+        <p:spPr>
+          <a:xfrm>
+            <a:off x="0" y="0"/>
+            <a:ext cx="146304" cy="6858000"/>
+          </a:xfrm>
+          <a:prstGeom prst="rect">
+            <a:avLst/>
+          </a:prstGeom>
+          <a:solidFill>
+            <a:srgbClr val="087F70"/>
+          </a:solidFill>
+          <a:ln>
+            <a:noFill/>
+          </a:ln>
+        </p:spPr>
+        <p:style>
+          <a:lnRef idx="1">
+            <a:schemeClr val="accent1"/>
+          </a:lnRef>
+          <a:fillRef idx="3">
+            <a:schemeClr val="accent1"/>
+          </a:fillRef>
+          <a:effectRef idx="2">
+            <a:schemeClr val="accent1"/>
+          </a:effectRef>
+          <a:fontRef idx="minor">
+            <a:schemeClr val="lt1"/>
+          </a:fontRef>
+        </p:style>
+        <p:txBody>
+          <a:bodyPr rtlCol="0" anchor="ctr"/>
+          <a:lstStyle/>
+          <a:p>
+            <a:pPr algn="ctr"/>
+          </a:p>
+        </p:txBody>
+      </p:sp>
+      <p:sp>
+        <p:nvSpPr>
+          <p:cNvPr id="3" name="TextBox 2"/>
+          <p:cNvSpPr txBox="1"/>
+          <p:nvPr/>
+        </p:nvSpPr>
+        <p:spPr>
+          <a:xfrm>
+            <a:off x="594360" y="274320"/>
+            <a:ext cx="10972800" cy="365760"/>
+          </a:xfrm>
+          <a:prstGeom prst="rect">
+            <a:avLst/>
+          </a:prstGeom>
+          <a:noFill/>
+        </p:spPr>
+        <p:txBody>
+          <a:bodyPr wrap="square">
+            <a:spAutoFit/>
+          </a:bodyPr>
+          <a:lstStyle/>
+          <a:p>
+            <a:pPr>
+              <a:spcAft>
+                <a:spcPts val="1600"/>
+              </a:spcAft>
+              <a:defRPr sz="1200" b="1">
+                <a:solidFill>
+                  <a:srgbClr val="087F70"/>
+                </a:solidFill>
+                <a:latin typeface="Arial"/>
+              </a:defRPr>
+            </a:pPr>
+            <a:r>
+              <a:t>VINCENT D / NGHIÊN CỨU SỨC KHỎE PIN</a:t>
+            </a:r>
+          </a:p>
+        </p:txBody>
+      </p:sp>
+      <p:sp>
+        <p:nvSpPr>
+          <p:cNvPr id="4" name="TextBox 3"/>
+          <p:cNvSpPr txBox="1"/>
+          <p:nvPr/>
+        </p:nvSpPr>
+        <p:spPr>
+          <a:xfrm>
+            <a:off x="594360" y="868680"/>
+            <a:ext cx="10972800" cy="1188720"/>
+          </a:xfrm>
+          <a:prstGeom prst="rect">
+            <a:avLst/>
+          </a:prstGeom>
+          <a:noFill/>
+        </p:spPr>
+        <p:txBody>
+          <a:bodyPr wrap="square">
+            <a:spAutoFit/>
+          </a:bodyPr>
+          <a:lstStyle/>
+          <a:p>
+            <a:pPr>
+              <a:spcAft>
+                <a:spcPts val="1600"/>
+              </a:spcAft>
+              <a:defRPr sz="3200" b="1">
+                <a:solidFill>
+                  <a:srgbClr val="193431"/>
+                </a:solidFill>
+                <a:latin typeface="Arial"/>
+              </a:defRPr>
+            </a:pPr>
+            <a:r>
+              <a:t>Chất lượng và truy xuất nguồn</a:t>
+            </a:r>
+          </a:p>
+        </p:txBody>
+      </p:sp>
+      <p:sp>
+        <p:nvSpPr>
+          <p:cNvPr id="5" name="TextBox 4"/>
+          <p:cNvSpPr txBox="1"/>
+          <p:nvPr/>
+        </p:nvSpPr>
+        <p:spPr>
+          <a:xfrm>
+            <a:off x="777240" y="2286000"/>
+            <a:ext cx="10789920" cy="3383280"/>
+          </a:xfrm>
+          <a:prstGeom prst="rect">
+            <a:avLst/>
+          </a:prstGeom>
+          <a:noFill/>
+        </p:spPr>
+        <p:txBody>
+          <a:bodyPr wrap="square">
+            <a:spAutoFit/>
+          </a:bodyPr>
+          <a:lstStyle/>
+          <a:p>
+            <a:pPr>
+              <a:spcAft>
+                <a:spcPts val="1600"/>
+              </a:spcAft>
+              <a:defRPr sz="2400" b="0">
+                <a:solidFill>
+                  <a:srgbClr val="193431"/>
+                </a:solidFill>
+                <a:latin typeface="Arial"/>
+              </a:defRPr>
+            </a:pPr>
+            <a:r>
+              <a:t>• Đối chiếu MD5 gói gốc và SHA-256 file được chọn</a:t>
+            </a:r>
+          </a:p>
+          <a:p>
+            <a:pPr>
+              <a:spcAft>
+                <a:spcPts val="1600"/>
+              </a:spcAft>
+              <a:defRPr sz="2400" b="0">
+                <a:solidFill>
+                  <a:srgbClr val="193431"/>
+                </a:solidFill>
+                <a:latin typeface="Arial"/>
+              </a:defRPr>
+            </a:pPr>
+            <a:r>
+              <a:t>• Không thiếu tín hiệu bắt buộc, không trùng khóa thời gian</a:t>
+            </a:r>
+          </a:p>
+          <a:p>
+            <a:pPr>
+              <a:spcAft>
+                <a:spcPts val="1600"/>
+              </a:spcAft>
+              <a:defRPr sz="2400" b="0">
+                <a:solidFill>
+                  <a:srgbClr val="193431"/>
+                </a:solidFill>
+                <a:latin typeface="Arial"/>
+              </a:defRPr>
+            </a:pPr>
+            <a:r>
+              <a:t>• 25 điểm nghi vấn được giữ; không nằm trong 120 giây đầu</a:t>
+            </a:r>
+          </a:p>
+        </p:txBody>
+      </p:sp>
+      <p:sp>
+        <p:nvSpPr>
+          <p:cNvPr id="6" name="TextBox 5"/>
+          <p:cNvSpPr txBox="1"/>
+          <p:nvPr/>
+        </p:nvSpPr>
+        <p:spPr>
+          <a:xfrm>
+            <a:off x="594360" y="6446520"/>
+            <a:ext cx="10058400" cy="228600"/>
+          </a:xfrm>
+          <a:prstGeom prst="rect">
+            <a:avLst/>
+          </a:prstGeom>
+          <a:noFill/>
+        </p:spPr>
+        <p:txBody>
+          <a:bodyPr wrap="square">
+            <a:spAutoFit/>
+          </a:bodyPr>
+          <a:lstStyle/>
+          <a:p>
+            <a:pPr>
+              <a:spcAft>
+                <a:spcPts val="1600"/>
+              </a:spcAft>
+              <a:defRPr sz="1000" b="0">
+                <a:solidFill>
+                  <a:srgbClr val="60766D"/>
+                </a:solidFill>
+                <a:latin typeface="Arial"/>
+              </a:defRPr>
+            </a:pPr>
+            <a:r>
+              <a:t>Nguyễn Văn Duy · MSSV 2311553949 · Khoa Học Dữ Liệu</a:t>
+            </a:r>
+          </a:p>
+        </p:txBody>
+      </p:sp>
+      <p:sp>
+        <p:nvSpPr>
+          <p:cNvPr id="7" name="TextBox 6"/>
+          <p:cNvSpPr txBox="1"/>
+          <p:nvPr/>
+        </p:nvSpPr>
+        <p:spPr>
+          <a:xfrm>
+            <a:off x="10972800" y="6400800"/>
+            <a:ext cx="548640" cy="274320"/>
+          </a:xfrm>
+          <a:prstGeom prst="rect">
+            <a:avLst/>
+          </a:prstGeom>
+          <a:noFill/>
+        </p:spPr>
+        <p:txBody>
+          <a:bodyPr wrap="square">
+            <a:spAutoFit/>
+          </a:bodyPr>
+          <a:lstStyle/>
+          <a:p>
+            <a:pPr>
+              <a:spcAft>
+                <a:spcPts val="1600"/>
+              </a:spcAft>
+              <a:defRPr sz="1200" b="0">
+                <a:solidFill>
+                  <a:srgbClr val="087F70"/>
+                </a:solidFill>
+                <a:latin typeface="Arial"/>
+              </a:defRPr>
+            </a:pPr>
+            <a:r>
+              <a:t>06</a:t>
             </a:r>
           </a:p>
         </p:txBody>
@@ -3913,6 +7335,14 @@
 <file path=ppt/slides/slide7.xml><?xml version="1.0" encoding="utf-8"?>
 <p:sld xmlns:a="http://schemas.openxmlformats.org/drawingml/2006/main" xmlns:p="http://schemas.openxmlformats.org/presentationml/2006/main" xmlns:r="http://schemas.openxmlformats.org/officeDocument/2006/relationships">
   <p:cSld>
+    <p:bg>
+      <p:bgPr>
+        <a:solidFill>
+          <a:srgbClr val="F6F8F3"/>
+        </a:solidFill>
+        <a:effectLst/>
+      </p:bgPr>
+    </p:bg>
     <p:spTree>
       <p:nvGrpSpPr>
         <p:cNvPr id="1" name=""/>
@@ -3922,64 +7352,270 @@
       <p:grpSpPr/>
       <p:sp>
         <p:nvSpPr>
-          <p:cNvPr id="2" name="Title 1"/>
-          <p:cNvSpPr>
-            <a:spLocks noGrp="1"/>
-          </p:cNvSpPr>
-          <p:nvPr>
-            <p:ph type="title"/>
-          </p:nvPr>
-        </p:nvSpPr>
-        <p:spPr/>
-        <p:txBody>
-          <a:bodyPr/>
-          <a:lstStyle/>
-          <a:p>
-            <a:pPr>
-              <a:defRPr sz="3200"/>
-            </a:pPr>
-            <a:r>
-              <a:t>Kết quả thực nghiệm</a:t>
-            </a:r>
-          </a:p>
-        </p:txBody>
-      </p:sp>
-      <p:sp>
-        <p:nvSpPr>
-          <p:cNvPr id="3" name="Content Placeholder 2"/>
-          <p:cNvSpPr>
-            <a:spLocks noGrp="1"/>
-          </p:cNvSpPr>
-          <p:nvPr>
-            <p:ph idx="1"/>
-          </p:nvPr>
-        </p:nvSpPr>
-        <p:spPr/>
-        <p:txBody>
-          <a:bodyPr/>
-          <a:lstStyle/>
-          <a:p>
-            <a:pPr>
-              <a:defRPr sz="2300"/>
-            </a:pPr>
-            <a:r>
-              <a:t>RF macro MAE: 2.724 điểm phần trăm SOH</a:t>
-            </a:r>
-          </a:p>
-          <a:p>
-            <a:pPr>
-              <a:defRPr sz="2300"/>
-            </a:pPr>
-            <a:r>
-              <a:t>RF macro RMSE: 3.189</a:t>
-            </a:r>
-          </a:p>
-          <a:p>
-            <a:pPr>
-              <a:defRPr sz="2300"/>
-            </a:pPr>
-            <a:r>
-              <a:t>Không gọi MAE là độ chính xác phần trăm</a:t>
+          <p:cNvPr id="2" name="Rectangle 1"/>
+          <p:cNvSpPr/>
+          <p:nvPr/>
+        </p:nvSpPr>
+        <p:spPr>
+          <a:xfrm>
+            <a:off x="0" y="0"/>
+            <a:ext cx="146304" cy="6858000"/>
+          </a:xfrm>
+          <a:prstGeom prst="rect">
+            <a:avLst/>
+          </a:prstGeom>
+          <a:solidFill>
+            <a:srgbClr val="087F70"/>
+          </a:solidFill>
+          <a:ln>
+            <a:noFill/>
+          </a:ln>
+        </p:spPr>
+        <p:style>
+          <a:lnRef idx="1">
+            <a:schemeClr val="accent1"/>
+          </a:lnRef>
+          <a:fillRef idx="3">
+            <a:schemeClr val="accent1"/>
+          </a:fillRef>
+          <a:effectRef idx="2">
+            <a:schemeClr val="accent1"/>
+          </a:effectRef>
+          <a:fontRef idx="minor">
+            <a:schemeClr val="lt1"/>
+          </a:fontRef>
+        </p:style>
+        <p:txBody>
+          <a:bodyPr rtlCol="0" anchor="ctr"/>
+          <a:lstStyle/>
+          <a:p>
+            <a:pPr algn="ctr"/>
+          </a:p>
+        </p:txBody>
+      </p:sp>
+      <p:sp>
+        <p:nvSpPr>
+          <p:cNvPr id="3" name="TextBox 2"/>
+          <p:cNvSpPr txBox="1"/>
+          <p:nvPr/>
+        </p:nvSpPr>
+        <p:spPr>
+          <a:xfrm>
+            <a:off x="594360" y="274320"/>
+            <a:ext cx="10972800" cy="365760"/>
+          </a:xfrm>
+          <a:prstGeom prst="rect">
+            <a:avLst/>
+          </a:prstGeom>
+          <a:noFill/>
+        </p:spPr>
+        <p:txBody>
+          <a:bodyPr wrap="square">
+            <a:spAutoFit/>
+          </a:bodyPr>
+          <a:lstStyle/>
+          <a:p>
+            <a:pPr>
+              <a:spcAft>
+                <a:spcPts val="1600"/>
+              </a:spcAft>
+              <a:defRPr sz="1200" b="1">
+                <a:solidFill>
+                  <a:srgbClr val="087F70"/>
+                </a:solidFill>
+                <a:latin typeface="Arial"/>
+              </a:defRPr>
+            </a:pPr>
+            <a:r>
+              <a:t>VINCENT D / NGHIÊN CỨU SỨC KHỎE PIN</a:t>
+            </a:r>
+          </a:p>
+        </p:txBody>
+      </p:sp>
+      <p:sp>
+        <p:nvSpPr>
+          <p:cNvPr id="4" name="TextBox 3"/>
+          <p:cNvSpPr txBox="1"/>
+          <p:nvPr/>
+        </p:nvSpPr>
+        <p:spPr>
+          <a:xfrm>
+            <a:off x="594360" y="868680"/>
+            <a:ext cx="10972800" cy="1188720"/>
+          </a:xfrm>
+          <a:prstGeom prst="rect">
+            <a:avLst/>
+          </a:prstGeom>
+          <a:noFill/>
+        </p:spPr>
+        <p:txBody>
+          <a:bodyPr wrap="square">
+            <a:spAutoFit/>
+          </a:bodyPr>
+          <a:lstStyle/>
+          <a:p>
+            <a:pPr>
+              <a:spcAft>
+                <a:spcPts val="1600"/>
+              </a:spcAft>
+              <a:defRPr sz="3200" b="1">
+                <a:solidFill>
+                  <a:srgbClr val="193431"/>
+                </a:solidFill>
+                <a:latin typeface="Arial"/>
+              </a:defRPr>
+            </a:pPr>
+            <a:r>
+              <a:t>Đặc trưng và nhãn</a:t>
+            </a:r>
+          </a:p>
+        </p:txBody>
+      </p:sp>
+      <p:sp>
+        <p:nvSpPr>
+          <p:cNvPr id="5" name="TextBox 4"/>
+          <p:cNvSpPr txBox="1"/>
+          <p:nvPr/>
+        </p:nvSpPr>
+        <p:spPr>
+          <a:xfrm>
+            <a:off x="777240" y="2286000"/>
+            <a:ext cx="10789920" cy="3383280"/>
+          </a:xfrm>
+          <a:prstGeom prst="rect">
+            <a:avLst/>
+          </a:prstGeom>
+          <a:noFill/>
+        </p:spPr>
+        <p:txBody>
+          <a:bodyPr wrap="square">
+            <a:spAutoFit/>
+          </a:bodyPr>
+          <a:lstStyle/>
+          <a:p>
+            <a:pPr>
+              <a:spcAft>
+                <a:spcPts val="1600"/>
+              </a:spcAft>
+              <a:defRPr sz="2400" b="0">
+                <a:solidFill>
+                  <a:srgbClr val="193431"/>
+                </a:solidFill>
+                <a:latin typeface="Arial"/>
+              </a:defRPr>
+            </a:pPr>
+            <a:r>
+              <a:t>• 12 đặc trưng: chu kỳ, giai đoạn, thống kê V/I/T</a:t>
+            </a:r>
+          </a:p>
+          <a:p>
+            <a:pPr>
+              <a:spcAft>
+                <a:spcPts val="1600"/>
+              </a:spcAft>
+              <a:defRPr sz="2400" b="0">
+                <a:solidFill>
+                  <a:srgbClr val="193431"/>
+                </a:solidFill>
+                <a:latin typeface="Arial"/>
+              </a:defRPr>
+            </a:pPr>
+            <a:r>
+              <a:t>• Không dùng dung lượng, nhãn hoặc tín hiệu cuối chu kỳ</a:t>
+            </a:r>
+          </a:p>
+          <a:p>
+            <a:pPr>
+              <a:spcAft>
+                <a:spcPts val="1600"/>
+              </a:spcAft>
+              <a:defRPr sz="2400" b="0">
+                <a:solidFill>
+                  <a:srgbClr val="193431"/>
+                </a:solidFill>
+                <a:latin typeface="Arial"/>
+              </a:defRPr>
+            </a:pPr>
+            <a:r>
+              <a:t>• GRU: 25 vị trí × 3 tín hiệu + ngữ cảnh chu kỳ/giai đoạn</a:t>
+            </a:r>
+          </a:p>
+        </p:txBody>
+      </p:sp>
+      <p:sp>
+        <p:nvSpPr>
+          <p:cNvPr id="6" name="TextBox 5"/>
+          <p:cNvSpPr txBox="1"/>
+          <p:nvPr/>
+        </p:nvSpPr>
+        <p:spPr>
+          <a:xfrm>
+            <a:off x="594360" y="6446520"/>
+            <a:ext cx="10058400" cy="228600"/>
+          </a:xfrm>
+          <a:prstGeom prst="rect">
+            <a:avLst/>
+          </a:prstGeom>
+          <a:noFill/>
+        </p:spPr>
+        <p:txBody>
+          <a:bodyPr wrap="square">
+            <a:spAutoFit/>
+          </a:bodyPr>
+          <a:lstStyle/>
+          <a:p>
+            <a:pPr>
+              <a:spcAft>
+                <a:spcPts val="1600"/>
+              </a:spcAft>
+              <a:defRPr sz="1000" b="0">
+                <a:solidFill>
+                  <a:srgbClr val="60766D"/>
+                </a:solidFill>
+                <a:latin typeface="Arial"/>
+              </a:defRPr>
+            </a:pPr>
+            <a:r>
+              <a:t>Nguyễn Văn Duy · MSSV 2311553949 · Khoa Học Dữ Liệu</a:t>
+            </a:r>
+          </a:p>
+        </p:txBody>
+      </p:sp>
+      <p:sp>
+        <p:nvSpPr>
+          <p:cNvPr id="7" name="TextBox 6"/>
+          <p:cNvSpPr txBox="1"/>
+          <p:nvPr/>
+        </p:nvSpPr>
+        <p:spPr>
+          <a:xfrm>
+            <a:off x="10972800" y="6400800"/>
+            <a:ext cx="548640" cy="274320"/>
+          </a:xfrm>
+          <a:prstGeom prst="rect">
+            <a:avLst/>
+          </a:prstGeom>
+          <a:noFill/>
+        </p:spPr>
+        <p:txBody>
+          <a:bodyPr wrap="square">
+            <a:spAutoFit/>
+          </a:bodyPr>
+          <a:lstStyle/>
+          <a:p>
+            <a:pPr>
+              <a:spcAft>
+                <a:spcPts val="1600"/>
+              </a:spcAft>
+              <a:defRPr sz="1200" b="0">
+                <a:solidFill>
+                  <a:srgbClr val="087F70"/>
+                </a:solidFill>
+                <a:latin typeface="Arial"/>
+              </a:defRPr>
+            </a:pPr>
+            <a:r>
+              <a:t>07</a:t>
             </a:r>
           </a:p>
         </p:txBody>
@@ -3995,6 +7631,14 @@
 <file path=ppt/slides/slide8.xml><?xml version="1.0" encoding="utf-8"?>
 <p:sld xmlns:a="http://schemas.openxmlformats.org/drawingml/2006/main" xmlns:p="http://schemas.openxmlformats.org/presentationml/2006/main" xmlns:r="http://schemas.openxmlformats.org/officeDocument/2006/relationships">
   <p:cSld>
+    <p:bg>
+      <p:bgPr>
+        <a:solidFill>
+          <a:srgbClr val="F6F8F3"/>
+        </a:solidFill>
+        <a:effectLst/>
+      </p:bgPr>
+    </p:bg>
     <p:spTree>
       <p:nvGrpSpPr>
         <p:cNvPr id="1" name=""/>
@@ -4004,69 +7648,274 @@
       <p:grpSpPr/>
       <p:sp>
         <p:nvSpPr>
-          <p:cNvPr id="2" name="Title 1"/>
-          <p:cNvSpPr>
-            <a:spLocks noGrp="1"/>
-          </p:cNvSpPr>
-          <p:nvPr>
-            <p:ph type="title"/>
-          </p:nvPr>
-        </p:nvSpPr>
-        <p:spPr/>
-        <p:txBody>
-          <a:bodyPr/>
-          <a:lstStyle/>
-          <a:p>
-            <a:pPr>
-              <a:defRPr sz="3200"/>
-            </a:pPr>
-            <a:r>
-              <a:t>So sánh mô hình</a:t>
-            </a:r>
-          </a:p>
-        </p:txBody>
-      </p:sp>
-      <p:sp>
-        <p:nvSpPr>
-          <p:cNvPr id="3" name="Content Placeholder 2"/>
-          <p:cNvSpPr>
-            <a:spLocks noGrp="1"/>
-          </p:cNvSpPr>
-          <p:nvPr>
-            <p:ph idx="1"/>
-          </p:nvPr>
-        </p:nvSpPr>
-        <p:spPr/>
-        <p:txBody>
-          <a:bodyPr/>
-          <a:lstStyle/>
-          <a:p/>
-        </p:txBody>
-      </p:sp>
-      <p:pic>
-        <p:nvPicPr>
-          <p:cNvPr id="4" name="Picture 3" descr="model_comparison.png"/>
-          <p:cNvPicPr>
-            <a:picLocks noChangeAspect="1"/>
-          </p:cNvPicPr>
-          <p:nvPr/>
-        </p:nvPicPr>
-        <p:blipFill>
-          <a:blip r:embed="rId2"/>
-          <a:stretch>
-            <a:fillRect/>
-          </a:stretch>
-        </p:blipFill>
-        <p:spPr>
-          <a:xfrm>
-            <a:off x="548640" y="1463040"/>
-            <a:ext cx="10972800" cy="4876800"/>
-          </a:xfrm>
-          <a:prstGeom prst="rect">
-            <a:avLst/>
-          </a:prstGeom>
-        </p:spPr>
-      </p:pic>
+          <p:cNvPr id="2" name="Rectangle 1"/>
+          <p:cNvSpPr/>
+          <p:nvPr/>
+        </p:nvSpPr>
+        <p:spPr>
+          <a:xfrm>
+            <a:off x="0" y="0"/>
+            <a:ext cx="146304" cy="6858000"/>
+          </a:xfrm>
+          <a:prstGeom prst="rect">
+            <a:avLst/>
+          </a:prstGeom>
+          <a:solidFill>
+            <a:srgbClr val="087F70"/>
+          </a:solidFill>
+          <a:ln>
+            <a:noFill/>
+          </a:ln>
+        </p:spPr>
+        <p:style>
+          <a:lnRef idx="1">
+            <a:schemeClr val="accent1"/>
+          </a:lnRef>
+          <a:fillRef idx="3">
+            <a:schemeClr val="accent1"/>
+          </a:fillRef>
+          <a:effectRef idx="2">
+            <a:schemeClr val="accent1"/>
+          </a:effectRef>
+          <a:fontRef idx="minor">
+            <a:schemeClr val="lt1"/>
+          </a:fontRef>
+        </p:style>
+        <p:txBody>
+          <a:bodyPr rtlCol="0" anchor="ctr"/>
+          <a:lstStyle/>
+          <a:p>
+            <a:pPr algn="ctr"/>
+          </a:p>
+        </p:txBody>
+      </p:sp>
+      <p:sp>
+        <p:nvSpPr>
+          <p:cNvPr id="3" name="TextBox 2"/>
+          <p:cNvSpPr txBox="1"/>
+          <p:nvPr/>
+        </p:nvSpPr>
+        <p:spPr>
+          <a:xfrm>
+            <a:off x="594360" y="274320"/>
+            <a:ext cx="10972800" cy="365760"/>
+          </a:xfrm>
+          <a:prstGeom prst="rect">
+            <a:avLst/>
+          </a:prstGeom>
+          <a:noFill/>
+        </p:spPr>
+        <p:txBody>
+          <a:bodyPr wrap="square">
+            <a:spAutoFit/>
+          </a:bodyPr>
+          <a:lstStyle/>
+          <a:p>
+            <a:pPr>
+              <a:spcAft>
+                <a:spcPts val="1600"/>
+              </a:spcAft>
+              <a:defRPr sz="1200" b="1">
+                <a:solidFill>
+                  <a:srgbClr val="087F70"/>
+                </a:solidFill>
+                <a:latin typeface="Arial"/>
+              </a:defRPr>
+            </a:pPr>
+            <a:r>
+              <a:t>VINCENT D / NGHIÊN CỨU SỨC KHỎE PIN</a:t>
+            </a:r>
+          </a:p>
+        </p:txBody>
+      </p:sp>
+      <p:sp>
+        <p:nvSpPr>
+          <p:cNvPr id="4" name="TextBox 3"/>
+          <p:cNvSpPr txBox="1"/>
+          <p:nvPr/>
+        </p:nvSpPr>
+        <p:spPr>
+          <a:xfrm>
+            <a:off x="594360" y="868680"/>
+            <a:ext cx="10972800" cy="1188720"/>
+          </a:xfrm>
+          <a:prstGeom prst="rect">
+            <a:avLst/>
+          </a:prstGeom>
+          <a:noFill/>
+        </p:spPr>
+        <p:txBody>
+          <a:bodyPr wrap="square">
+            <a:spAutoFit/>
+          </a:bodyPr>
+          <a:lstStyle/>
+          <a:p>
+            <a:pPr>
+              <a:spcAft>
+                <a:spcPts val="1600"/>
+              </a:spcAft>
+              <a:defRPr sz="3200" b="1">
+                <a:solidFill>
+                  <a:srgbClr val="193431"/>
+                </a:solidFill>
+                <a:latin typeface="Arial"/>
+              </a:defRPr>
+            </a:pPr>
+            <a:r>
+              <a:t>Bốn mô hình và mốc đối chứng</a:t>
+            </a:r>
+          </a:p>
+        </p:txBody>
+      </p:sp>
+      <p:sp>
+        <p:nvSpPr>
+          <p:cNvPr id="5" name="TextBox 4"/>
+          <p:cNvSpPr txBox="1"/>
+          <p:nvPr/>
+        </p:nvSpPr>
+        <p:spPr>
+          <a:xfrm>
+            <a:off x="777240" y="2286000"/>
+            <a:ext cx="10789920" cy="3383280"/>
+          </a:xfrm>
+          <a:prstGeom prst="rect">
+            <a:avLst/>
+          </a:prstGeom>
+          <a:noFill/>
+        </p:spPr>
+        <p:txBody>
+          <a:bodyPr wrap="square">
+            <a:spAutoFit/>
+          </a:bodyPr>
+          <a:lstStyle/>
+          <a:p>
+            <a:pPr>
+              <a:spcAft>
+                <a:spcPts val="1600"/>
+              </a:spcAft>
+              <a:defRPr sz="2400" b="0">
+                <a:solidFill>
+                  <a:srgbClr val="193431"/>
+                </a:solidFill>
+                <a:latin typeface="Arial"/>
+              </a:defRPr>
+            </a:pPr>
+            <a:r>
+              <a:t>• Ridge: tuyến tính, điều chuẩn L2</a:t>
+            </a:r>
+          </a:p>
+          <a:p>
+            <a:pPr>
+              <a:spcAft>
+                <a:spcPts val="1600"/>
+              </a:spcAft>
+              <a:defRPr sz="2400" b="0">
+                <a:solidFill>
+                  <a:srgbClr val="193431"/>
+                </a:solidFill>
+                <a:latin typeface="Arial"/>
+              </a:defRPr>
+            </a:pPr>
+            <a:r>
+              <a:t>• Random Forest và LightGBM: quan hệ phi tuyến trên bảng</a:t>
+            </a:r>
+          </a:p>
+          <a:p>
+            <a:pPr>
+              <a:spcAft>
+                <a:spcPts val="1600"/>
+              </a:spcAft>
+              <a:defRPr sz="2400" b="0">
+                <a:solidFill>
+                  <a:srgbClr val="193431"/>
+                </a:solidFill>
+                <a:latin typeface="Arial"/>
+              </a:defRPr>
+            </a:pPr>
+            <a:r>
+              <a:t>• GRU: học chuỗi đầu xả; thêm mốc dự đoán trung bình</a:t>
+            </a:r>
+          </a:p>
+        </p:txBody>
+      </p:sp>
+      <p:sp>
+        <p:nvSpPr>
+          <p:cNvPr id="6" name="TextBox 5"/>
+          <p:cNvSpPr txBox="1"/>
+          <p:nvPr/>
+        </p:nvSpPr>
+        <p:spPr>
+          <a:xfrm>
+            <a:off x="594360" y="6446520"/>
+            <a:ext cx="10058400" cy="228600"/>
+          </a:xfrm>
+          <a:prstGeom prst="rect">
+            <a:avLst/>
+          </a:prstGeom>
+          <a:noFill/>
+        </p:spPr>
+        <p:txBody>
+          <a:bodyPr wrap="square">
+            <a:spAutoFit/>
+          </a:bodyPr>
+          <a:lstStyle/>
+          <a:p>
+            <a:pPr>
+              <a:spcAft>
+                <a:spcPts val="1600"/>
+              </a:spcAft>
+              <a:defRPr sz="1000" b="0">
+                <a:solidFill>
+                  <a:srgbClr val="60766D"/>
+                </a:solidFill>
+                <a:latin typeface="Arial"/>
+              </a:defRPr>
+            </a:pPr>
+            <a:r>
+              <a:t>Nguyễn Văn Duy · MSSV 2311553949 · Khoa Học Dữ Liệu</a:t>
+            </a:r>
+          </a:p>
+        </p:txBody>
+      </p:sp>
+      <p:sp>
+        <p:nvSpPr>
+          <p:cNvPr id="7" name="TextBox 6"/>
+          <p:cNvSpPr txBox="1"/>
+          <p:nvPr/>
+        </p:nvSpPr>
+        <p:spPr>
+          <a:xfrm>
+            <a:off x="10972800" y="6400800"/>
+            <a:ext cx="548640" cy="274320"/>
+          </a:xfrm>
+          <a:prstGeom prst="rect">
+            <a:avLst/>
+          </a:prstGeom>
+          <a:noFill/>
+        </p:spPr>
+        <p:txBody>
+          <a:bodyPr wrap="square">
+            <a:spAutoFit/>
+          </a:bodyPr>
+          <a:lstStyle/>
+          <a:p>
+            <a:pPr>
+              <a:spcAft>
+                <a:spcPts val="1600"/>
+              </a:spcAft>
+              <a:defRPr sz="1200" b="0">
+                <a:solidFill>
+                  <a:srgbClr val="087F70"/>
+                </a:solidFill>
+                <a:latin typeface="Arial"/>
+              </a:defRPr>
+            </a:pPr>
+            <a:r>
+              <a:t>08</a:t>
+            </a:r>
+          </a:p>
+        </p:txBody>
+      </p:sp>
     </p:spTree>
   </p:cSld>
   <p:clrMapOvr>
@@ -4078,6 +7927,14 @@
 <file path=ppt/slides/slide9.xml><?xml version="1.0" encoding="utf-8"?>
 <p:sld xmlns:a="http://schemas.openxmlformats.org/drawingml/2006/main" xmlns:p="http://schemas.openxmlformats.org/presentationml/2006/main" xmlns:r="http://schemas.openxmlformats.org/officeDocument/2006/relationships">
   <p:cSld>
+    <p:bg>
+      <p:bgPr>
+        <a:solidFill>
+          <a:srgbClr val="F6F8F3"/>
+        </a:solidFill>
+        <a:effectLst/>
+      </p:bgPr>
+    </p:bg>
     <p:spTree>
       <p:nvGrpSpPr>
         <p:cNvPr id="1" name=""/>
@@ -4087,69 +7944,274 @@
       <p:grpSpPr/>
       <p:sp>
         <p:nvSpPr>
-          <p:cNvPr id="2" name="Title 1"/>
-          <p:cNvSpPr>
-            <a:spLocks noGrp="1"/>
-          </p:cNvSpPr>
-          <p:nvPr>
-            <p:ph type="title"/>
-          </p:nvPr>
-        </p:nvSpPr>
-        <p:spPr/>
-        <p:txBody>
-          <a:bodyPr/>
-          <a:lstStyle/>
-          <a:p>
-            <a:pPr>
-              <a:defRPr sz="3200"/>
-            </a:pPr>
-            <a:r>
-              <a:t>Dự đoán trên pin giữ riêng</a:t>
-            </a:r>
-          </a:p>
-        </p:txBody>
-      </p:sp>
-      <p:sp>
-        <p:nvSpPr>
-          <p:cNvPr id="3" name="Content Placeholder 2"/>
-          <p:cNvSpPr>
-            <a:spLocks noGrp="1"/>
-          </p:cNvSpPr>
-          <p:nvPr>
-            <p:ph idx="1"/>
-          </p:nvPr>
-        </p:nvSpPr>
-        <p:spPr/>
-        <p:txBody>
-          <a:bodyPr/>
-          <a:lstStyle/>
-          <a:p/>
-        </p:txBody>
-      </p:sp>
-      <p:pic>
-        <p:nvPicPr>
-          <p:cNvPr id="4" name="Picture 3" descr="held_out_predictions.png"/>
-          <p:cNvPicPr>
-            <a:picLocks noChangeAspect="1"/>
-          </p:cNvPicPr>
-          <p:nvPr/>
-        </p:nvPicPr>
-        <p:blipFill>
-          <a:blip r:embed="rId2"/>
-          <a:stretch>
-            <a:fillRect/>
-          </a:stretch>
-        </p:blipFill>
-        <p:spPr>
-          <a:xfrm>
-            <a:off x="2560320" y="1463040"/>
-            <a:ext cx="7406640" cy="4937760"/>
-          </a:xfrm>
-          <a:prstGeom prst="rect">
-            <a:avLst/>
-          </a:prstGeom>
-        </p:spPr>
-      </p:pic>
+          <p:cNvPr id="2" name="Rectangle 1"/>
+          <p:cNvSpPr/>
+          <p:nvPr/>
+        </p:nvSpPr>
+        <p:spPr>
+          <a:xfrm>
+            <a:off x="0" y="0"/>
+            <a:ext cx="146304" cy="6858000"/>
+          </a:xfrm>
+          <a:prstGeom prst="rect">
+            <a:avLst/>
+          </a:prstGeom>
+          <a:solidFill>
+            <a:srgbClr val="087F70"/>
+          </a:solidFill>
+          <a:ln>
+            <a:noFill/>
+          </a:ln>
+        </p:spPr>
+        <p:style>
+          <a:lnRef idx="1">
+            <a:schemeClr val="accent1"/>
+          </a:lnRef>
+          <a:fillRef idx="3">
+            <a:schemeClr val="accent1"/>
+          </a:fillRef>
+          <a:effectRef idx="2">
+            <a:schemeClr val="accent1"/>
+          </a:effectRef>
+          <a:fontRef idx="minor">
+            <a:schemeClr val="lt1"/>
+          </a:fontRef>
+        </p:style>
+        <p:txBody>
+          <a:bodyPr rtlCol="0" anchor="ctr"/>
+          <a:lstStyle/>
+          <a:p>
+            <a:pPr algn="ctr"/>
+          </a:p>
+        </p:txBody>
+      </p:sp>
+      <p:sp>
+        <p:nvSpPr>
+          <p:cNvPr id="3" name="TextBox 2"/>
+          <p:cNvSpPr txBox="1"/>
+          <p:nvPr/>
+        </p:nvSpPr>
+        <p:spPr>
+          <a:xfrm>
+            <a:off x="594360" y="274320"/>
+            <a:ext cx="10972800" cy="365760"/>
+          </a:xfrm>
+          <a:prstGeom prst="rect">
+            <a:avLst/>
+          </a:prstGeom>
+          <a:noFill/>
+        </p:spPr>
+        <p:txBody>
+          <a:bodyPr wrap="square">
+            <a:spAutoFit/>
+          </a:bodyPr>
+          <a:lstStyle/>
+          <a:p>
+            <a:pPr>
+              <a:spcAft>
+                <a:spcPts val="1600"/>
+              </a:spcAft>
+              <a:defRPr sz="1200" b="1">
+                <a:solidFill>
+                  <a:srgbClr val="087F70"/>
+                </a:solidFill>
+                <a:latin typeface="Arial"/>
+              </a:defRPr>
+            </a:pPr>
+            <a:r>
+              <a:t>VINCENT D / NGHIÊN CỨU SỨC KHỎE PIN</a:t>
+            </a:r>
+          </a:p>
+        </p:txBody>
+      </p:sp>
+      <p:sp>
+        <p:nvSpPr>
+          <p:cNvPr id="4" name="TextBox 3"/>
+          <p:cNvSpPr txBox="1"/>
+          <p:nvPr/>
+        </p:nvSpPr>
+        <p:spPr>
+          <a:xfrm>
+            <a:off x="594360" y="868680"/>
+            <a:ext cx="10972800" cy="1188720"/>
+          </a:xfrm>
+          <a:prstGeom prst="rect">
+            <a:avLst/>
+          </a:prstGeom>
+          <a:noFill/>
+        </p:spPr>
+        <p:txBody>
+          <a:bodyPr wrap="square">
+            <a:spAutoFit/>
+          </a:bodyPr>
+          <a:lstStyle/>
+          <a:p>
+            <a:pPr>
+              <a:spcAft>
+                <a:spcPts val="1600"/>
+              </a:spcAft>
+              <a:defRPr sz="3200" b="1">
+                <a:solidFill>
+                  <a:srgbClr val="193431"/>
+                </a:solidFill>
+                <a:latin typeface="Arial"/>
+              </a:defRPr>
+            </a:pPr>
+            <a:r>
+              <a:t>Thiết kế kiểm thử</a:t>
+            </a:r>
+          </a:p>
+        </p:txBody>
+      </p:sp>
+      <p:sp>
+        <p:nvSpPr>
+          <p:cNvPr id="5" name="TextBox 4"/>
+          <p:cNvSpPr txBox="1"/>
+          <p:nvPr/>
+        </p:nvSpPr>
+        <p:spPr>
+          <a:xfrm>
+            <a:off x="777240" y="2286000"/>
+            <a:ext cx="10789920" cy="3383280"/>
+          </a:xfrm>
+          <a:prstGeom prst="rect">
+            <a:avLst/>
+          </a:prstGeom>
+          <a:noFill/>
+        </p:spPr>
+        <p:txBody>
+          <a:bodyPr wrap="square">
+            <a:spAutoFit/>
+          </a:bodyPr>
+          <a:lstStyle/>
+          <a:p>
+            <a:pPr>
+              <a:spcAft>
+                <a:spcPts val="1600"/>
+              </a:spcAft>
+              <a:defRPr sz="2400" b="0">
+                <a:solidFill>
+                  <a:srgbClr val="193431"/>
+                </a:solidFill>
+                <a:latin typeface="Arial"/>
+              </a:defRPr>
+            </a:pPr>
+            <a:r>
+              <a:t>• GroupKFold 5 vòng, chia theo 86 pin vật lý</a:t>
+            </a:r>
+          </a:p>
+          <a:p>
+            <a:pPr>
+              <a:spcAft>
+                <a:spcPts val="1600"/>
+              </a:spcAft>
+              <a:defRPr sz="2400" b="0">
+                <a:solidFill>
+                  <a:srgbClr val="193431"/>
+                </a:solidFill>
+                <a:latin typeface="Arial"/>
+              </a:defRPr>
+            </a:pPr>
+            <a:r>
+              <a:t>• Hai giai đoạn của một pin luôn ở cùng phía</a:t>
+            </a:r>
+          </a:p>
+          <a:p>
+            <a:pPr>
+              <a:spcAft>
+                <a:spcPts val="1600"/>
+              </a:spcAft>
+              <a:defRPr sz="2400" b="0">
+                <a:solidFill>
+                  <a:srgbClr val="193431"/>
+                </a:solidFill>
+                <a:latin typeface="Arial"/>
+              </a:defRPr>
+            </a:pPr>
+            <a:r>
+              <a:t>• Chuẩn hóa chỉ học trên train; cấu hình và seed cố định</a:t>
+            </a:r>
+          </a:p>
+        </p:txBody>
+      </p:sp>
+      <p:sp>
+        <p:nvSpPr>
+          <p:cNvPr id="6" name="TextBox 5"/>
+          <p:cNvSpPr txBox="1"/>
+          <p:nvPr/>
+        </p:nvSpPr>
+        <p:spPr>
+          <a:xfrm>
+            <a:off x="594360" y="6446520"/>
+            <a:ext cx="10058400" cy="228600"/>
+          </a:xfrm>
+          <a:prstGeom prst="rect">
+            <a:avLst/>
+          </a:prstGeom>
+          <a:noFill/>
+        </p:spPr>
+        <p:txBody>
+          <a:bodyPr wrap="square">
+            <a:spAutoFit/>
+          </a:bodyPr>
+          <a:lstStyle/>
+          <a:p>
+            <a:pPr>
+              <a:spcAft>
+                <a:spcPts val="1600"/>
+              </a:spcAft>
+              <a:defRPr sz="1000" b="0">
+                <a:solidFill>
+                  <a:srgbClr val="60766D"/>
+                </a:solidFill>
+                <a:latin typeface="Arial"/>
+              </a:defRPr>
+            </a:pPr>
+            <a:r>
+              <a:t>Nguyễn Văn Duy · MSSV 2311553949 · Khoa Học Dữ Liệu</a:t>
+            </a:r>
+          </a:p>
+        </p:txBody>
+      </p:sp>
+      <p:sp>
+        <p:nvSpPr>
+          <p:cNvPr id="7" name="TextBox 6"/>
+          <p:cNvSpPr txBox="1"/>
+          <p:nvPr/>
+        </p:nvSpPr>
+        <p:spPr>
+          <a:xfrm>
+            <a:off x="10972800" y="6400800"/>
+            <a:ext cx="548640" cy="274320"/>
+          </a:xfrm>
+          <a:prstGeom prst="rect">
+            <a:avLst/>
+          </a:prstGeom>
+          <a:noFill/>
+        </p:spPr>
+        <p:txBody>
+          <a:bodyPr wrap="square">
+            <a:spAutoFit/>
+          </a:bodyPr>
+          <a:lstStyle/>
+          <a:p>
+            <a:pPr>
+              <a:spcAft>
+                <a:spcPts val="1600"/>
+              </a:spcAft>
+              <a:defRPr sz="1200" b="0">
+                <a:solidFill>
+                  <a:srgbClr val="087F70"/>
+                </a:solidFill>
+                <a:latin typeface="Arial"/>
+              </a:defRPr>
+            </a:pPr>
+            <a:r>
+              <a:t>09</a:t>
+            </a:r>
+          </a:p>
+        </p:txBody>
+      </p:sp>
     </p:spTree>
   </p:cSld>
   <p:clrMapOvr>

--- a/docs/slide-bao-ve.pptx
+++ b/docs/slide-bao-ve.pptx
@@ -6680,7 +6680,7 @@
               </a:defRPr>
             </a:pPr>
             <a:r>
-              <a:t>• Bản chọn: 10.000.000 dòng, đủ 20.823 chu kỳ</a:t>
+              <a:t>• Bản chọn: 10.505.065 dòng, đủ 20.823 chu kỳ</a:t>
             </a:r>
           </a:p>
           <a:p>
@@ -7241,7 +7241,7 @@
               </a:defRPr>
             </a:pPr>
             <a:r>
-              <a:t>• 25 điểm nghi vấn được giữ; không nằm trong 120 giây đầu</a:t>
+              <a:t>• 26 điểm nghi vấn được giữ; không nằm trong 120 giây đầu</a:t>
             </a:r>
           </a:p>
         </p:txBody>

--- a/docs/slide-bao-ve.pptx
+++ b/docs/slide-bao-ve.pptx
@@ -23,6 +23,8 @@
     <p:sldId id="271" r:id="rId22"/>
     <p:sldId id="272" r:id="rId23"/>
     <p:sldId id="273" r:id="rId24"/>
+    <p:sldId id="274" r:id="rId25"/>
+    <p:sldId id="275" r:id="rId26"/>
   </p:sldIdLst>
   <p:sldSz cx="12191695" cy="6858000" type="screen4x3"/>
   <p:notesSz cx="6858000" cy="9144000"/>
@@ -5441,7 +5443,7 @@
               </a:defRPr>
             </a:pPr>
             <a:r>
-              <a:t>Kết luận và hướng phát triển</a:t>
+              <a:t>Giám sát xu hướng SOH</a:t>
             </a:r>
           </a:p>
         </p:txBody>
@@ -5480,7 +5482,7 @@
               </a:defRPr>
             </a:pPr>
             <a:r>
-              <a:t>• Hoàn thành quy trình dữ liệu → mô hình → ứng dụng</a:t>
+              <a:t>• Quy tắc quá khứ và Isolation Forest · giữ riêng pin</a:t>
             </a:r>
           </a:p>
           <a:p>
@@ -5496,7 +5498,7 @@
               </a:defRPr>
             </a:pPr>
             <a:r>
-              <a:t>• Chưa kiểm chứng trên bộ pin xe thực tế tại Việt Nam</a:t>
+              <a:t>• 74 cờ giai đoạn đầu; 135 cờ tái sử dụng</a:t>
             </a:r>
           </a:p>
           <a:p>
@@ -5512,7 +5514,23 @@
               </a:defRPr>
             </a:pPr>
             <a:r>
-              <a:t>• Mở rộng điều kiện vận hành, đánh giá độc lập và độ bất định</a:t>
+              <a:t>• Chưa có nhãn lỗi; cờ không phải kết luận hỏng pin</a:t>
+            </a:r>
+          </a:p>
+          <a:p>
+            <a:pPr>
+              <a:spcAft>
+                <a:spcPts val="1600"/>
+              </a:spcAft>
+              <a:defRPr sz="2400" b="0">
+                <a:solidFill>
+                  <a:srgbClr val="193431"/>
+                </a:solidFill>
+                <a:latin typeface="Arial"/>
+              </a:defRPr>
+            </a:pPr>
+            <a:r>
+              <a:t>• Chưa có dữ liệu BMS để kiểm chứng trên xe</a:t>
             </a:r>
           </a:p>
         </p:txBody>
@@ -5737,7 +5755,7 @@
               </a:defRPr>
             </a:pPr>
             <a:r>
-              <a:t>Tài liệu và sản phẩm bàn giao</a:t>
+              <a:t>Ridge–RF hiệu chỉnh phần dư</a:t>
             </a:r>
           </a:p>
         </p:txBody>
@@ -5776,7 +5794,7 @@
               </a:defRPr>
             </a:pPr>
             <a:r>
-              <a:t>• Mã nguồn, mô hình, bảng đặc trưng và dữ liệu nguồn</a:t>
+              <a:t>• Ridge học nền; RF học sai số trên train</a:t>
             </a:r>
           </a:p>
           <a:p>
@@ -5792,7 +5810,7 @@
               </a:defRPr>
             </a:pPr>
             <a:r>
-              <a:t>• Notebook đã chạy, CSV thực nghiệm và biểu đồ</a:t>
+              <a:t>• Cùng 12 đặc trưng và 5 nhóm pin</a:t>
             </a:r>
           </a:p>
           <a:p>
@@ -5808,7 +5826,23 @@
               </a:defRPr>
             </a:pPr>
             <a:r>
-              <a:t>• Báo cáo Word/PDF, slide và hồ sơ trích dẫn</a:t>
+              <a:t>• MAE 1,612 so với RF 1,619; RMSE hơi tăng</a:t>
+            </a:r>
+          </a:p>
+          <a:p>
+            <a:pPr>
+              <a:spcAft>
+                <a:spcPts val="1600"/>
+              </a:spcAft>
+              <a:defRPr sz="2400" b="0">
+                <a:solidFill>
+                  <a:srgbClr val="193431"/>
+                </a:solidFill>
+                <a:latin typeface="Arial"/>
+              </a:defRPr>
+            </a:pPr>
+            <a:r>
+              <a:t>• Kết hợp có sẵn, chưa khẳng định thuật toán mới hay vượt trội</a:t>
             </a:r>
           </a:p>
         </p:txBody>
@@ -5887,6 +5921,302 @@
             </a:pPr>
             <a:r>
               <a:t>18</a:t>
+            </a:r>
+          </a:p>
+        </p:txBody>
+      </p:sp>
+    </p:spTree>
+  </p:cSld>
+  <p:clrMapOvr>
+    <a:masterClrMapping/>
+  </p:clrMapOvr>
+</p:sld>
+</file>
+
+<file path=ppt/slides/slide19.xml><?xml version="1.0" encoding="utf-8"?>
+<p:sld xmlns:a="http://schemas.openxmlformats.org/drawingml/2006/main" xmlns:p="http://schemas.openxmlformats.org/presentationml/2006/main" xmlns:r="http://schemas.openxmlformats.org/officeDocument/2006/relationships">
+  <p:cSld>
+    <p:bg>
+      <p:bgPr>
+        <a:solidFill>
+          <a:srgbClr val="F6F8F3"/>
+        </a:solidFill>
+        <a:effectLst/>
+      </p:bgPr>
+    </p:bg>
+    <p:spTree>
+      <p:nvGrpSpPr>
+        <p:cNvPr id="1" name=""/>
+        <p:cNvGrpSpPr/>
+        <p:nvPr/>
+      </p:nvGrpSpPr>
+      <p:grpSpPr/>
+      <p:sp>
+        <p:nvSpPr>
+          <p:cNvPr id="2" name="Rectangle 1"/>
+          <p:cNvSpPr/>
+          <p:nvPr/>
+        </p:nvSpPr>
+        <p:spPr>
+          <a:xfrm>
+            <a:off x="0" y="0"/>
+            <a:ext cx="146304" cy="6858000"/>
+          </a:xfrm>
+          <a:prstGeom prst="rect">
+            <a:avLst/>
+          </a:prstGeom>
+          <a:solidFill>
+            <a:srgbClr val="087F70"/>
+          </a:solidFill>
+          <a:ln>
+            <a:noFill/>
+          </a:ln>
+        </p:spPr>
+        <p:style>
+          <a:lnRef idx="1">
+            <a:schemeClr val="accent1"/>
+          </a:lnRef>
+          <a:fillRef idx="3">
+            <a:schemeClr val="accent1"/>
+          </a:fillRef>
+          <a:effectRef idx="2">
+            <a:schemeClr val="accent1"/>
+          </a:effectRef>
+          <a:fontRef idx="minor">
+            <a:schemeClr val="lt1"/>
+          </a:fontRef>
+        </p:style>
+        <p:txBody>
+          <a:bodyPr rtlCol="0" anchor="ctr"/>
+          <a:lstStyle/>
+          <a:p>
+            <a:pPr algn="ctr"/>
+          </a:p>
+        </p:txBody>
+      </p:sp>
+      <p:sp>
+        <p:nvSpPr>
+          <p:cNvPr id="3" name="TextBox 2"/>
+          <p:cNvSpPr txBox="1"/>
+          <p:nvPr/>
+        </p:nvSpPr>
+        <p:spPr>
+          <a:xfrm>
+            <a:off x="594360" y="274320"/>
+            <a:ext cx="10972800" cy="365760"/>
+          </a:xfrm>
+          <a:prstGeom prst="rect">
+            <a:avLst/>
+          </a:prstGeom>
+          <a:noFill/>
+        </p:spPr>
+        <p:txBody>
+          <a:bodyPr wrap="square">
+            <a:spAutoFit/>
+          </a:bodyPr>
+          <a:lstStyle/>
+          <a:p>
+            <a:pPr>
+              <a:spcAft>
+                <a:spcPts val="1600"/>
+              </a:spcAft>
+              <a:defRPr sz="1200" b="1">
+                <a:solidFill>
+                  <a:srgbClr val="087F70"/>
+                </a:solidFill>
+                <a:latin typeface="Arial"/>
+              </a:defRPr>
+            </a:pPr>
+            <a:r>
+              <a:t>VINCENT D / NGHIÊN CỨU SỨC KHỎE PIN</a:t>
+            </a:r>
+          </a:p>
+        </p:txBody>
+      </p:sp>
+      <p:sp>
+        <p:nvSpPr>
+          <p:cNvPr id="4" name="TextBox 3"/>
+          <p:cNvSpPr txBox="1"/>
+          <p:nvPr/>
+        </p:nvSpPr>
+        <p:spPr>
+          <a:xfrm>
+            <a:off x="594360" y="868680"/>
+            <a:ext cx="10972800" cy="1188720"/>
+          </a:xfrm>
+          <a:prstGeom prst="rect">
+            <a:avLst/>
+          </a:prstGeom>
+          <a:noFill/>
+        </p:spPr>
+        <p:txBody>
+          <a:bodyPr wrap="square">
+            <a:spAutoFit/>
+          </a:bodyPr>
+          <a:lstStyle/>
+          <a:p>
+            <a:pPr>
+              <a:spcAft>
+                <a:spcPts val="1600"/>
+              </a:spcAft>
+              <a:defRPr sz="3200" b="1">
+                <a:solidFill>
+                  <a:srgbClr val="193431"/>
+                </a:solidFill>
+                <a:latin typeface="Arial"/>
+              </a:defRPr>
+            </a:pPr>
+            <a:r>
+              <a:t>Kết luận và hướng phát triển</a:t>
+            </a:r>
+          </a:p>
+        </p:txBody>
+      </p:sp>
+      <p:sp>
+        <p:nvSpPr>
+          <p:cNvPr id="5" name="TextBox 4"/>
+          <p:cNvSpPr txBox="1"/>
+          <p:nvPr/>
+        </p:nvSpPr>
+        <p:spPr>
+          <a:xfrm>
+            <a:off x="777240" y="2286000"/>
+            <a:ext cx="10789920" cy="3383280"/>
+          </a:xfrm>
+          <a:prstGeom prst="rect">
+            <a:avLst/>
+          </a:prstGeom>
+          <a:noFill/>
+        </p:spPr>
+        <p:txBody>
+          <a:bodyPr wrap="square">
+            <a:spAutoFit/>
+          </a:bodyPr>
+          <a:lstStyle/>
+          <a:p>
+            <a:pPr>
+              <a:spcAft>
+                <a:spcPts val="1600"/>
+              </a:spcAft>
+              <a:defRPr sz="2400" b="0">
+                <a:solidFill>
+                  <a:srgbClr val="193431"/>
+                </a:solidFill>
+                <a:latin typeface="Arial"/>
+              </a:defRPr>
+            </a:pPr>
+            <a:r>
+              <a:t>• Hoàn thành quy trình dữ liệu → mô hình → ứng dụng</a:t>
+            </a:r>
+          </a:p>
+          <a:p>
+            <a:pPr>
+              <a:spcAft>
+                <a:spcPts val="1600"/>
+              </a:spcAft>
+              <a:defRPr sz="2400" b="0">
+                <a:solidFill>
+                  <a:srgbClr val="193431"/>
+                </a:solidFill>
+                <a:latin typeface="Arial"/>
+              </a:defRPr>
+            </a:pPr>
+            <a:r>
+              <a:t>• Chưa kiểm chứng trên bộ pin xe thực tế tại Việt Nam</a:t>
+            </a:r>
+          </a:p>
+          <a:p>
+            <a:pPr>
+              <a:spcAft>
+                <a:spcPts val="1600"/>
+              </a:spcAft>
+              <a:defRPr sz="2400" b="0">
+                <a:solidFill>
+                  <a:srgbClr val="193431"/>
+                </a:solidFill>
+                <a:latin typeface="Arial"/>
+              </a:defRPr>
+            </a:pPr>
+            <a:r>
+              <a:t>• Mở rộng điều kiện vận hành, đánh giá độc lập và độ bất định</a:t>
+            </a:r>
+          </a:p>
+        </p:txBody>
+      </p:sp>
+      <p:sp>
+        <p:nvSpPr>
+          <p:cNvPr id="6" name="TextBox 5"/>
+          <p:cNvSpPr txBox="1"/>
+          <p:nvPr/>
+        </p:nvSpPr>
+        <p:spPr>
+          <a:xfrm>
+            <a:off x="594360" y="6446520"/>
+            <a:ext cx="10058400" cy="228600"/>
+          </a:xfrm>
+          <a:prstGeom prst="rect">
+            <a:avLst/>
+          </a:prstGeom>
+          <a:noFill/>
+        </p:spPr>
+        <p:txBody>
+          <a:bodyPr wrap="square">
+            <a:spAutoFit/>
+          </a:bodyPr>
+          <a:lstStyle/>
+          <a:p>
+            <a:pPr>
+              <a:spcAft>
+                <a:spcPts val="1600"/>
+              </a:spcAft>
+              <a:defRPr sz="1000" b="0">
+                <a:solidFill>
+                  <a:srgbClr val="60766D"/>
+                </a:solidFill>
+                <a:latin typeface="Arial"/>
+              </a:defRPr>
+            </a:pPr>
+            <a:r>
+              <a:t>Nguyễn Văn Duy · MSSV 2311553949 · Khoa Học Dữ Liệu</a:t>
+            </a:r>
+          </a:p>
+        </p:txBody>
+      </p:sp>
+      <p:sp>
+        <p:nvSpPr>
+          <p:cNvPr id="7" name="TextBox 6"/>
+          <p:cNvSpPr txBox="1"/>
+          <p:nvPr/>
+        </p:nvSpPr>
+        <p:spPr>
+          <a:xfrm>
+            <a:off x="10972800" y="6400800"/>
+            <a:ext cx="548640" cy="274320"/>
+          </a:xfrm>
+          <a:prstGeom prst="rect">
+            <a:avLst/>
+          </a:prstGeom>
+          <a:noFill/>
+        </p:spPr>
+        <p:txBody>
+          <a:bodyPr wrap="square">
+            <a:spAutoFit/>
+          </a:bodyPr>
+          <a:lstStyle/>
+          <a:p>
+            <a:pPr>
+              <a:spcAft>
+                <a:spcPts val="1600"/>
+              </a:spcAft>
+              <a:defRPr sz="1200" b="0">
+                <a:solidFill>
+                  <a:srgbClr val="087F70"/>
+                </a:solidFill>
+                <a:latin typeface="Arial"/>
+              </a:defRPr>
+            </a:pPr>
+            <a:r>
+              <a:t>19</a:t>
             </a:r>
           </a:p>
         </p:txBody>
@@ -6183,6 +6513,302 @@
             </a:pPr>
             <a:r>
               <a:t>02</a:t>
+            </a:r>
+          </a:p>
+        </p:txBody>
+      </p:sp>
+    </p:spTree>
+  </p:cSld>
+  <p:clrMapOvr>
+    <a:masterClrMapping/>
+  </p:clrMapOvr>
+</p:sld>
+</file>
+
+<file path=ppt/slides/slide20.xml><?xml version="1.0" encoding="utf-8"?>
+<p:sld xmlns:a="http://schemas.openxmlformats.org/drawingml/2006/main" xmlns:p="http://schemas.openxmlformats.org/presentationml/2006/main" xmlns:r="http://schemas.openxmlformats.org/officeDocument/2006/relationships">
+  <p:cSld>
+    <p:bg>
+      <p:bgPr>
+        <a:solidFill>
+          <a:srgbClr val="F6F8F3"/>
+        </a:solidFill>
+        <a:effectLst/>
+      </p:bgPr>
+    </p:bg>
+    <p:spTree>
+      <p:nvGrpSpPr>
+        <p:cNvPr id="1" name=""/>
+        <p:cNvGrpSpPr/>
+        <p:nvPr/>
+      </p:nvGrpSpPr>
+      <p:grpSpPr/>
+      <p:sp>
+        <p:nvSpPr>
+          <p:cNvPr id="2" name="Rectangle 1"/>
+          <p:cNvSpPr/>
+          <p:nvPr/>
+        </p:nvSpPr>
+        <p:spPr>
+          <a:xfrm>
+            <a:off x="0" y="0"/>
+            <a:ext cx="146304" cy="6858000"/>
+          </a:xfrm>
+          <a:prstGeom prst="rect">
+            <a:avLst/>
+          </a:prstGeom>
+          <a:solidFill>
+            <a:srgbClr val="087F70"/>
+          </a:solidFill>
+          <a:ln>
+            <a:noFill/>
+          </a:ln>
+        </p:spPr>
+        <p:style>
+          <a:lnRef idx="1">
+            <a:schemeClr val="accent1"/>
+          </a:lnRef>
+          <a:fillRef idx="3">
+            <a:schemeClr val="accent1"/>
+          </a:fillRef>
+          <a:effectRef idx="2">
+            <a:schemeClr val="accent1"/>
+          </a:effectRef>
+          <a:fontRef idx="minor">
+            <a:schemeClr val="lt1"/>
+          </a:fontRef>
+        </p:style>
+        <p:txBody>
+          <a:bodyPr rtlCol="0" anchor="ctr"/>
+          <a:lstStyle/>
+          <a:p>
+            <a:pPr algn="ctr"/>
+          </a:p>
+        </p:txBody>
+      </p:sp>
+      <p:sp>
+        <p:nvSpPr>
+          <p:cNvPr id="3" name="TextBox 2"/>
+          <p:cNvSpPr txBox="1"/>
+          <p:nvPr/>
+        </p:nvSpPr>
+        <p:spPr>
+          <a:xfrm>
+            <a:off x="594360" y="274320"/>
+            <a:ext cx="10972800" cy="365760"/>
+          </a:xfrm>
+          <a:prstGeom prst="rect">
+            <a:avLst/>
+          </a:prstGeom>
+          <a:noFill/>
+        </p:spPr>
+        <p:txBody>
+          <a:bodyPr wrap="square">
+            <a:spAutoFit/>
+          </a:bodyPr>
+          <a:lstStyle/>
+          <a:p>
+            <a:pPr>
+              <a:spcAft>
+                <a:spcPts val="1600"/>
+              </a:spcAft>
+              <a:defRPr sz="1200" b="1">
+                <a:solidFill>
+                  <a:srgbClr val="087F70"/>
+                </a:solidFill>
+                <a:latin typeface="Arial"/>
+              </a:defRPr>
+            </a:pPr>
+            <a:r>
+              <a:t>VINCENT D / NGHIÊN CỨU SỨC KHỎE PIN</a:t>
+            </a:r>
+          </a:p>
+        </p:txBody>
+      </p:sp>
+      <p:sp>
+        <p:nvSpPr>
+          <p:cNvPr id="4" name="TextBox 3"/>
+          <p:cNvSpPr txBox="1"/>
+          <p:nvPr/>
+        </p:nvSpPr>
+        <p:spPr>
+          <a:xfrm>
+            <a:off x="594360" y="868680"/>
+            <a:ext cx="10972800" cy="1188720"/>
+          </a:xfrm>
+          <a:prstGeom prst="rect">
+            <a:avLst/>
+          </a:prstGeom>
+          <a:noFill/>
+        </p:spPr>
+        <p:txBody>
+          <a:bodyPr wrap="square">
+            <a:spAutoFit/>
+          </a:bodyPr>
+          <a:lstStyle/>
+          <a:p>
+            <a:pPr>
+              <a:spcAft>
+                <a:spcPts val="1600"/>
+              </a:spcAft>
+              <a:defRPr sz="3200" b="1">
+                <a:solidFill>
+                  <a:srgbClr val="193431"/>
+                </a:solidFill>
+                <a:latin typeface="Arial"/>
+              </a:defRPr>
+            </a:pPr>
+            <a:r>
+              <a:t>Tài liệu và sản phẩm bàn giao</a:t>
+            </a:r>
+          </a:p>
+        </p:txBody>
+      </p:sp>
+      <p:sp>
+        <p:nvSpPr>
+          <p:cNvPr id="5" name="TextBox 4"/>
+          <p:cNvSpPr txBox="1"/>
+          <p:nvPr/>
+        </p:nvSpPr>
+        <p:spPr>
+          <a:xfrm>
+            <a:off x="777240" y="2286000"/>
+            <a:ext cx="10789920" cy="3383280"/>
+          </a:xfrm>
+          <a:prstGeom prst="rect">
+            <a:avLst/>
+          </a:prstGeom>
+          <a:noFill/>
+        </p:spPr>
+        <p:txBody>
+          <a:bodyPr wrap="square">
+            <a:spAutoFit/>
+          </a:bodyPr>
+          <a:lstStyle/>
+          <a:p>
+            <a:pPr>
+              <a:spcAft>
+                <a:spcPts val="1600"/>
+              </a:spcAft>
+              <a:defRPr sz="2400" b="0">
+                <a:solidFill>
+                  <a:srgbClr val="193431"/>
+                </a:solidFill>
+                <a:latin typeface="Arial"/>
+              </a:defRPr>
+            </a:pPr>
+            <a:r>
+              <a:t>• Mã nguồn, mô hình, bảng đặc trưng và dữ liệu nguồn</a:t>
+            </a:r>
+          </a:p>
+          <a:p>
+            <a:pPr>
+              <a:spcAft>
+                <a:spcPts val="1600"/>
+              </a:spcAft>
+              <a:defRPr sz="2400" b="0">
+                <a:solidFill>
+                  <a:srgbClr val="193431"/>
+                </a:solidFill>
+                <a:latin typeface="Arial"/>
+              </a:defRPr>
+            </a:pPr>
+            <a:r>
+              <a:t>• Notebook đã chạy, CSV thực nghiệm và biểu đồ</a:t>
+            </a:r>
+          </a:p>
+          <a:p>
+            <a:pPr>
+              <a:spcAft>
+                <a:spcPts val="1600"/>
+              </a:spcAft>
+              <a:defRPr sz="2400" b="0">
+                <a:solidFill>
+                  <a:srgbClr val="193431"/>
+                </a:solidFill>
+                <a:latin typeface="Arial"/>
+              </a:defRPr>
+            </a:pPr>
+            <a:r>
+              <a:t>• Báo cáo Word/PDF, slide và hồ sơ trích dẫn</a:t>
+            </a:r>
+          </a:p>
+        </p:txBody>
+      </p:sp>
+      <p:sp>
+        <p:nvSpPr>
+          <p:cNvPr id="6" name="TextBox 5"/>
+          <p:cNvSpPr txBox="1"/>
+          <p:nvPr/>
+        </p:nvSpPr>
+        <p:spPr>
+          <a:xfrm>
+            <a:off x="594360" y="6446520"/>
+            <a:ext cx="10058400" cy="228600"/>
+          </a:xfrm>
+          <a:prstGeom prst="rect">
+            <a:avLst/>
+          </a:prstGeom>
+          <a:noFill/>
+        </p:spPr>
+        <p:txBody>
+          <a:bodyPr wrap="square">
+            <a:spAutoFit/>
+          </a:bodyPr>
+          <a:lstStyle/>
+          <a:p>
+            <a:pPr>
+              <a:spcAft>
+                <a:spcPts val="1600"/>
+              </a:spcAft>
+              <a:defRPr sz="1000" b="0">
+                <a:solidFill>
+                  <a:srgbClr val="60766D"/>
+                </a:solidFill>
+                <a:latin typeface="Arial"/>
+              </a:defRPr>
+            </a:pPr>
+            <a:r>
+              <a:t>Nguyễn Văn Duy · MSSV 2311553949 · Khoa Học Dữ Liệu</a:t>
+            </a:r>
+          </a:p>
+        </p:txBody>
+      </p:sp>
+      <p:sp>
+        <p:nvSpPr>
+          <p:cNvPr id="7" name="TextBox 6"/>
+          <p:cNvSpPr txBox="1"/>
+          <p:nvPr/>
+        </p:nvSpPr>
+        <p:spPr>
+          <a:xfrm>
+            <a:off x="10972800" y="6400800"/>
+            <a:ext cx="548640" cy="274320"/>
+          </a:xfrm>
+          <a:prstGeom prst="rect">
+            <a:avLst/>
+          </a:prstGeom>
+          <a:noFill/>
+        </p:spPr>
+        <p:txBody>
+          <a:bodyPr wrap="square">
+            <a:spAutoFit/>
+          </a:bodyPr>
+          <a:lstStyle/>
+          <a:p>
+            <a:pPr>
+              <a:spcAft>
+                <a:spcPts val="1600"/>
+              </a:spcAft>
+              <a:defRPr sz="1200" b="0">
+                <a:solidFill>
+                  <a:srgbClr val="087F70"/>
+                </a:solidFill>
+                <a:latin typeface="Arial"/>
+              </a:defRPr>
+            </a:pPr>
+            <a:r>
+              <a:t>20</a:t>
             </a:r>
           </a:p>
         </p:txBody>

--- a/docs/slide-bao-ve.pptx
+++ b/docs/slide-bao-ve.pptx
@@ -25,6 +25,7 @@
     <p:sldId id="273" r:id="rId24"/>
     <p:sldId id="274" r:id="rId25"/>
     <p:sldId id="275" r:id="rId26"/>
+    <p:sldId id="276" r:id="rId27"/>
   </p:sldIdLst>
   <p:sldSz cx="12191695" cy="6858000" type="screen4x3"/>
   <p:notesSz cx="6858000" cy="9144000"/>
@@ -6067,7 +6068,7 @@
               </a:defRPr>
             </a:pPr>
             <a:r>
-              <a:t>Kết luận và hướng phát triển</a:t>
+              <a:t>Thực nghiệm nguồn XJTU độc lập</a:t>
             </a:r>
           </a:p>
         </p:txBody>
@@ -6106,7 +6107,7 @@
               </a:defRPr>
             </a:pPr>
             <a:r>
-              <a:t>• Hoàn thành quy trình dữ liệu → mô hình → ứng dụng</a:t>
+              <a:t>• 23 pin Lishen NCM 2 Ah; Batch-1/2, giữ riêng pin</a:t>
             </a:r>
           </a:p>
           <a:p>
@@ -6122,7 +6123,7 @@
               </a:defRPr>
             </a:pPr>
             <a:r>
-              <a:t>• Chưa kiểm chứng trên bộ pin xe thực tế tại Việt Nam</a:t>
+              <a:t>• RF: MAE 0.577; RMSE 0.764; R² 0.965</a:t>
             </a:r>
           </a:p>
           <a:p>
@@ -6138,7 +6139,23 @@
               </a:defRPr>
             </a:pPr>
             <a:r>
-              <a:t>• Mở rộng điều kiện vận hành, đánh giá độc lập và độ bất định</a:t>
+              <a:t>• So sánh RF đa nguồn và chuyển miền SDU → XJTU</a:t>
+            </a:r>
+          </a:p>
+          <a:p>
+            <a:pPr>
+              <a:spcAft>
+                <a:spcPts val="1600"/>
+              </a:spcAft>
+              <a:defRPr sz="2400" b="0">
+                <a:solidFill>
+                  <a:srgbClr val="193431"/>
+                </a:solidFill>
+                <a:latin typeface="Arial"/>
+              </a:defRPr>
+            </a:pPr>
+            <a:r>
+              <a:t>• Dữ liệu phòng lab; chưa kiểm chứng BMS trên xe</a:t>
             </a:r>
           </a:p>
         </p:txBody>
@@ -6659,7 +6676,7 @@
               </a:defRPr>
             </a:pPr>
             <a:r>
-              <a:t>Tài liệu và sản phẩm bàn giao</a:t>
+              <a:t>Kết luận và hướng phát triển</a:t>
             </a:r>
           </a:p>
         </p:txBody>
@@ -6698,7 +6715,7 @@
               </a:defRPr>
             </a:pPr>
             <a:r>
-              <a:t>• Mã nguồn, mô hình, bảng đặc trưng và dữ liệu nguồn</a:t>
+              <a:t>• Hoàn thành quy trình dữ liệu → mô hình → ứng dụng</a:t>
             </a:r>
           </a:p>
           <a:p>
@@ -6714,7 +6731,7 @@
               </a:defRPr>
             </a:pPr>
             <a:r>
-              <a:t>• Notebook đã chạy, CSV thực nghiệm và biểu đồ</a:t>
+              <a:t>• Chưa kiểm chứng trên bộ pin xe thực tế tại Việt Nam</a:t>
             </a:r>
           </a:p>
           <a:p>
@@ -6730,7 +6747,7 @@
               </a:defRPr>
             </a:pPr>
             <a:r>
-              <a:t>• Báo cáo Word/PDF, slide và hồ sơ trích dẫn</a:t>
+              <a:t>• Mở rộng điều kiện vận hành, đánh giá độc lập và độ bất định</a:t>
             </a:r>
           </a:p>
         </p:txBody>
@@ -6809,6 +6826,302 @@
             </a:pPr>
             <a:r>
               <a:t>20</a:t>
+            </a:r>
+          </a:p>
+        </p:txBody>
+      </p:sp>
+    </p:spTree>
+  </p:cSld>
+  <p:clrMapOvr>
+    <a:masterClrMapping/>
+  </p:clrMapOvr>
+</p:sld>
+</file>
+
+<file path=ppt/slides/slide21.xml><?xml version="1.0" encoding="utf-8"?>
+<p:sld xmlns:a="http://schemas.openxmlformats.org/drawingml/2006/main" xmlns:p="http://schemas.openxmlformats.org/presentationml/2006/main" xmlns:r="http://schemas.openxmlformats.org/officeDocument/2006/relationships">
+  <p:cSld>
+    <p:bg>
+      <p:bgPr>
+        <a:solidFill>
+          <a:srgbClr val="F6F8F3"/>
+        </a:solidFill>
+        <a:effectLst/>
+      </p:bgPr>
+    </p:bg>
+    <p:spTree>
+      <p:nvGrpSpPr>
+        <p:cNvPr id="1" name=""/>
+        <p:cNvGrpSpPr/>
+        <p:nvPr/>
+      </p:nvGrpSpPr>
+      <p:grpSpPr/>
+      <p:sp>
+        <p:nvSpPr>
+          <p:cNvPr id="2" name="Rectangle 1"/>
+          <p:cNvSpPr/>
+          <p:nvPr/>
+        </p:nvSpPr>
+        <p:spPr>
+          <a:xfrm>
+            <a:off x="0" y="0"/>
+            <a:ext cx="146304" cy="6858000"/>
+          </a:xfrm>
+          <a:prstGeom prst="rect">
+            <a:avLst/>
+          </a:prstGeom>
+          <a:solidFill>
+            <a:srgbClr val="087F70"/>
+          </a:solidFill>
+          <a:ln>
+            <a:noFill/>
+          </a:ln>
+        </p:spPr>
+        <p:style>
+          <a:lnRef idx="1">
+            <a:schemeClr val="accent1"/>
+          </a:lnRef>
+          <a:fillRef idx="3">
+            <a:schemeClr val="accent1"/>
+          </a:fillRef>
+          <a:effectRef idx="2">
+            <a:schemeClr val="accent1"/>
+          </a:effectRef>
+          <a:fontRef idx="minor">
+            <a:schemeClr val="lt1"/>
+          </a:fontRef>
+        </p:style>
+        <p:txBody>
+          <a:bodyPr rtlCol="0" anchor="ctr"/>
+          <a:lstStyle/>
+          <a:p>
+            <a:pPr algn="ctr"/>
+          </a:p>
+        </p:txBody>
+      </p:sp>
+      <p:sp>
+        <p:nvSpPr>
+          <p:cNvPr id="3" name="TextBox 2"/>
+          <p:cNvSpPr txBox="1"/>
+          <p:nvPr/>
+        </p:nvSpPr>
+        <p:spPr>
+          <a:xfrm>
+            <a:off x="594360" y="274320"/>
+            <a:ext cx="10972800" cy="365760"/>
+          </a:xfrm>
+          <a:prstGeom prst="rect">
+            <a:avLst/>
+          </a:prstGeom>
+          <a:noFill/>
+        </p:spPr>
+        <p:txBody>
+          <a:bodyPr wrap="square">
+            <a:spAutoFit/>
+          </a:bodyPr>
+          <a:lstStyle/>
+          <a:p>
+            <a:pPr>
+              <a:spcAft>
+                <a:spcPts val="1600"/>
+              </a:spcAft>
+              <a:defRPr sz="1200" b="1">
+                <a:solidFill>
+                  <a:srgbClr val="087F70"/>
+                </a:solidFill>
+                <a:latin typeface="Arial"/>
+              </a:defRPr>
+            </a:pPr>
+            <a:r>
+              <a:t>VINCENT D / NGHIÊN CỨU SỨC KHỎE PIN</a:t>
+            </a:r>
+          </a:p>
+        </p:txBody>
+      </p:sp>
+      <p:sp>
+        <p:nvSpPr>
+          <p:cNvPr id="4" name="TextBox 3"/>
+          <p:cNvSpPr txBox="1"/>
+          <p:nvPr/>
+        </p:nvSpPr>
+        <p:spPr>
+          <a:xfrm>
+            <a:off x="594360" y="868680"/>
+            <a:ext cx="10972800" cy="1188720"/>
+          </a:xfrm>
+          <a:prstGeom prst="rect">
+            <a:avLst/>
+          </a:prstGeom>
+          <a:noFill/>
+        </p:spPr>
+        <p:txBody>
+          <a:bodyPr wrap="square">
+            <a:spAutoFit/>
+          </a:bodyPr>
+          <a:lstStyle/>
+          <a:p>
+            <a:pPr>
+              <a:spcAft>
+                <a:spcPts val="1600"/>
+              </a:spcAft>
+              <a:defRPr sz="3200" b="1">
+                <a:solidFill>
+                  <a:srgbClr val="193431"/>
+                </a:solidFill>
+                <a:latin typeface="Arial"/>
+              </a:defRPr>
+            </a:pPr>
+            <a:r>
+              <a:t>Tài liệu và sản phẩm bàn giao</a:t>
+            </a:r>
+          </a:p>
+        </p:txBody>
+      </p:sp>
+      <p:sp>
+        <p:nvSpPr>
+          <p:cNvPr id="5" name="TextBox 4"/>
+          <p:cNvSpPr txBox="1"/>
+          <p:nvPr/>
+        </p:nvSpPr>
+        <p:spPr>
+          <a:xfrm>
+            <a:off x="777240" y="2286000"/>
+            <a:ext cx="10789920" cy="3383280"/>
+          </a:xfrm>
+          <a:prstGeom prst="rect">
+            <a:avLst/>
+          </a:prstGeom>
+          <a:noFill/>
+        </p:spPr>
+        <p:txBody>
+          <a:bodyPr wrap="square">
+            <a:spAutoFit/>
+          </a:bodyPr>
+          <a:lstStyle/>
+          <a:p>
+            <a:pPr>
+              <a:spcAft>
+                <a:spcPts val="1600"/>
+              </a:spcAft>
+              <a:defRPr sz="2400" b="0">
+                <a:solidFill>
+                  <a:srgbClr val="193431"/>
+                </a:solidFill>
+                <a:latin typeface="Arial"/>
+              </a:defRPr>
+            </a:pPr>
+            <a:r>
+              <a:t>• Mã nguồn, mô hình, bảng đặc trưng và dữ liệu nguồn</a:t>
+            </a:r>
+          </a:p>
+          <a:p>
+            <a:pPr>
+              <a:spcAft>
+                <a:spcPts val="1600"/>
+              </a:spcAft>
+              <a:defRPr sz="2400" b="0">
+                <a:solidFill>
+                  <a:srgbClr val="193431"/>
+                </a:solidFill>
+                <a:latin typeface="Arial"/>
+              </a:defRPr>
+            </a:pPr>
+            <a:r>
+              <a:t>• Notebook đã chạy, CSV thực nghiệm và biểu đồ</a:t>
+            </a:r>
+          </a:p>
+          <a:p>
+            <a:pPr>
+              <a:spcAft>
+                <a:spcPts val="1600"/>
+              </a:spcAft>
+              <a:defRPr sz="2400" b="0">
+                <a:solidFill>
+                  <a:srgbClr val="193431"/>
+                </a:solidFill>
+                <a:latin typeface="Arial"/>
+              </a:defRPr>
+            </a:pPr>
+            <a:r>
+              <a:t>• Báo cáo Word/PDF, slide và hồ sơ trích dẫn</a:t>
+            </a:r>
+          </a:p>
+        </p:txBody>
+      </p:sp>
+      <p:sp>
+        <p:nvSpPr>
+          <p:cNvPr id="6" name="TextBox 5"/>
+          <p:cNvSpPr txBox="1"/>
+          <p:nvPr/>
+        </p:nvSpPr>
+        <p:spPr>
+          <a:xfrm>
+            <a:off x="594360" y="6446520"/>
+            <a:ext cx="10058400" cy="228600"/>
+          </a:xfrm>
+          <a:prstGeom prst="rect">
+            <a:avLst/>
+          </a:prstGeom>
+          <a:noFill/>
+        </p:spPr>
+        <p:txBody>
+          <a:bodyPr wrap="square">
+            <a:spAutoFit/>
+          </a:bodyPr>
+          <a:lstStyle/>
+          <a:p>
+            <a:pPr>
+              <a:spcAft>
+                <a:spcPts val="1600"/>
+              </a:spcAft>
+              <a:defRPr sz="1000" b="0">
+                <a:solidFill>
+                  <a:srgbClr val="60766D"/>
+                </a:solidFill>
+                <a:latin typeface="Arial"/>
+              </a:defRPr>
+            </a:pPr>
+            <a:r>
+              <a:t>Nguyễn Văn Duy · MSSV 2311553949 · Khoa Học Dữ Liệu</a:t>
+            </a:r>
+          </a:p>
+        </p:txBody>
+      </p:sp>
+      <p:sp>
+        <p:nvSpPr>
+          <p:cNvPr id="7" name="TextBox 6"/>
+          <p:cNvSpPr txBox="1"/>
+          <p:nvPr/>
+        </p:nvSpPr>
+        <p:spPr>
+          <a:xfrm>
+            <a:off x="10972800" y="6400800"/>
+            <a:ext cx="548640" cy="274320"/>
+          </a:xfrm>
+          <a:prstGeom prst="rect">
+            <a:avLst/>
+          </a:prstGeom>
+          <a:noFill/>
+        </p:spPr>
+        <p:txBody>
+          <a:bodyPr wrap="square">
+            <a:spAutoFit/>
+          </a:bodyPr>
+          <a:lstStyle/>
+          <a:p>
+            <a:pPr>
+              <a:spcAft>
+                <a:spcPts val="1600"/>
+              </a:spcAft>
+              <a:defRPr sz="1200" b="0">
+                <a:solidFill>
+                  <a:srgbClr val="087F70"/>
+                </a:solidFill>
+                <a:latin typeface="Arial"/>
+              </a:defRPr>
+            </a:pPr>
+            <a:r>
+              <a:t>21</a:t>
             </a:r>
           </a:p>
         </p:txBody>
